--- a/slide/LPNVi_LONG_PRODUCTION_NAME_VIETNAMESE.pptx
+++ b/slide/LPNVi_LONG_PRODUCTION_NAME_VIETNAMESE.pptx
@@ -14,9 +14,10 @@
     <p:sldId id="309" r:id="rId5"/>
     <p:sldId id="311" r:id="rId6"/>
     <p:sldId id="319" r:id="rId8"/>
+    <p:sldId id="325" r:id="rId24"/>
+    <p:sldId id="324" r:id="rId23"/>
+    <p:sldId id="323" r:id="rId22"/>
     <p:sldId id="322" r:id="rId21"/>
-    <p:sldId id="321" r:id="rId10"/>
-    <p:sldId id="323" r:id="rId22"/>
     <p:sldId id="274" r:id="rId11"/>
     <p:sldId id="313" r:id="rId12"/>
   </p:sldIdLst>
@@ -15273,7 +15274,7 @@
           <a:noFill/>
         </p:spPr>
         <p:txBody>
-          <a:bodyPr wrap="none" lIns="0" rIns="0" tIns="0" bIns="0" anchor="t">
+          <a:bodyPr wrap="none" lIns="0" rIns="0" tIns="0" bIns="0">
             <a:spAutoFit/>
           </a:bodyPr>
           <a:lstStyle/>
@@ -15358,7 +15359,7 @@
                   <a:schemeClr val="tx1"/>
                 </a:solidFill>
               </a:rPr>
-              <a:t>Solution Overview</a:t>
+              <a:t>Tổng quan giải pháp</a:t>
             </a:r>
           </a:p>
         </p:txBody>
@@ -15992,7 +15993,7 @@
                 </a:solidFill>
                 <a:latin typeface="Calibri"/>
               </a:rPr>
-              <a:t>Mat. Desc + INSP text</a:t>
+              <a:t>Ghép Mat. Desc + INSP</a:t>
             </a:r>
           </a:p>
         </p:txBody>
@@ -16299,7 +16300,7 @@
                 </a:solidFill>
                 <a:latin typeface="Calibri"/>
               </a:rPr>
-              <a:t>Delivery</a:t>
+              <a:t>Chứng từ</a:t>
             </a:r>
             <a:br/>
             <a:r>
@@ -16309,7 +16310,7 @@
                 </a:solidFill>
                 <a:latin typeface="Calibri"/>
               </a:rPr>
-              <a:t>Forms</a:t>
+              <a:t>kho / giao nhận</a:t>
             </a:r>
           </a:p>
         </p:txBody>
@@ -16651,7 +16652,7 @@
                 </a:solidFill>
                 <a:latin typeface="Calibri"/>
               </a:rPr>
-              <a:t>E-Invoice</a:t>
+              <a:t>Hóa đơn</a:t>
             </a:r>
             <a:br/>
             <a:r>
@@ -16661,7 +16662,7 @@
                 </a:solidFill>
                 <a:latin typeface="Calibri"/>
               </a:rPr>
-              <a:t>Display</a:t>
+              <a:t>điện tử</a:t>
             </a:r>
           </a:p>
         </p:txBody>
@@ -16702,7 +16703,7 @@
                 </a:solidFill>
                 <a:latin typeface="Calibri"/>
               </a:rPr>
-              <a:t>Separator "| " on EIV</a:t>
+              <a:t>Tách separator "| "</a:t>
             </a:r>
           </a:p>
         </p:txBody>
@@ -16792,7 +16793,7 @@
                 </a:solidFill>
                 <a:latin typeface="Calibri"/>
               </a:rPr>
-              <a:t>Scope: all BU nationwide  —  logic priority CMIR › MG0156 › INSP.</a:t>
+              <a:t>Phạm vi: all BU nationwide  —  thứ tự ưu tiên CMIR › MG0156 › INSP.</a:t>
             </a:r>
           </a:p>
         </p:txBody>
@@ -16918,7 +16919,7 @@
                   <a:schemeClr val="tx1"/>
                 </a:solidFill>
               </a:rPr>
-              <a:t>Hiện trạng – Current limitation</a:t>
+              <a:t>Hiện trạng</a:t>
             </a:r>
           </a:p>
         </p:txBody>
@@ -16959,283 +16960,393 @@
       </p:sp>
       <p:sp>
         <p:nvSpPr>
-          <p:cNvPr id="5" name="Subtitle 2">
-            <a:extLst>
-              <a:ext uri="{FF2B5EF4-FFF2-40B4-BE49-F238E27FC236}">
-                <a16:creationId xmlns:a16="http://schemas.microsoft.com/office/drawing/2014/main" id="{73B36D05-A0DC-E96E-C0B3-3D162E2B34C4}"/>
-              </a:ext>
-            </a:extLst>
-          </p:cNvPr>
-          <p:cNvSpPr txBox="1">
-            <a:spLocks/>
-          </p:cNvSpPr>
+          <p:cNvPr id="4" name="Rounded Rectangle 3"/>
+          <p:cNvSpPr/>
           <p:nvPr/>
         </p:nvSpPr>
         <p:spPr>
           <a:xfrm>
-            <a:off x="1122977" y="2141550"/>
-            <a:ext cx="7040880" cy="3750095"/>
+            <a:off x="777240" y="1993391"/>
+            <a:ext cx="310896" cy="310896"/>
+          </a:xfrm>
+          <a:prstGeom prst="roundRect">
+            <a:avLst>
+              <a:gd name="adj" fmla="val 18000"/>
+            </a:avLst>
+          </a:prstGeom>
+          <a:solidFill>
+            <a:srgbClr val="BE0028"/>
+          </a:solidFill>
+          <a:ln>
+            <a:noFill/>
+          </a:ln>
+          <a:effectLst/>
+        </p:spPr>
+        <p:style>
+          <a:lnRef idx="1">
+            <a:schemeClr val="accent1"/>
+          </a:lnRef>
+          <a:fillRef idx="3">
+            <a:schemeClr val="accent1"/>
+          </a:fillRef>
+          <a:effectRef idx="2">
+            <a:schemeClr val="accent1"/>
+          </a:effectRef>
+          <a:fontRef idx="minor">
+            <a:schemeClr val="lt1"/>
+          </a:fontRef>
+        </p:style>
+        <p:txBody>
+          <a:bodyPr rtlCol="0" anchor="ctr" lIns="0" rIns="0" tIns="0" bIns="0"/>
+          <a:lstStyle/>
+          <a:p>
+            <a:pPr algn="ctr"/>
+            <a:r>
+              <a:rPr sz="1300" b="1">
+                <a:solidFill>
+                  <a:srgbClr val="FFFFFF"/>
+                </a:solidFill>
+                <a:latin typeface="Arial"/>
+              </a:rPr>
+              <a:t>1</a:t>
+            </a:r>
+          </a:p>
+        </p:txBody>
+      </p:sp>
+      <p:sp>
+        <p:nvSpPr>
+          <p:cNvPr id="5" name="TextBox 4"/>
+          <p:cNvSpPr txBox="1"/>
+          <p:nvPr/>
+        </p:nvSpPr>
+        <p:spPr>
+          <a:xfrm>
+            <a:off x="1252728" y="1965960"/>
+            <a:ext cx="4553712" cy="292608"/>
           </a:xfrm>
           <a:prstGeom prst="rect">
             <a:avLst/>
           </a:prstGeom>
-        </p:spPr>
-        <p:txBody>
-          <a:bodyPr vert="horz" wrap="square" lIns="91440" tIns="45720" rIns="91440" bIns="45720" rtlCol="0" anchor="ctr" anchorCtr="0">
-            <a:normAutofit lnSpcReduction="10000"/>
+          <a:noFill/>
+        </p:spPr>
+        <p:txBody>
+          <a:bodyPr wrap="square" lIns="0" rIns="0" tIns="0" bIns="0" anchor="t">
+            <a:spAutoFit/>
           </a:bodyPr>
-          <a:lstStyle>
-            <a:lvl1pPr marL="0" indent="0" algn="l" defTabSz="914400" rtl="0" eaLnBrk="1" latinLnBrk="0" hangingPunct="1">
-              <a:lnSpc>
-                <a:spcPct val="120000"/>
-              </a:lnSpc>
-              <a:spcBef>
-                <a:spcPts val="0"/>
-              </a:spcBef>
-              <a:buFont typeface="Arial" panose="020B0604020202020204" pitchFamily="34" charset="0"/>
-              <a:buNone/>
-              <a:defRPr sz="1600" kern="1200">
-                <a:solidFill>
-                  <a:schemeClr val="tx1"/>
-                </a:solidFill>
-                <a:latin typeface="+mn-lt"/>
-                <a:ea typeface="+mn-ea"/>
-                <a:cs typeface="+mn-cs"/>
-              </a:defRPr>
-            </a:lvl1pPr>
-            <a:lvl2pPr marL="180000" indent="-180000" algn="l" defTabSz="914400" rtl="0" eaLnBrk="1" latinLnBrk="0" hangingPunct="1">
-              <a:lnSpc>
-                <a:spcPct val="120000"/>
-              </a:lnSpc>
-              <a:spcBef>
-                <a:spcPts val="0"/>
-              </a:spcBef>
-              <a:buFont typeface="Arial" panose="020B0604020202020204" pitchFamily="34" charset="0"/>
-              <a:buChar char="•"/>
-              <a:defRPr sz="1600" kern="1200">
-                <a:solidFill>
-                  <a:schemeClr val="tx1"/>
-                </a:solidFill>
-                <a:latin typeface="+mn-lt"/>
-                <a:ea typeface="+mn-ea"/>
-                <a:cs typeface="+mn-cs"/>
-              </a:defRPr>
-            </a:lvl2pPr>
-            <a:lvl3pPr marL="360000" indent="-180000" algn="l" defTabSz="914400" rtl="0" eaLnBrk="1" latinLnBrk="0" hangingPunct="1">
-              <a:lnSpc>
-                <a:spcPct val="120000"/>
-              </a:lnSpc>
-              <a:spcBef>
-                <a:spcPts val="0"/>
-              </a:spcBef>
-              <a:buFont typeface="Arial" panose="020B0604020202020204" pitchFamily="34" charset="0"/>
-              <a:buChar char="‒"/>
-              <a:defRPr sz="1600" kern="1200">
-                <a:solidFill>
-                  <a:schemeClr val="tx1"/>
-                </a:solidFill>
-                <a:latin typeface="+mn-lt"/>
-                <a:ea typeface="+mn-ea"/>
-                <a:cs typeface="+mn-cs"/>
-              </a:defRPr>
-            </a:lvl3pPr>
-            <a:lvl4pPr marL="540000" indent="-180000" algn="l" defTabSz="914400" rtl="0" eaLnBrk="1" latinLnBrk="0" hangingPunct="1">
-              <a:lnSpc>
-                <a:spcPct val="120000"/>
-              </a:lnSpc>
-              <a:spcBef>
-                <a:spcPts val="0"/>
-              </a:spcBef>
-              <a:buFont typeface="Arial" panose="020B0604020202020204" pitchFamily="34" charset="0"/>
-              <a:buChar char="‒"/>
-              <a:defRPr sz="1600" kern="1200">
-                <a:solidFill>
-                  <a:schemeClr val="tx1"/>
-                </a:solidFill>
-                <a:latin typeface="+mn-lt"/>
-                <a:ea typeface="+mn-ea"/>
-                <a:cs typeface="+mn-cs"/>
-              </a:defRPr>
-            </a:lvl4pPr>
-            <a:lvl5pPr marL="720000" indent="-180000" algn="l" defTabSz="914400" rtl="0" eaLnBrk="1" latinLnBrk="0" hangingPunct="1">
-              <a:lnSpc>
-                <a:spcPct val="120000"/>
-              </a:lnSpc>
-              <a:spcBef>
-                <a:spcPts val="0"/>
-              </a:spcBef>
-              <a:buFont typeface="Arial" panose="020B0604020202020204" pitchFamily="34" charset="0"/>
-              <a:buChar char="‒"/>
-              <a:defRPr sz="1600" kern="1200">
-                <a:solidFill>
-                  <a:schemeClr val="tx1"/>
-                </a:solidFill>
-                <a:latin typeface="+mn-lt"/>
-                <a:ea typeface="+mn-ea"/>
-                <a:cs typeface="+mn-cs"/>
-              </a:defRPr>
-            </a:lvl5pPr>
-            <a:lvl6pPr marL="900000" indent="-180000" algn="l" defTabSz="914400" rtl="0" eaLnBrk="1" latinLnBrk="0" hangingPunct="1">
-              <a:lnSpc>
-                <a:spcPct val="120000"/>
-              </a:lnSpc>
-              <a:spcBef>
-                <a:spcPts val="0"/>
-              </a:spcBef>
-              <a:buFont typeface="Arial" panose="020B0604020202020204" pitchFamily="34" charset="0"/>
-              <a:buChar char="‒"/>
-              <a:defRPr sz="1600" kern="1200">
-                <a:solidFill>
-                  <a:schemeClr val="tx1"/>
-                </a:solidFill>
-                <a:latin typeface="+mn-lt"/>
-                <a:ea typeface="+mn-ea"/>
-                <a:cs typeface="+mn-cs"/>
-              </a:defRPr>
-            </a:lvl6pPr>
-            <a:lvl7pPr marL="1080000" indent="-180000" algn="l" defTabSz="914400" rtl="0" eaLnBrk="1" latinLnBrk="0" hangingPunct="1">
-              <a:lnSpc>
-                <a:spcPct val="120000"/>
-              </a:lnSpc>
-              <a:spcBef>
-                <a:spcPts val="0"/>
-              </a:spcBef>
-              <a:buFont typeface="Arial" panose="020B0604020202020204" pitchFamily="34" charset="0"/>
-              <a:buChar char="‒"/>
-              <a:defRPr sz="1600" kern="1200">
-                <a:solidFill>
-                  <a:schemeClr val="tx1"/>
-                </a:solidFill>
-                <a:latin typeface="+mn-lt"/>
-                <a:ea typeface="+mn-ea"/>
-                <a:cs typeface="+mn-cs"/>
-              </a:defRPr>
-            </a:lvl7pPr>
-            <a:lvl8pPr marL="1260000" indent="-180000" algn="l" defTabSz="914400" rtl="0" eaLnBrk="1" latinLnBrk="0" hangingPunct="1">
-              <a:lnSpc>
-                <a:spcPct val="120000"/>
-              </a:lnSpc>
-              <a:spcBef>
-                <a:spcPts val="0"/>
-              </a:spcBef>
-              <a:buFont typeface="Arial" panose="020B0604020202020204" pitchFamily="34" charset="0"/>
-              <a:buChar char="‒"/>
-              <a:defRPr sz="1600" kern="1200">
-                <a:solidFill>
-                  <a:schemeClr val="tx1"/>
-                </a:solidFill>
-                <a:latin typeface="+mn-lt"/>
-                <a:ea typeface="+mn-ea"/>
-                <a:cs typeface="+mn-cs"/>
-              </a:defRPr>
-            </a:lvl8pPr>
-            <a:lvl9pPr marL="1440000" indent="-180000" algn="l" defTabSz="914400" rtl="0" eaLnBrk="1" latinLnBrk="0" hangingPunct="1">
-              <a:lnSpc>
-                <a:spcPct val="120000"/>
-              </a:lnSpc>
-              <a:spcBef>
-                <a:spcPts val="0"/>
-              </a:spcBef>
-              <a:buFont typeface="Arial" panose="020B0604020202020204" pitchFamily="34" charset="0"/>
-              <a:buChar char="‒"/>
-              <a:defRPr sz="1600" kern="1200">
-                <a:solidFill>
-                  <a:schemeClr val="tx1"/>
-                </a:solidFill>
-                <a:latin typeface="+mn-lt"/>
-                <a:ea typeface="+mn-ea"/>
-                <a:cs typeface="+mn-cs"/>
-              </a:defRPr>
-            </a:lvl9pPr>
-          </a:lstStyle>
-          <a:p>
-            <a:pPr marL="685800" lvl="1" indent="-457200">
-              <a:lnSpc>
-                <a:spcPct val="90000"/>
-              </a:lnSpc>
-              <a:spcAft>
-                <a:spcPts val="600"/>
-              </a:spcAft>
-              <a:buFont typeface="Wingdings" panose="05000000000000000000" pitchFamily="2" charset="2"/>
-              <a:buChar char="q"/>
-            </a:pPr>
-            <a:r>
-              <a:rPr lang="en-US" sz="2200" dirty="0"/>
-              <a:t>Field Mat. Desc is limited to 40 characters — too short for long product names.</a:t>
-            </a:r>
-          </a:p>
-          <a:p>
-            <a:pPr marL="685800" lvl="1" indent="-457200">
-              <a:lnSpc>
-                <a:spcPct val="90000"/>
-              </a:lnSpc>
-              <a:spcAft>
-                <a:spcPts val="600"/>
-              </a:spcAft>
-              <a:buFont typeface="Wingdings" panose="05000000000000000000" pitchFamily="2" charset="2"/>
-              <a:buChar char="q"/>
-            </a:pPr>
-          </a:p>
-          <a:p>
-            <a:pPr marL="685800" lvl="1" indent="-457200">
-              <a:lnSpc>
-                <a:spcPct val="90000"/>
-              </a:lnSpc>
-              <a:spcAft>
-                <a:spcPts val="600"/>
-              </a:spcAft>
-              <a:buFont typeface="Wingdings" panose="05000000000000000000" pitchFamily="2" charset="2"/>
-              <a:buChar char="q"/>
-            </a:pPr>
-            <a:r>
-              <a:rPr lang="en-US" sz="2200" dirty="0"/>
-              <a:t>Custom logic already enhanced: CMIR for Tender, Basis Text for MG0156.</a:t>
-            </a:r>
-          </a:p>
-          <a:p>
-            <a:pPr marL="685800" lvl="1" indent="-457200">
-              <a:lnSpc>
-                <a:spcPct val="90000"/>
-              </a:lnSpc>
-              <a:spcAft>
-                <a:spcPts val="600"/>
-              </a:spcAft>
-              <a:buFont typeface="Wingdings" panose="05000000000000000000" pitchFamily="2" charset="2"/>
-              <a:buChar char="q"/>
-            </a:pPr>
-          </a:p>
-          <a:p>
-            <a:pPr marL="685800" lvl="1" indent="-457200">
-              <a:lnSpc>
-                <a:spcPct val="90000"/>
-              </a:lnSpc>
-              <a:spcAft>
-                <a:spcPts val="600"/>
-              </a:spcAft>
-              <a:buFont typeface="Wingdings" panose="05000000000000000000" pitchFamily="2" charset="2"/>
-              <a:buChar char="q"/>
-            </a:pPr>
-            <a:r>
-              <a:rPr lang="en-US" sz="2200" dirty="0"/>
-              <a:t>All remaining products still cannot carry the full Vietnamese name.</a:t>
-            </a:r>
-          </a:p>
-        </p:txBody>
-      </p:sp>
-      <p:sp>
-        <p:nvSpPr>
-          <p:cNvPr id="6" name="Rounded Rectangle 5"/>
+          <a:lstStyle/>
+          <a:p>
+            <a:pPr algn="l"/>
+            <a:r>
+              <a:rPr sz="1500" b="1">
+                <a:solidFill>
+                  <a:srgbClr val="1A1A1A"/>
+                </a:solidFill>
+                <a:latin typeface="Arial"/>
+              </a:rPr>
+              <a:t>Mat. Desc giới hạn 40 ký tự</a:t>
+            </a:r>
+          </a:p>
+        </p:txBody>
+      </p:sp>
+      <p:sp>
+        <p:nvSpPr>
+          <p:cNvPr id="6" name="TextBox 5"/>
+          <p:cNvSpPr txBox="1"/>
+          <p:nvPr/>
+        </p:nvSpPr>
+        <p:spPr>
+          <a:xfrm>
+            <a:off x="1252728" y="2295144"/>
+            <a:ext cx="4553712" cy="566928"/>
+          </a:xfrm>
+          <a:prstGeom prst="rect">
+            <a:avLst/>
+          </a:prstGeom>
+          <a:noFill/>
+        </p:spPr>
+        <p:txBody>
+          <a:bodyPr wrap="square" lIns="0" rIns="0" tIns="0" bIns="0" anchor="t">
+            <a:spAutoFit/>
+          </a:bodyPr>
+          <a:lstStyle/>
+          <a:p>
+            <a:pPr algn="l"/>
+            <a:r>
+              <a:rPr sz="1200" b="0">
+                <a:solidFill>
+                  <a:srgbClr val="6B6B6B"/>
+                </a:solidFill>
+                <a:latin typeface="Arial"/>
+              </a:rPr>
+              <a:t>Tên sản phẩm dài hơn 40 ký tự bị cắt cụt khi in ra chứng từ.</a:t>
+            </a:r>
+          </a:p>
+        </p:txBody>
+      </p:sp>
+      <p:sp>
+        <p:nvSpPr>
+          <p:cNvPr id="7" name="Rounded Rectangle 6"/>
           <p:cNvSpPr/>
           <p:nvPr/>
         </p:nvSpPr>
         <p:spPr>
           <a:xfrm>
-            <a:off x="8549640" y="1600200"/>
-            <a:ext cx="3063240" cy="4434840"/>
+            <a:off x="777240" y="3136391"/>
+            <a:ext cx="310896" cy="310896"/>
           </a:xfrm>
           <a:prstGeom prst="roundRect">
             <a:avLst>
-              <a:gd name="adj" fmla="val 4500"/>
+              <a:gd name="adj" fmla="val 18000"/>
+            </a:avLst>
+          </a:prstGeom>
+          <a:solidFill>
+            <a:srgbClr val="BE0028"/>
+          </a:solidFill>
+          <a:ln>
+            <a:noFill/>
+          </a:ln>
+          <a:effectLst/>
+        </p:spPr>
+        <p:style>
+          <a:lnRef idx="1">
+            <a:schemeClr val="accent1"/>
+          </a:lnRef>
+          <a:fillRef idx="3">
+            <a:schemeClr val="accent1"/>
+          </a:fillRef>
+          <a:effectRef idx="2">
+            <a:schemeClr val="accent1"/>
+          </a:effectRef>
+          <a:fontRef idx="minor">
+            <a:schemeClr val="lt1"/>
+          </a:fontRef>
+        </p:style>
+        <p:txBody>
+          <a:bodyPr rtlCol="0" anchor="ctr" lIns="0" rIns="0" tIns="0" bIns="0"/>
+          <a:lstStyle/>
+          <a:p>
+            <a:pPr algn="ctr"/>
+            <a:r>
+              <a:rPr sz="1300" b="1">
+                <a:solidFill>
+                  <a:srgbClr val="FFFFFF"/>
+                </a:solidFill>
+                <a:latin typeface="Arial"/>
+              </a:rPr>
+              <a:t>2</a:t>
+            </a:r>
+          </a:p>
+        </p:txBody>
+      </p:sp>
+      <p:sp>
+        <p:nvSpPr>
+          <p:cNvPr id="8" name="TextBox 7"/>
+          <p:cNvSpPr txBox="1"/>
+          <p:nvPr/>
+        </p:nvSpPr>
+        <p:spPr>
+          <a:xfrm>
+            <a:off x="1252728" y="3108960"/>
+            <a:ext cx="4553712" cy="292608"/>
+          </a:xfrm>
+          <a:prstGeom prst="rect">
+            <a:avLst/>
+          </a:prstGeom>
+          <a:noFill/>
+        </p:spPr>
+        <p:txBody>
+          <a:bodyPr wrap="square" lIns="0" rIns="0" tIns="0" bIns="0" anchor="t">
+            <a:spAutoFit/>
+          </a:bodyPr>
+          <a:lstStyle/>
+          <a:p>
+            <a:pPr algn="l"/>
+            <a:r>
+              <a:rPr sz="1500" b="1">
+                <a:solidFill>
+                  <a:srgbClr val="1A1A1A"/>
+                </a:solidFill>
+                <a:latin typeface="Arial"/>
+              </a:rPr>
+              <a:t>Đã enhance được một phần</a:t>
+            </a:r>
+          </a:p>
+        </p:txBody>
+      </p:sp>
+      <p:sp>
+        <p:nvSpPr>
+          <p:cNvPr id="9" name="TextBox 8"/>
+          <p:cNvSpPr txBox="1"/>
+          <p:nvPr/>
+        </p:nvSpPr>
+        <p:spPr>
+          <a:xfrm>
+            <a:off x="1252728" y="3438144"/>
+            <a:ext cx="4553712" cy="566928"/>
+          </a:xfrm>
+          <a:prstGeom prst="rect">
+            <a:avLst/>
+          </a:prstGeom>
+          <a:noFill/>
+        </p:spPr>
+        <p:txBody>
+          <a:bodyPr wrap="square" lIns="0" rIns="0" tIns="0" bIns="0" anchor="t">
+            <a:spAutoFit/>
+          </a:bodyPr>
+          <a:lstStyle/>
+          <a:p>
+            <a:pPr algn="l"/>
+            <a:r>
+              <a:rPr sz="1200" b="0">
+                <a:solidFill>
+                  <a:srgbClr val="6B6B6B"/>
+                </a:solidFill>
+                <a:latin typeface="Arial"/>
+              </a:rPr>
+              <a:t>CMIR cho khách Tender, Basis Text cho nhóm hàng MG0156.</a:t>
+            </a:r>
+          </a:p>
+        </p:txBody>
+      </p:sp>
+      <p:sp>
+        <p:nvSpPr>
+          <p:cNvPr id="10" name="Rounded Rectangle 9"/>
+          <p:cNvSpPr/>
+          <p:nvPr/>
+        </p:nvSpPr>
+        <p:spPr>
+          <a:xfrm>
+            <a:off x="777240" y="4279392"/>
+            <a:ext cx="310896" cy="310896"/>
+          </a:xfrm>
+          <a:prstGeom prst="roundRect">
+            <a:avLst>
+              <a:gd name="adj" fmla="val 18000"/>
+            </a:avLst>
+          </a:prstGeom>
+          <a:solidFill>
+            <a:srgbClr val="BE0028"/>
+          </a:solidFill>
+          <a:ln>
+            <a:noFill/>
+          </a:ln>
+          <a:effectLst/>
+        </p:spPr>
+        <p:style>
+          <a:lnRef idx="1">
+            <a:schemeClr val="accent1"/>
+          </a:lnRef>
+          <a:fillRef idx="3">
+            <a:schemeClr val="accent1"/>
+          </a:fillRef>
+          <a:effectRef idx="2">
+            <a:schemeClr val="accent1"/>
+          </a:effectRef>
+          <a:fontRef idx="minor">
+            <a:schemeClr val="lt1"/>
+          </a:fontRef>
+        </p:style>
+        <p:txBody>
+          <a:bodyPr rtlCol="0" anchor="ctr" lIns="0" rIns="0" tIns="0" bIns="0"/>
+          <a:lstStyle/>
+          <a:p>
+            <a:pPr algn="ctr"/>
+            <a:r>
+              <a:rPr sz="1300" b="1">
+                <a:solidFill>
+                  <a:srgbClr val="FFFFFF"/>
+                </a:solidFill>
+                <a:latin typeface="Arial"/>
+              </a:rPr>
+              <a:t>3</a:t>
+            </a:r>
+          </a:p>
+        </p:txBody>
+      </p:sp>
+      <p:sp>
+        <p:nvSpPr>
+          <p:cNvPr id="11" name="TextBox 10"/>
+          <p:cNvSpPr txBox="1"/>
+          <p:nvPr/>
+        </p:nvSpPr>
+        <p:spPr>
+          <a:xfrm>
+            <a:off x="1252728" y="4251960"/>
+            <a:ext cx="4553712" cy="292608"/>
+          </a:xfrm>
+          <a:prstGeom prst="rect">
+            <a:avLst/>
+          </a:prstGeom>
+          <a:noFill/>
+        </p:spPr>
+        <p:txBody>
+          <a:bodyPr wrap="square" lIns="0" rIns="0" tIns="0" bIns="0" anchor="t">
+            <a:spAutoFit/>
+          </a:bodyPr>
+          <a:lstStyle/>
+          <a:p>
+            <a:pPr algn="l"/>
+            <a:r>
+              <a:rPr sz="1500" b="1">
+                <a:solidFill>
+                  <a:srgbClr val="1A1A1A"/>
+                </a:solidFill>
+                <a:latin typeface="Arial"/>
+              </a:rPr>
+              <a:t>Phần còn lại vẫn chưa xử lý</a:t>
+            </a:r>
+          </a:p>
+        </p:txBody>
+      </p:sp>
+      <p:sp>
+        <p:nvSpPr>
+          <p:cNvPr id="12" name="TextBox 11"/>
+          <p:cNvSpPr txBox="1"/>
+          <p:nvPr/>
+        </p:nvSpPr>
+        <p:spPr>
+          <a:xfrm>
+            <a:off x="1252728" y="4581144"/>
+            <a:ext cx="4553712" cy="566928"/>
+          </a:xfrm>
+          <a:prstGeom prst="rect">
+            <a:avLst/>
+          </a:prstGeom>
+          <a:noFill/>
+        </p:spPr>
+        <p:txBody>
+          <a:bodyPr wrap="square" lIns="0" rIns="0" tIns="0" bIns="0" anchor="t">
+            <a:spAutoFit/>
+          </a:bodyPr>
+          <a:lstStyle/>
+          <a:p>
+            <a:pPr algn="l"/>
+            <a:r>
+              <a:rPr sz="1200" b="0">
+                <a:solidFill>
+                  <a:srgbClr val="6B6B6B"/>
+                </a:solidFill>
+                <a:latin typeface="Arial"/>
+              </a:rPr>
+              <a:t>Các BU khác chưa in được tên tiếng Việt có dấu, đầy đủ.</a:t>
+            </a:r>
+          </a:p>
+        </p:txBody>
+      </p:sp>
+      <p:sp>
+        <p:nvSpPr>
+          <p:cNvPr id="13" name="Rounded Rectangle 12"/>
+          <p:cNvSpPr/>
+          <p:nvPr/>
+        </p:nvSpPr>
+        <p:spPr>
+          <a:xfrm>
+            <a:off x="6446520" y="1783080"/>
+            <a:ext cx="5120640" cy="4160520"/>
+          </a:xfrm>
+          <a:prstGeom prst="roundRect">
+            <a:avLst>
+              <a:gd name="adj" fmla="val 3000"/>
             </a:avLst>
           </a:prstGeom>
           <a:solidFill>
@@ -17265,22 +17376,19 @@
         <p:txBody>
           <a:bodyPr rtlCol="0" anchor="ctr"/>
           <a:lstStyle/>
-          <a:p>
-            <a:pPr algn="ctr"/>
-            <a:endParaRPr/>
-          </a:p>
-        </p:txBody>
-      </p:sp>
-      <p:sp>
-        <p:nvSpPr>
-          <p:cNvPr id="7" name="Rounded Rectangle 6"/>
+          <a:p/>
+        </p:txBody>
+      </p:sp>
+      <p:sp>
+        <p:nvSpPr>
+          <p:cNvPr id="14" name="Rounded Rectangle 13"/>
           <p:cNvSpPr/>
           <p:nvPr/>
         </p:nvSpPr>
         <p:spPr>
           <a:xfrm>
-            <a:off x="8549640" y="1600200"/>
-            <a:ext cx="3063240" cy="128016"/>
+            <a:off x="6446520" y="1783080"/>
+            <a:ext cx="5120640" cy="128016"/>
           </a:xfrm>
           <a:prstGeom prst="roundRect">
             <a:avLst>
@@ -17312,26 +17420,58 @@
         <p:txBody>
           <a:bodyPr rtlCol="0" anchor="ctr"/>
           <a:lstStyle/>
+          <a:p/>
+        </p:txBody>
+      </p:sp>
+      <p:sp>
+        <p:nvSpPr>
+          <p:cNvPr id="15" name="TextBox 14"/>
+          <p:cNvSpPr txBox="1"/>
+          <p:nvPr/>
+        </p:nvSpPr>
+        <p:spPr>
+          <a:xfrm>
+            <a:off x="6446520" y="2057400"/>
+            <a:ext cx="5120640" cy="274320"/>
+          </a:xfrm>
+          <a:prstGeom prst="rect">
+            <a:avLst/>
+          </a:prstGeom>
+          <a:noFill/>
+        </p:spPr>
+        <p:txBody>
+          <a:bodyPr wrap="square" lIns="0" rIns="0" tIns="0" bIns="0" anchor="t">
+            <a:spAutoFit/>
+          </a:bodyPr>
+          <a:lstStyle/>
           <a:p>
             <a:pPr algn="ctr"/>
-            <a:endParaRPr/>
-          </a:p>
-        </p:txBody>
-      </p:sp>
-      <p:sp>
-        <p:nvSpPr>
-          <p:cNvPr id="8" name="Rounded Rectangle 7"/>
+            <a:r>
+              <a:rPr sz="1250" b="1">
+                <a:solidFill>
+                  <a:srgbClr val="BE0028"/>
+                </a:solidFill>
+                <a:latin typeface="Arial"/>
+              </a:rPr>
+              <a:t>AS-IS  ·  Tên bị cắt</a:t>
+            </a:r>
+          </a:p>
+        </p:txBody>
+      </p:sp>
+      <p:sp>
+        <p:nvSpPr>
+          <p:cNvPr id="16" name="Rounded Rectangle 15"/>
           <p:cNvSpPr/>
           <p:nvPr/>
         </p:nvSpPr>
         <p:spPr>
           <a:xfrm>
-            <a:off x="8750808" y="1920240"/>
-            <a:ext cx="2660904" cy="2331720"/>
+            <a:off x="6675120" y="2487168"/>
+            <a:ext cx="4663440" cy="960120"/>
           </a:xfrm>
           <a:prstGeom prst="roundRect">
             <a:avLst>
-              <a:gd name="adj" fmla="val 6000"/>
+              <a:gd name="adj" fmla="val 4000"/>
             </a:avLst>
           </a:prstGeom>
           <a:solidFill>
@@ -17361,22 +17501,19 @@
         <p:txBody>
           <a:bodyPr rtlCol="0" anchor="ctr"/>
           <a:lstStyle/>
-          <a:p>
-            <a:pPr algn="ctr"/>
-            <a:endParaRPr/>
-          </a:p>
-        </p:txBody>
-      </p:sp>
-      <p:sp>
-        <p:nvSpPr>
-          <p:cNvPr id="9" name="TextBox 8"/>
+          <a:p/>
+        </p:txBody>
+      </p:sp>
+      <p:sp>
+        <p:nvSpPr>
+          <p:cNvPr id="17" name="TextBox 16"/>
           <p:cNvSpPr txBox="1"/>
           <p:nvPr/>
         </p:nvSpPr>
         <p:spPr>
           <a:xfrm>
-            <a:off x="8915400" y="2057400"/>
-            <a:ext cx="2331720" cy="274320"/>
+            <a:off x="6858000" y="2633472"/>
+            <a:ext cx="4297680" cy="201168"/>
           </a:xfrm>
           <a:prstGeom prst="rect">
             <a:avLst/>
@@ -17384,34 +17521,69 @@
           <a:noFill/>
         </p:spPr>
         <p:txBody>
-          <a:bodyPr wrap="square" lIns="0" tIns="0" rIns="0" bIns="0">
+          <a:bodyPr wrap="square" lIns="0" rIns="0" tIns="0" bIns="0" anchor="t">
             <a:spAutoFit/>
           </a:bodyPr>
           <a:lstStyle/>
           <a:p>
             <a:pPr algn="l"/>
             <a:r>
-              <a:rPr sz="1300" b="1" i="0">
+              <a:rPr sz="1000" b="0">
+                <a:solidFill>
+                  <a:srgbClr val="6B6B6B"/>
+                </a:solidFill>
+                <a:latin typeface="Arial"/>
+              </a:rPr>
+              <a:t>Tên đầy đủ cần in</a:t>
+            </a:r>
+          </a:p>
+        </p:txBody>
+      </p:sp>
+      <p:sp>
+        <p:nvSpPr>
+          <p:cNvPr id="18" name="TextBox 17"/>
+          <p:cNvSpPr txBox="1"/>
+          <p:nvPr/>
+        </p:nvSpPr>
+        <p:spPr>
+          <a:xfrm>
+            <a:off x="6858000" y="2871216"/>
+            <a:ext cx="4297680" cy="640080"/>
+          </a:xfrm>
+          <a:prstGeom prst="rect">
+            <a:avLst/>
+          </a:prstGeom>
+          <a:noFill/>
+        </p:spPr>
+        <p:txBody>
+          <a:bodyPr wrap="square" lIns="0" rIns="0" tIns="0" bIns="0" anchor="t">
+            <a:spAutoFit/>
+          </a:bodyPr>
+          <a:lstStyle/>
+          <a:p>
+            <a:pPr algn="l"/>
+            <a:r>
+              <a:rPr sz="1300" b="1">
                 <a:solidFill>
                   <a:srgbClr val="1A1A1A"/>
                 </a:solidFill>
-                <a:latin typeface="Calibri"/>
+                <a:latin typeface="Arial"/>
               </a:rPr>
-              <a:t>MAT. DESC</a:t>
-            </a:r>
-          </a:p>
-        </p:txBody>
-      </p:sp>
-      <p:sp>
-        <p:nvSpPr>
-          <p:cNvPr id="10" name="Rounded Rectangle 9"/>
+              <a:t>Kem dưỡng da chống nắng ABC SPF50+ dạng gel 50ml</a:t>
+            </a:r>
+          </a:p>
+        </p:txBody>
+      </p:sp>
+      <p:sp>
+        <p:nvSpPr>
+          <p:cNvPr id="19" name="Rounded Rectangle 18"/>
           <p:cNvSpPr/>
           <p:nvPr/>
         </p:nvSpPr>
         <p:spPr>
           <a:xfrm>
-            <a:off x="10360152" y="2057400"/>
-            <a:ext cx="914400" cy="274320"/>
+            <a:off x="10104120" y="2596896"/>
+            <a:ext cx="1097280" cy="237744"/>
           </a:xfrm>
           <a:prstGeom prst="roundRect">
             <a:avLst>
@@ -17441,41 +17613,47 @@
           </a:fontRef>
         </p:style>
         <p:txBody>
-          <a:bodyPr wrap="none" lIns="0" tIns="0" rIns="0" bIns="0" rtlCol="0" anchor="ctr"/>
+          <a:bodyPr rtlCol="0" anchor="ctr" lIns="0" rIns="0" tIns="0" bIns="0"/>
           <a:lstStyle/>
           <a:p>
             <a:pPr algn="ctr"/>
             <a:r>
-              <a:rPr sz="1100" b="1">
+              <a:rPr sz="900" b="1">
                 <a:solidFill>
                   <a:srgbClr val="FFFFFF"/>
                 </a:solidFill>
-                <a:latin typeface="Calibri"/>
+                <a:latin typeface="Arial"/>
               </a:rPr>
-              <a:t>40 CHAR</a:t>
-            </a:r>
-          </a:p>
-        </p:txBody>
-      </p:sp>
-      <p:sp>
-        <p:nvSpPr>
-          <p:cNvPr id="11" name="Rectangle 10"/>
+              <a:t>47 KÝ TỰ</a:t>
+            </a:r>
+          </a:p>
+        </p:txBody>
+      </p:sp>
+      <p:sp>
+        <p:nvSpPr>
+          <p:cNvPr id="20" name="Rounded Rectangle 19"/>
           <p:cNvSpPr/>
           <p:nvPr/>
         </p:nvSpPr>
         <p:spPr>
           <a:xfrm>
-            <a:off x="8750808" y="2450592"/>
-            <a:ext cx="2660904" cy="1"/>
-          </a:xfrm>
-          <a:prstGeom prst="rect">
-            <a:avLst/>
+            <a:off x="6675120" y="3703320"/>
+            <a:ext cx="4663440" cy="1170432"/>
+          </a:xfrm>
+          <a:prstGeom prst="roundRect">
+            <a:avLst>
+              <a:gd name="adj" fmla="val 4000"/>
+            </a:avLst>
           </a:prstGeom>
-          <a:ln>
+          <a:solidFill>
+            <a:srgbClr val="FFFFFF"/>
+          </a:solidFill>
+          <a:ln w="12700">
             <a:solidFill>
-              <a:srgbClr val="E9E9E9"/>
+              <a:srgbClr val="BE0028"/>
             </a:solidFill>
           </a:ln>
+          <a:effectLst/>
         </p:spPr>
         <p:style>
           <a:lnRef idx="1">
@@ -17494,57 +17672,19 @@
         <p:txBody>
           <a:bodyPr rtlCol="0" anchor="ctr"/>
           <a:lstStyle/>
-          <a:p>
-            <a:pPr algn="ctr"/>
-            <a:endParaRPr/>
-          </a:p>
-        </p:txBody>
-      </p:sp>
-      <p:cxnSp>
-        <p:nvCxnSpPr>
-          <p:cNvPr id="12" name="Connector 11"/>
-          <p:cNvCxnSpPr/>
-          <p:nvPr/>
-        </p:nvCxnSpPr>
-        <p:spPr>
-          <a:xfrm>
-            <a:off x="8750808" y="2450592"/>
-            <a:ext cx="2660904" cy="0"/>
-          </a:xfrm>
-          <a:prstGeom prst="line">
-            <a:avLst/>
-          </a:prstGeom>
-          <a:ln w="9525">
-            <a:solidFill>
-              <a:srgbClr val="E9E9E9"/>
-            </a:solidFill>
-          </a:ln>
-        </p:spPr>
-        <p:style>
-          <a:lnRef idx="2">
-            <a:schemeClr val="accent1"/>
-          </a:lnRef>
-          <a:fillRef idx="0">
-            <a:schemeClr val="accent1"/>
-          </a:fillRef>
-          <a:effectRef idx="1">
-            <a:schemeClr val="accent1"/>
-          </a:effectRef>
-          <a:fontRef idx="minor">
-            <a:schemeClr val="tx1"/>
-          </a:fontRef>
-        </p:style>
-      </p:cxnSp>
-      <p:sp>
-        <p:nvSpPr>
-          <p:cNvPr id="13" name="TextBox 12"/>
+          <a:p/>
+        </p:txBody>
+      </p:sp>
+      <p:sp>
+        <p:nvSpPr>
+          <p:cNvPr id="21" name="TextBox 20"/>
           <p:cNvSpPr txBox="1"/>
           <p:nvPr/>
         </p:nvSpPr>
         <p:spPr>
           <a:xfrm>
-            <a:off x="8915400" y="2578608"/>
-            <a:ext cx="2331720" cy="274320"/>
+            <a:off x="6858000" y="3849624"/>
+            <a:ext cx="4297680" cy="201168"/>
           </a:xfrm>
           <a:prstGeom prst="rect">
             <a:avLst/>
@@ -17552,34 +17692,34 @@
           <a:noFill/>
         </p:spPr>
         <p:txBody>
-          <a:bodyPr wrap="square" lIns="0" tIns="0" rIns="0" bIns="0">
+          <a:bodyPr wrap="square" lIns="0" rIns="0" tIns="0" bIns="0" anchor="t">
             <a:spAutoFit/>
           </a:bodyPr>
           <a:lstStyle/>
           <a:p>
             <a:pPr algn="l"/>
             <a:r>
-              <a:rPr sz="1050" b="0" i="0">
-                <a:solidFill>
-                  <a:srgbClr val="1A1A1A"/>
-                </a:solidFill>
-                <a:latin typeface="Calibri"/>
+              <a:rPr sz="1000" b="0">
+                <a:solidFill>
+                  <a:srgbClr val="6B6B6B"/>
+                </a:solidFill>
+                <a:latin typeface="Arial"/>
               </a:rPr>
-              <a:t>Standard SAP field limit</a:t>
-            </a:r>
-          </a:p>
-        </p:txBody>
-      </p:sp>
-      <p:sp>
-        <p:nvSpPr>
-          <p:cNvPr id="14" name="TextBox 13"/>
+              <a:t>Mat. Desc chứa được</a:t>
+            </a:r>
+          </a:p>
+        </p:txBody>
+      </p:sp>
+      <p:sp>
+        <p:nvSpPr>
+          <p:cNvPr id="22" name="TextBox 21"/>
           <p:cNvSpPr txBox="1"/>
           <p:nvPr/>
         </p:nvSpPr>
         <p:spPr>
           <a:xfrm>
-            <a:off x="8915400" y="2880360"/>
-            <a:ext cx="2331720" cy="502920"/>
+            <a:off x="6858000" y="4087368"/>
+            <a:ext cx="4297680" cy="274320"/>
           </a:xfrm>
           <a:prstGeom prst="rect">
             <a:avLst/>
@@ -17587,44 +17727,43 @@
           <a:noFill/>
         </p:spPr>
         <p:txBody>
-          <a:bodyPr wrap="square" lIns="0" tIns="0" rIns="0" bIns="0">
+          <a:bodyPr wrap="square" lIns="0" rIns="0" tIns="0" bIns="0" anchor="t">
             <a:spAutoFit/>
           </a:bodyPr>
           <a:lstStyle/>
           <a:p>
             <a:pPr algn="l"/>
             <a:r>
-              <a:rPr sz="1000" b="0" i="1">
-                <a:solidFill>
-                  <a:srgbClr val="6B6B6B"/>
-                </a:solidFill>
-                <a:latin typeface="Calibri"/>
+              <a:rPr sz="1300" b="1">
+                <a:solidFill>
+                  <a:srgbClr val="1A1A1A"/>
+                </a:solidFill>
+                <a:latin typeface="Arial"/>
               </a:rPr>
-              <a:t>Enhanced already:</a:t>
-            </a:r>
-            <a:br/>
-            <a:r>
-              <a:rPr sz="1000" b="0" i="1">
-                <a:solidFill>
-                  <a:srgbClr val="6B6B6B"/>
-                </a:solidFill>
-                <a:latin typeface="Calibri"/>
+              <a:t>ABC SUNSCREEN GEL SPF50+ 50ML</a:t>
+            </a:r>
+            <a:r>
+              <a:rPr sz="1300" b="1">
+                <a:solidFill>
+                  <a:srgbClr val="EF233C"/>
+                </a:solidFill>
+                <a:latin typeface="Arial"/>
               </a:rPr>
-              <a:t>CMIR (Tender) · MG0156</a:t>
-            </a:r>
-          </a:p>
-        </p:txBody>
-      </p:sp>
-      <p:sp>
-        <p:nvSpPr>
-          <p:cNvPr id="15" name="TextBox 14"/>
+              <a:t> …</a:t>
+            </a:r>
+          </a:p>
+        </p:txBody>
+      </p:sp>
+      <p:sp>
+        <p:nvSpPr>
+          <p:cNvPr id="23" name="TextBox 22"/>
           <p:cNvSpPr txBox="1"/>
           <p:nvPr/>
         </p:nvSpPr>
         <p:spPr>
           <a:xfrm>
-            <a:off x="8915400" y="3456432"/>
-            <a:ext cx="2331720" cy="274320"/>
+            <a:off x="6858000" y="4416552"/>
+            <a:ext cx="4297680" cy="219456"/>
           </a:xfrm>
           <a:prstGeom prst="rect">
             <a:avLst/>
@@ -17632,128 +17771,34 @@
           <a:noFill/>
         </p:spPr>
         <p:txBody>
-          <a:bodyPr wrap="square" lIns="0" tIns="0" rIns="0" bIns="0">
+          <a:bodyPr wrap="square" lIns="0" rIns="0" tIns="0" bIns="0" anchor="t">
             <a:spAutoFit/>
           </a:bodyPr>
           <a:lstStyle/>
           <a:p>
             <a:pPr algn="l"/>
             <a:r>
-              <a:rPr sz="950" b="0" i="0">
-                <a:solidFill>
-                  <a:srgbClr val="BE0028"/>
-                </a:solidFill>
-                <a:latin typeface="Calibri"/>
+              <a:rPr sz="1000" b="0">
+                <a:solidFill>
+                  <a:srgbClr val="EF233C"/>
+                </a:solidFill>
+                <a:latin typeface="Arial"/>
               </a:rPr>
-              <a:t>No Vietnamese diacritics</a:t>
-            </a:r>
-          </a:p>
-        </p:txBody>
-      </p:sp>
-      <p:pic>
-        <p:nvPicPr>
-          <p:cNvPr id="16" name="Picture 15" descr="image.png"/>
-          <p:cNvPicPr>
-            <a:picLocks noChangeAspect="1"/>
-          </p:cNvPicPr>
-          <p:nvPr/>
-        </p:nvPicPr>
-        <p:blipFill>
-          <a:blip r:embed="rId2"/>
-          <a:stretch>
-            <a:fillRect/>
-          </a:stretch>
-        </p:blipFill>
-        <p:spPr>
-          <a:xfrm>
-            <a:off x="10863072" y="3749040"/>
-            <a:ext cx="384048" cy="384048"/>
-          </a:xfrm>
-          <a:prstGeom prst="rect">
-            <a:avLst/>
-          </a:prstGeom>
-        </p:spPr>
-      </p:pic>
-      <p:sp>
-        <p:nvSpPr>
-          <p:cNvPr id="17" name="TextBox 16"/>
-          <p:cNvSpPr txBox="1"/>
-          <p:nvPr/>
-        </p:nvSpPr>
-        <p:spPr>
-          <a:xfrm>
-            <a:off x="8915400" y="3822192"/>
-            <a:ext cx="1929384" cy="274320"/>
-          </a:xfrm>
-          <a:prstGeom prst="rect">
-            <a:avLst/>
-          </a:prstGeom>
-          <a:noFill/>
-        </p:spPr>
-        <p:txBody>
-          <a:bodyPr wrap="square" lIns="0" tIns="0" rIns="0" bIns="0">
-            <a:spAutoFit/>
-          </a:bodyPr>
-          <a:lstStyle/>
-          <a:p>
-            <a:pPr algn="l"/>
-            <a:r>
-              <a:rPr sz="950" b="0" i="1">
-                <a:solidFill>
-                  <a:srgbClr val="6B6B6B"/>
-                </a:solidFill>
-                <a:latin typeface="Calibri"/>
-              </a:rPr>
-              <a:t>Rest of scope still open</a:t>
-            </a:r>
-          </a:p>
-        </p:txBody>
-      </p:sp>
-      <p:sp>
-        <p:nvSpPr>
-          <p:cNvPr id="18" name="TextBox 17"/>
-          <p:cNvSpPr txBox="1"/>
-          <p:nvPr/>
-        </p:nvSpPr>
-        <p:spPr>
-          <a:xfrm>
-            <a:off x="8549640" y="4507992"/>
-            <a:ext cx="3063240" cy="320040"/>
-          </a:xfrm>
-          <a:prstGeom prst="rect">
-            <a:avLst/>
-          </a:prstGeom>
-          <a:noFill/>
-        </p:spPr>
-        <p:txBody>
-          <a:bodyPr wrap="square" lIns="0" tIns="0" rIns="0" bIns="0">
-            <a:spAutoFit/>
-          </a:bodyPr>
-          <a:lstStyle/>
-          <a:p>
-            <a:pPr algn="ctr"/>
-            <a:r>
-              <a:rPr sz="1250" b="1" i="0">
-                <a:solidFill>
-                  <a:srgbClr val="BE0028"/>
-                </a:solidFill>
-                <a:latin typeface="Calibri"/>
-              </a:rPr>
-              <a:t>CURRENT  ·  Field Limitation</a:t>
-            </a:r>
-          </a:p>
-        </p:txBody>
-      </p:sp>
-      <p:sp>
-        <p:nvSpPr>
-          <p:cNvPr id="19" name="Rounded Rectangle 18"/>
+              <a:t>không dấu  ·  phần sau bị cắt</a:t>
+            </a:r>
+          </a:p>
+        </p:txBody>
+      </p:sp>
+      <p:sp>
+        <p:nvSpPr>
+          <p:cNvPr id="24" name="Rounded Rectangle 23"/>
           <p:cNvSpPr/>
           <p:nvPr/>
         </p:nvSpPr>
         <p:spPr>
           <a:xfrm>
-            <a:off x="9304020" y="5468112"/>
-            <a:ext cx="1554480" cy="347472"/>
+            <a:off x="10104120" y="3813048"/>
+            <a:ext cx="1097280" cy="237744"/>
           </a:xfrm>
           <a:prstGeom prst="roundRect">
             <a:avLst>
@@ -17761,7 +17806,7 @@
             </a:avLst>
           </a:prstGeom>
           <a:solidFill>
-            <a:srgbClr val="BE0028"/>
+            <a:srgbClr val="6B6B6B"/>
           </a:solidFill>
           <a:ln>
             <a:noFill/>
@@ -17783,18 +17828,53 @@
           </a:fontRef>
         </p:style>
         <p:txBody>
-          <a:bodyPr wrap="none" lIns="0" tIns="0" rIns="0" bIns="0" rtlCol="0" anchor="ctr"/>
+          <a:bodyPr rtlCol="0" anchor="ctr" lIns="0" rIns="0" tIns="0" bIns="0"/>
           <a:lstStyle/>
           <a:p>
             <a:pPr algn="ctr"/>
             <a:r>
+              <a:rPr sz="900" b="1">
+                <a:solidFill>
+                  <a:srgbClr val="FFFFFF"/>
+                </a:solidFill>
+                <a:latin typeface="Arial"/>
+              </a:rPr>
+              <a:t>40 KÝ TỰ</a:t>
+            </a:r>
+          </a:p>
+        </p:txBody>
+      </p:sp>
+      <p:sp>
+        <p:nvSpPr>
+          <p:cNvPr id="25" name="TextBox 24"/>
+          <p:cNvSpPr txBox="1"/>
+          <p:nvPr/>
+        </p:nvSpPr>
+        <p:spPr>
+          <a:xfrm>
+            <a:off x="6675120" y="5138928"/>
+            <a:ext cx="4663440" cy="274320"/>
+          </a:xfrm>
+          <a:prstGeom prst="rect">
+            <a:avLst/>
+          </a:prstGeom>
+          <a:noFill/>
+        </p:spPr>
+        <p:txBody>
+          <a:bodyPr wrap="square" lIns="0" rIns="0" tIns="0" bIns="0" anchor="t">
+            <a:spAutoFit/>
+          </a:bodyPr>
+          <a:lstStyle/>
+          <a:p>
+            <a:pPr algn="l"/>
+            <a:r>
               <a:rPr sz="1100" b="1">
                 <a:solidFill>
-                  <a:srgbClr val="FFFFFF"/>
-                </a:solidFill>
-                <a:latin typeface="Calibri"/>
+                  <a:srgbClr val="BE0028"/>
+                </a:solidFill>
+                <a:latin typeface="Arial"/>
               </a:rPr>
-              <a:t>AS-IS</a:t>
+              <a:t>→ Hóa đơn / phiếu kho chỉ in được tên tiếng Anh, chưa đủ nghĩa.</a:t>
             </a:r>
           </a:p>
         </p:txBody>
@@ -17872,7 +17952,7 @@
                   <a:schemeClr val="tx1"/>
                 </a:solidFill>
               </a:rPr>
-              <a:t>Yêu cầu – Business requirement</a:t>
+              <a:t>Yêu cầu</a:t>
             </a:r>
           </a:p>
         </p:txBody>
@@ -17913,311 +17993,518 @@
       </p:sp>
       <p:sp>
         <p:nvSpPr>
-          <p:cNvPr id="5" name="Subtitle 2">
-            <a:extLst>
-              <a:ext uri="{FF2B5EF4-FFF2-40B4-BE49-F238E27FC236}">
-                <a16:creationId xmlns:a16="http://schemas.microsoft.com/office/drawing/2014/main" id="{73B36D05-A0DC-E96E-C0B3-3D162E2B34C4}"/>
-              </a:ext>
-            </a:extLst>
-          </p:cNvPr>
-          <p:cNvSpPr txBox="1">
-            <a:spLocks/>
-          </p:cNvSpPr>
+          <p:cNvPr id="4" name="Rounded Rectangle 3"/>
+          <p:cNvSpPr/>
           <p:nvPr/>
         </p:nvSpPr>
         <p:spPr>
           <a:xfrm>
-            <a:off x="1122977" y="2141550"/>
-            <a:ext cx="7040880" cy="3750095"/>
+            <a:off x="777240" y="1901951"/>
+            <a:ext cx="310896" cy="310896"/>
+          </a:xfrm>
+          <a:prstGeom prst="roundRect">
+            <a:avLst>
+              <a:gd name="adj" fmla="val 18000"/>
+            </a:avLst>
+          </a:prstGeom>
+          <a:solidFill>
+            <a:srgbClr val="BE0028"/>
+          </a:solidFill>
+          <a:ln>
+            <a:noFill/>
+          </a:ln>
+          <a:effectLst/>
+        </p:spPr>
+        <p:style>
+          <a:lnRef idx="1">
+            <a:schemeClr val="accent1"/>
+          </a:lnRef>
+          <a:fillRef idx="3">
+            <a:schemeClr val="accent1"/>
+          </a:fillRef>
+          <a:effectRef idx="2">
+            <a:schemeClr val="accent1"/>
+          </a:effectRef>
+          <a:fontRef idx="minor">
+            <a:schemeClr val="lt1"/>
+          </a:fontRef>
+        </p:style>
+        <p:txBody>
+          <a:bodyPr rtlCol="0" anchor="ctr" lIns="0" rIns="0" tIns="0" bIns="0"/>
+          <a:lstStyle/>
+          <a:p>
+            <a:pPr algn="ctr"/>
+            <a:r>
+              <a:rPr sz="1300" b="1">
+                <a:solidFill>
+                  <a:srgbClr val="FFFFFF"/>
+                </a:solidFill>
+                <a:latin typeface="Arial"/>
+              </a:rPr>
+              <a:t>1</a:t>
+            </a:r>
+          </a:p>
+        </p:txBody>
+      </p:sp>
+      <p:sp>
+        <p:nvSpPr>
+          <p:cNvPr id="5" name="TextBox 4"/>
+          <p:cNvSpPr txBox="1"/>
+          <p:nvPr/>
+        </p:nvSpPr>
+        <p:spPr>
+          <a:xfrm>
+            <a:off x="1252728" y="1874519"/>
+            <a:ext cx="4553712" cy="292608"/>
           </a:xfrm>
           <a:prstGeom prst="rect">
             <a:avLst/>
           </a:prstGeom>
-        </p:spPr>
-        <p:txBody>
-          <a:bodyPr vert="horz" wrap="square" lIns="91440" tIns="45720" rIns="91440" bIns="45720" rtlCol="0" anchor="ctr" anchorCtr="0">
-            <a:normAutofit lnSpcReduction="10000"/>
+          <a:noFill/>
+        </p:spPr>
+        <p:txBody>
+          <a:bodyPr wrap="square" lIns="0" rIns="0" tIns="0" bIns="0" anchor="t">
+            <a:spAutoFit/>
           </a:bodyPr>
-          <a:lstStyle>
-            <a:lvl1pPr marL="0" indent="0" algn="l" defTabSz="914400" rtl="0" eaLnBrk="1" latinLnBrk="0" hangingPunct="1">
-              <a:lnSpc>
-                <a:spcPct val="120000"/>
-              </a:lnSpc>
-              <a:spcBef>
-                <a:spcPts val="0"/>
-              </a:spcBef>
-              <a:buFont typeface="Arial" panose="020B0604020202020204" pitchFamily="34" charset="0"/>
-              <a:buNone/>
-              <a:defRPr sz="1600" kern="1200">
-                <a:solidFill>
-                  <a:schemeClr val="tx1"/>
-                </a:solidFill>
-                <a:latin typeface="+mn-lt"/>
-                <a:ea typeface="+mn-ea"/>
-                <a:cs typeface="+mn-cs"/>
-              </a:defRPr>
-            </a:lvl1pPr>
-            <a:lvl2pPr marL="180000" indent="-180000" algn="l" defTabSz="914400" rtl="0" eaLnBrk="1" latinLnBrk="0" hangingPunct="1">
-              <a:lnSpc>
-                <a:spcPct val="120000"/>
-              </a:lnSpc>
-              <a:spcBef>
-                <a:spcPts val="0"/>
-              </a:spcBef>
-              <a:buFont typeface="Arial" panose="020B0604020202020204" pitchFamily="34" charset="0"/>
-              <a:buChar char="•"/>
-              <a:defRPr sz="1600" kern="1200">
-                <a:solidFill>
-                  <a:schemeClr val="tx1"/>
-                </a:solidFill>
-                <a:latin typeface="+mn-lt"/>
-                <a:ea typeface="+mn-ea"/>
-                <a:cs typeface="+mn-cs"/>
-              </a:defRPr>
-            </a:lvl2pPr>
-            <a:lvl3pPr marL="360000" indent="-180000" algn="l" defTabSz="914400" rtl="0" eaLnBrk="1" latinLnBrk="0" hangingPunct="1">
-              <a:lnSpc>
-                <a:spcPct val="120000"/>
-              </a:lnSpc>
-              <a:spcBef>
-                <a:spcPts val="0"/>
-              </a:spcBef>
-              <a:buFont typeface="Arial" panose="020B0604020202020204" pitchFamily="34" charset="0"/>
-              <a:buChar char="‒"/>
-              <a:defRPr sz="1600" kern="1200">
-                <a:solidFill>
-                  <a:schemeClr val="tx1"/>
-                </a:solidFill>
-                <a:latin typeface="+mn-lt"/>
-                <a:ea typeface="+mn-ea"/>
-                <a:cs typeface="+mn-cs"/>
-              </a:defRPr>
-            </a:lvl3pPr>
-            <a:lvl4pPr marL="540000" indent="-180000" algn="l" defTabSz="914400" rtl="0" eaLnBrk="1" latinLnBrk="0" hangingPunct="1">
-              <a:lnSpc>
-                <a:spcPct val="120000"/>
-              </a:lnSpc>
-              <a:spcBef>
-                <a:spcPts val="0"/>
-              </a:spcBef>
-              <a:buFont typeface="Arial" panose="020B0604020202020204" pitchFamily="34" charset="0"/>
-              <a:buChar char="‒"/>
-              <a:defRPr sz="1600" kern="1200">
-                <a:solidFill>
-                  <a:schemeClr val="tx1"/>
-                </a:solidFill>
-                <a:latin typeface="+mn-lt"/>
-                <a:ea typeface="+mn-ea"/>
-                <a:cs typeface="+mn-cs"/>
-              </a:defRPr>
-            </a:lvl4pPr>
-            <a:lvl5pPr marL="720000" indent="-180000" algn="l" defTabSz="914400" rtl="0" eaLnBrk="1" latinLnBrk="0" hangingPunct="1">
-              <a:lnSpc>
-                <a:spcPct val="120000"/>
-              </a:lnSpc>
-              <a:spcBef>
-                <a:spcPts val="0"/>
-              </a:spcBef>
-              <a:buFont typeface="Arial" panose="020B0604020202020204" pitchFamily="34" charset="0"/>
-              <a:buChar char="‒"/>
-              <a:defRPr sz="1600" kern="1200">
-                <a:solidFill>
-                  <a:schemeClr val="tx1"/>
-                </a:solidFill>
-                <a:latin typeface="+mn-lt"/>
-                <a:ea typeface="+mn-ea"/>
-                <a:cs typeface="+mn-cs"/>
-              </a:defRPr>
-            </a:lvl5pPr>
-            <a:lvl6pPr marL="900000" indent="-180000" algn="l" defTabSz="914400" rtl="0" eaLnBrk="1" latinLnBrk="0" hangingPunct="1">
-              <a:lnSpc>
-                <a:spcPct val="120000"/>
-              </a:lnSpc>
-              <a:spcBef>
-                <a:spcPts val="0"/>
-              </a:spcBef>
-              <a:buFont typeface="Arial" panose="020B0604020202020204" pitchFamily="34" charset="0"/>
-              <a:buChar char="‒"/>
-              <a:defRPr sz="1600" kern="1200">
-                <a:solidFill>
-                  <a:schemeClr val="tx1"/>
-                </a:solidFill>
-                <a:latin typeface="+mn-lt"/>
-                <a:ea typeface="+mn-ea"/>
-                <a:cs typeface="+mn-cs"/>
-              </a:defRPr>
-            </a:lvl6pPr>
-            <a:lvl7pPr marL="1080000" indent="-180000" algn="l" defTabSz="914400" rtl="0" eaLnBrk="1" latinLnBrk="0" hangingPunct="1">
-              <a:lnSpc>
-                <a:spcPct val="120000"/>
-              </a:lnSpc>
-              <a:spcBef>
-                <a:spcPts val="0"/>
-              </a:spcBef>
-              <a:buFont typeface="Arial" panose="020B0604020202020204" pitchFamily="34" charset="0"/>
-              <a:buChar char="‒"/>
-              <a:defRPr sz="1600" kern="1200">
-                <a:solidFill>
-                  <a:schemeClr val="tx1"/>
-                </a:solidFill>
-                <a:latin typeface="+mn-lt"/>
-                <a:ea typeface="+mn-ea"/>
-                <a:cs typeface="+mn-cs"/>
-              </a:defRPr>
-            </a:lvl7pPr>
-            <a:lvl8pPr marL="1260000" indent="-180000" algn="l" defTabSz="914400" rtl="0" eaLnBrk="1" latinLnBrk="0" hangingPunct="1">
-              <a:lnSpc>
-                <a:spcPct val="120000"/>
-              </a:lnSpc>
-              <a:spcBef>
-                <a:spcPts val="0"/>
-              </a:spcBef>
-              <a:buFont typeface="Arial" panose="020B0604020202020204" pitchFamily="34" charset="0"/>
-              <a:buChar char="‒"/>
-              <a:defRPr sz="1600" kern="1200">
-                <a:solidFill>
-                  <a:schemeClr val="tx1"/>
-                </a:solidFill>
-                <a:latin typeface="+mn-lt"/>
-                <a:ea typeface="+mn-ea"/>
-                <a:cs typeface="+mn-cs"/>
-              </a:defRPr>
-            </a:lvl8pPr>
-            <a:lvl9pPr marL="1440000" indent="-180000" algn="l" defTabSz="914400" rtl="0" eaLnBrk="1" latinLnBrk="0" hangingPunct="1">
-              <a:lnSpc>
-                <a:spcPct val="120000"/>
-              </a:lnSpc>
-              <a:spcBef>
-                <a:spcPts val="0"/>
-              </a:spcBef>
-              <a:buFont typeface="Arial" panose="020B0604020202020204" pitchFamily="34" charset="0"/>
-              <a:buChar char="‒"/>
-              <a:defRPr sz="1600" kern="1200">
-                <a:solidFill>
-                  <a:schemeClr val="tx1"/>
-                </a:solidFill>
-                <a:latin typeface="+mn-lt"/>
-                <a:ea typeface="+mn-ea"/>
-                <a:cs typeface="+mn-cs"/>
-              </a:defRPr>
-            </a:lvl9pPr>
-          </a:lstStyle>
-          <a:p>
-            <a:pPr marL="685800" lvl="1" indent="-457200">
-              <a:lnSpc>
-                <a:spcPct val="90000"/>
-              </a:lnSpc>
-              <a:spcAft>
-                <a:spcPts val="600"/>
-              </a:spcAft>
-              <a:buFont typeface="Wingdings" panose="05000000000000000000" pitchFamily="2" charset="2"/>
-              <a:buChar char="q"/>
-            </a:pPr>
-            <a:r>
-              <a:rPr lang="en-US" sz="2000" dirty="0"/>
-              <a:t>Product name longer than the standard 40 characters, with Vietnamese diacritics.</a:t>
-            </a:r>
-          </a:p>
-          <a:p>
-            <a:pPr marL="685800" lvl="1" indent="-457200">
-              <a:lnSpc>
-                <a:spcPct val="90000"/>
-              </a:lnSpc>
-              <a:spcAft>
-                <a:spcPts val="600"/>
-              </a:spcAft>
-              <a:buFont typeface="Wingdings" panose="05000000000000000000" pitchFamily="2" charset="2"/>
-              <a:buChar char="q"/>
-            </a:pPr>
-          </a:p>
-          <a:p>
-            <a:pPr marL="685800" lvl="1" indent="-457200">
-              <a:lnSpc>
-                <a:spcPct val="90000"/>
-              </a:lnSpc>
-              <a:spcAft>
-                <a:spcPts val="600"/>
-              </a:spcAft>
-              <a:buFont typeface="Wingdings" panose="05000000000000000000" pitchFamily="2" charset="2"/>
-              <a:buChar char="q"/>
-            </a:pPr>
-            <a:r>
-              <a:rPr lang="en-US" sz="2000" dirty="0"/>
-              <a:t>On the invoice: Vietnamese name on line 1, English name on line 2 (smaller font on EIV).</a:t>
-            </a:r>
-          </a:p>
-          <a:p>
-            <a:pPr marL="685800" lvl="1" indent="-457200">
-              <a:lnSpc>
-                <a:spcPct val="90000"/>
-              </a:lnSpc>
-              <a:spcAft>
-                <a:spcPts val="600"/>
-              </a:spcAft>
-              <a:buFont typeface="Wingdings" panose="05000000000000000000" pitchFamily="2" charset="2"/>
-              <a:buChar char="q"/>
-            </a:pPr>
-          </a:p>
-          <a:p>
-            <a:pPr marL="685800" lvl="1" indent="-457200">
-              <a:lnSpc>
-                <a:spcPct val="90000"/>
-              </a:lnSpc>
-              <a:spcAft>
-                <a:spcPts val="600"/>
-              </a:spcAft>
-              <a:buFont typeface="Wingdings" panose="05000000000000000000" pitchFamily="2" charset="2"/>
-              <a:buChar char="q"/>
-            </a:pPr>
-            <a:r>
-              <a:rPr lang="en-US" sz="2000" dirty="0"/>
-              <a:t>Extend to Phiếu Giao Nhận, Phiếu Xuất Kho Đại Lý, Phiếu Xuất Kho Nội Bộ.</a:t>
-            </a:r>
-          </a:p>
-          <a:p>
-            <a:pPr marL="685800" lvl="1" indent="-457200">
-              <a:lnSpc>
-                <a:spcPct val="90000"/>
-              </a:lnSpc>
-              <a:spcAft>
-                <a:spcPts val="600"/>
-              </a:spcAft>
-              <a:buFont typeface="Wingdings" panose="05000000000000000000" pitchFamily="2" charset="2"/>
-              <a:buChar char="q"/>
-            </a:pPr>
-          </a:p>
-          <a:p>
-            <a:pPr marL="685800" lvl="1" indent="-457200">
-              <a:lnSpc>
-                <a:spcPct val="90000"/>
-              </a:lnSpc>
-              <a:spcAft>
-                <a:spcPts val="600"/>
-              </a:spcAft>
-              <a:buFont typeface="Wingdings" panose="05000000000000000000" pitchFamily="2" charset="2"/>
-              <a:buChar char="q"/>
-            </a:pPr>
-            <a:r>
-              <a:rPr lang="en-US" sz="2000" dirty="0"/>
-              <a:t>Scope: apply for all BU nationwide.</a:t>
-            </a:r>
-          </a:p>
-        </p:txBody>
-      </p:sp>
-      <p:sp>
-        <p:nvSpPr>
-          <p:cNvPr id="6" name="Rounded Rectangle 5"/>
+          <a:lstStyle/>
+          <a:p>
+            <a:pPr algn="l"/>
+            <a:r>
+              <a:rPr sz="1500" b="1">
+                <a:solidFill>
+                  <a:srgbClr val="1A1A1A"/>
+                </a:solidFill>
+                <a:latin typeface="Arial"/>
+              </a:rPr>
+              <a:t>Tên dài, có dấu tiếng Việt</a:t>
+            </a:r>
+          </a:p>
+        </p:txBody>
+      </p:sp>
+      <p:sp>
+        <p:nvSpPr>
+          <p:cNvPr id="6" name="TextBox 5"/>
+          <p:cNvSpPr txBox="1"/>
+          <p:nvPr/>
+        </p:nvSpPr>
+        <p:spPr>
+          <a:xfrm>
+            <a:off x="1252728" y="2203703"/>
+            <a:ext cx="4553712" cy="566928"/>
+          </a:xfrm>
+          <a:prstGeom prst="rect">
+            <a:avLst/>
+          </a:prstGeom>
+          <a:noFill/>
+        </p:spPr>
+        <p:txBody>
+          <a:bodyPr wrap="square" lIns="0" rIns="0" tIns="0" bIns="0" anchor="t">
+            <a:spAutoFit/>
+          </a:bodyPr>
+          <a:lstStyle/>
+          <a:p>
+            <a:pPr algn="l"/>
+            <a:r>
+              <a:rPr sz="1200" b="0">
+                <a:solidFill>
+                  <a:srgbClr val="6B6B6B"/>
+                </a:solidFill>
+                <a:latin typeface="Arial"/>
+              </a:rPr>
+              <a:t>Vượt giới hạn 40 ký tự của Mat. Desc.</a:t>
+            </a:r>
+          </a:p>
+        </p:txBody>
+      </p:sp>
+      <p:sp>
+        <p:nvSpPr>
+          <p:cNvPr id="7" name="Rounded Rectangle 6"/>
           <p:cNvSpPr/>
           <p:nvPr/>
         </p:nvSpPr>
         <p:spPr>
           <a:xfrm>
-            <a:off x="8549640" y="1600200"/>
-            <a:ext cx="3063240" cy="4434840"/>
+            <a:off x="777240" y="2907791"/>
+            <a:ext cx="310896" cy="310896"/>
           </a:xfrm>
           <a:prstGeom prst="roundRect">
             <a:avLst>
-              <a:gd name="adj" fmla="val 4500"/>
+              <a:gd name="adj" fmla="val 18000"/>
+            </a:avLst>
+          </a:prstGeom>
+          <a:solidFill>
+            <a:srgbClr val="BE0028"/>
+          </a:solidFill>
+          <a:ln>
+            <a:noFill/>
+          </a:ln>
+          <a:effectLst/>
+        </p:spPr>
+        <p:style>
+          <a:lnRef idx="1">
+            <a:schemeClr val="accent1"/>
+          </a:lnRef>
+          <a:fillRef idx="3">
+            <a:schemeClr val="accent1"/>
+          </a:fillRef>
+          <a:effectRef idx="2">
+            <a:schemeClr val="accent1"/>
+          </a:effectRef>
+          <a:fontRef idx="minor">
+            <a:schemeClr val="lt1"/>
+          </a:fontRef>
+        </p:style>
+        <p:txBody>
+          <a:bodyPr rtlCol="0" anchor="ctr" lIns="0" rIns="0" tIns="0" bIns="0"/>
+          <a:lstStyle/>
+          <a:p>
+            <a:pPr algn="ctr"/>
+            <a:r>
+              <a:rPr sz="1300" b="1">
+                <a:solidFill>
+                  <a:srgbClr val="FFFFFF"/>
+                </a:solidFill>
+                <a:latin typeface="Arial"/>
+              </a:rPr>
+              <a:t>2</a:t>
+            </a:r>
+          </a:p>
+        </p:txBody>
+      </p:sp>
+      <p:sp>
+        <p:nvSpPr>
+          <p:cNvPr id="8" name="TextBox 7"/>
+          <p:cNvSpPr txBox="1"/>
+          <p:nvPr/>
+        </p:nvSpPr>
+        <p:spPr>
+          <a:xfrm>
+            <a:off x="1252728" y="2880360"/>
+            <a:ext cx="4553712" cy="292608"/>
+          </a:xfrm>
+          <a:prstGeom prst="rect">
+            <a:avLst/>
+          </a:prstGeom>
+          <a:noFill/>
+        </p:spPr>
+        <p:txBody>
+          <a:bodyPr wrap="square" lIns="0" rIns="0" tIns="0" bIns="0" anchor="t">
+            <a:spAutoFit/>
+          </a:bodyPr>
+          <a:lstStyle/>
+          <a:p>
+            <a:pPr algn="l"/>
+            <a:r>
+              <a:rPr sz="1500" b="1">
+                <a:solidFill>
+                  <a:srgbClr val="1A1A1A"/>
+                </a:solidFill>
+                <a:latin typeface="Arial"/>
+              </a:rPr>
+              <a:t>Trình bày 2 dòng trên hóa đơn</a:t>
+            </a:r>
+          </a:p>
+        </p:txBody>
+      </p:sp>
+      <p:sp>
+        <p:nvSpPr>
+          <p:cNvPr id="9" name="TextBox 8"/>
+          <p:cNvSpPr txBox="1"/>
+          <p:nvPr/>
+        </p:nvSpPr>
+        <p:spPr>
+          <a:xfrm>
+            <a:off x="1252728" y="3209544"/>
+            <a:ext cx="4553712" cy="566928"/>
+          </a:xfrm>
+          <a:prstGeom prst="rect">
+            <a:avLst/>
+          </a:prstGeom>
+          <a:noFill/>
+        </p:spPr>
+        <p:txBody>
+          <a:bodyPr wrap="square" lIns="0" rIns="0" tIns="0" bIns="0" anchor="t">
+            <a:spAutoFit/>
+          </a:bodyPr>
+          <a:lstStyle/>
+          <a:p>
+            <a:pPr algn="l"/>
+            <a:r>
+              <a:rPr sz="1200" b="0">
+                <a:solidFill>
+                  <a:srgbClr val="6B6B6B"/>
+                </a:solidFill>
+                <a:latin typeface="Arial"/>
+              </a:rPr>
+              <a:t>Dòng 1 tiếng Việt, dòng 2 tiếng Anh chữ nhỏ hơn trên EIV.</a:t>
+            </a:r>
+          </a:p>
+        </p:txBody>
+      </p:sp>
+      <p:sp>
+        <p:nvSpPr>
+          <p:cNvPr id="10" name="Rounded Rectangle 9"/>
+          <p:cNvSpPr/>
+          <p:nvPr/>
+        </p:nvSpPr>
+        <p:spPr>
+          <a:xfrm>
+            <a:off x="777240" y="3913632"/>
+            <a:ext cx="310896" cy="310896"/>
+          </a:xfrm>
+          <a:prstGeom prst="roundRect">
+            <a:avLst>
+              <a:gd name="adj" fmla="val 18000"/>
+            </a:avLst>
+          </a:prstGeom>
+          <a:solidFill>
+            <a:srgbClr val="BE0028"/>
+          </a:solidFill>
+          <a:ln>
+            <a:noFill/>
+          </a:ln>
+          <a:effectLst/>
+        </p:spPr>
+        <p:style>
+          <a:lnRef idx="1">
+            <a:schemeClr val="accent1"/>
+          </a:lnRef>
+          <a:fillRef idx="3">
+            <a:schemeClr val="accent1"/>
+          </a:fillRef>
+          <a:effectRef idx="2">
+            <a:schemeClr val="accent1"/>
+          </a:effectRef>
+          <a:fontRef idx="minor">
+            <a:schemeClr val="lt1"/>
+          </a:fontRef>
+        </p:style>
+        <p:txBody>
+          <a:bodyPr rtlCol="0" anchor="ctr" lIns="0" rIns="0" tIns="0" bIns="0"/>
+          <a:lstStyle/>
+          <a:p>
+            <a:pPr algn="ctr"/>
+            <a:r>
+              <a:rPr sz="1300" b="1">
+                <a:solidFill>
+                  <a:srgbClr val="FFFFFF"/>
+                </a:solidFill>
+                <a:latin typeface="Arial"/>
+              </a:rPr>
+              <a:t>3</a:t>
+            </a:r>
+          </a:p>
+        </p:txBody>
+      </p:sp>
+      <p:sp>
+        <p:nvSpPr>
+          <p:cNvPr id="11" name="TextBox 10"/>
+          <p:cNvSpPr txBox="1"/>
+          <p:nvPr/>
+        </p:nvSpPr>
+        <p:spPr>
+          <a:xfrm>
+            <a:off x="1252728" y="3886200"/>
+            <a:ext cx="4553712" cy="292608"/>
+          </a:xfrm>
+          <a:prstGeom prst="rect">
+            <a:avLst/>
+          </a:prstGeom>
+          <a:noFill/>
+        </p:spPr>
+        <p:txBody>
+          <a:bodyPr wrap="square" lIns="0" rIns="0" tIns="0" bIns="0" anchor="t">
+            <a:spAutoFit/>
+          </a:bodyPr>
+          <a:lstStyle/>
+          <a:p>
+            <a:pPr algn="l"/>
+            <a:r>
+              <a:rPr sz="1500" b="1">
+                <a:solidFill>
+                  <a:srgbClr val="1A1A1A"/>
+                </a:solidFill>
+                <a:latin typeface="Arial"/>
+              </a:rPr>
+              <a:t>Mở rộng sang chứng từ kho</a:t>
+            </a:r>
+          </a:p>
+        </p:txBody>
+      </p:sp>
+      <p:sp>
+        <p:nvSpPr>
+          <p:cNvPr id="12" name="TextBox 11"/>
+          <p:cNvSpPr txBox="1"/>
+          <p:nvPr/>
+        </p:nvSpPr>
+        <p:spPr>
+          <a:xfrm>
+            <a:off x="1252728" y="4215384"/>
+            <a:ext cx="4553712" cy="566928"/>
+          </a:xfrm>
+          <a:prstGeom prst="rect">
+            <a:avLst/>
+          </a:prstGeom>
+          <a:noFill/>
+        </p:spPr>
+        <p:txBody>
+          <a:bodyPr wrap="square" lIns="0" rIns="0" tIns="0" bIns="0" anchor="t">
+            <a:spAutoFit/>
+          </a:bodyPr>
+          <a:lstStyle/>
+          <a:p>
+            <a:pPr algn="l"/>
+            <a:r>
+              <a:rPr sz="1200" b="0">
+                <a:solidFill>
+                  <a:srgbClr val="6B6B6B"/>
+                </a:solidFill>
+                <a:latin typeface="Arial"/>
+              </a:rPr>
+              <a:t>Phiếu Giao Nhận, Phiếu Xuất Kho Đại Lý, Phiếu Xuất Kho Nội Bộ.</a:t>
+            </a:r>
+          </a:p>
+        </p:txBody>
+      </p:sp>
+      <p:sp>
+        <p:nvSpPr>
+          <p:cNvPr id="13" name="Rounded Rectangle 12"/>
+          <p:cNvSpPr/>
+          <p:nvPr/>
+        </p:nvSpPr>
+        <p:spPr>
+          <a:xfrm>
+            <a:off x="777240" y="4919472"/>
+            <a:ext cx="310896" cy="310896"/>
+          </a:xfrm>
+          <a:prstGeom prst="roundRect">
+            <a:avLst>
+              <a:gd name="adj" fmla="val 18000"/>
+            </a:avLst>
+          </a:prstGeom>
+          <a:solidFill>
+            <a:srgbClr val="BE0028"/>
+          </a:solidFill>
+          <a:ln>
+            <a:noFill/>
+          </a:ln>
+          <a:effectLst/>
+        </p:spPr>
+        <p:style>
+          <a:lnRef idx="1">
+            <a:schemeClr val="accent1"/>
+          </a:lnRef>
+          <a:fillRef idx="3">
+            <a:schemeClr val="accent1"/>
+          </a:fillRef>
+          <a:effectRef idx="2">
+            <a:schemeClr val="accent1"/>
+          </a:effectRef>
+          <a:fontRef idx="minor">
+            <a:schemeClr val="lt1"/>
+          </a:fontRef>
+        </p:style>
+        <p:txBody>
+          <a:bodyPr rtlCol="0" anchor="ctr" lIns="0" rIns="0" tIns="0" bIns="0"/>
+          <a:lstStyle/>
+          <a:p>
+            <a:pPr algn="ctr"/>
+            <a:r>
+              <a:rPr sz="1300" b="1">
+                <a:solidFill>
+                  <a:srgbClr val="FFFFFF"/>
+                </a:solidFill>
+                <a:latin typeface="Arial"/>
+              </a:rPr>
+              <a:t>4</a:t>
+            </a:r>
+          </a:p>
+        </p:txBody>
+      </p:sp>
+      <p:sp>
+        <p:nvSpPr>
+          <p:cNvPr id="14" name="TextBox 13"/>
+          <p:cNvSpPr txBox="1"/>
+          <p:nvPr/>
+        </p:nvSpPr>
+        <p:spPr>
+          <a:xfrm>
+            <a:off x="1252728" y="4892040"/>
+            <a:ext cx="4553712" cy="292608"/>
+          </a:xfrm>
+          <a:prstGeom prst="rect">
+            <a:avLst/>
+          </a:prstGeom>
+          <a:noFill/>
+        </p:spPr>
+        <p:txBody>
+          <a:bodyPr wrap="square" lIns="0" rIns="0" tIns="0" bIns="0" anchor="t">
+            <a:spAutoFit/>
+          </a:bodyPr>
+          <a:lstStyle/>
+          <a:p>
+            <a:pPr algn="l"/>
+            <a:r>
+              <a:rPr sz="1500" b="1">
+                <a:solidFill>
+                  <a:srgbClr val="1A1A1A"/>
+                </a:solidFill>
+                <a:latin typeface="Arial"/>
+              </a:rPr>
+              <a:t>Phạm vi áp dụng</a:t>
+            </a:r>
+          </a:p>
+        </p:txBody>
+      </p:sp>
+      <p:sp>
+        <p:nvSpPr>
+          <p:cNvPr id="15" name="TextBox 14"/>
+          <p:cNvSpPr txBox="1"/>
+          <p:nvPr/>
+        </p:nvSpPr>
+        <p:spPr>
+          <a:xfrm>
+            <a:off x="1252728" y="5221224"/>
+            <a:ext cx="4553712" cy="566928"/>
+          </a:xfrm>
+          <a:prstGeom prst="rect">
+            <a:avLst/>
+          </a:prstGeom>
+          <a:noFill/>
+        </p:spPr>
+        <p:txBody>
+          <a:bodyPr wrap="square" lIns="0" rIns="0" tIns="0" bIns="0" anchor="t">
+            <a:spAutoFit/>
+          </a:bodyPr>
+          <a:lstStyle/>
+          <a:p>
+            <a:pPr algn="l"/>
+            <a:r>
+              <a:rPr sz="1200" b="0">
+                <a:solidFill>
+                  <a:srgbClr val="6B6B6B"/>
+                </a:solidFill>
+                <a:latin typeface="Arial"/>
+              </a:rPr>
+              <a:t>All BU nationwide.</a:t>
+            </a:r>
+          </a:p>
+        </p:txBody>
+      </p:sp>
+      <p:sp>
+        <p:nvSpPr>
+          <p:cNvPr id="16" name="Rounded Rectangle 15"/>
+          <p:cNvSpPr/>
+          <p:nvPr/>
+        </p:nvSpPr>
+        <p:spPr>
+          <a:xfrm>
+            <a:off x="6446520" y="1783080"/>
+            <a:ext cx="5120640" cy="4160520"/>
+          </a:xfrm>
+          <a:prstGeom prst="roundRect">
+            <a:avLst>
+              <a:gd name="adj" fmla="val 3000"/>
             </a:avLst>
           </a:prstGeom>
           <a:solidFill>
@@ -18247,22 +18534,19 @@
         <p:txBody>
           <a:bodyPr rtlCol="0" anchor="ctr"/>
           <a:lstStyle/>
-          <a:p>
-            <a:pPr algn="ctr"/>
-            <a:endParaRPr/>
-          </a:p>
-        </p:txBody>
-      </p:sp>
-      <p:sp>
-        <p:nvSpPr>
-          <p:cNvPr id="7" name="Rounded Rectangle 6"/>
+          <a:p/>
+        </p:txBody>
+      </p:sp>
+      <p:sp>
+        <p:nvSpPr>
+          <p:cNvPr id="17" name="Rounded Rectangle 16"/>
           <p:cNvSpPr/>
           <p:nvPr/>
         </p:nvSpPr>
         <p:spPr>
           <a:xfrm>
-            <a:off x="8549640" y="1600200"/>
-            <a:ext cx="3063240" cy="128016"/>
+            <a:off x="6446520" y="1783080"/>
+            <a:ext cx="5120640" cy="128016"/>
           </a:xfrm>
           <a:prstGeom prst="roundRect">
             <a:avLst>
@@ -18294,26 +18578,58 @@
         <p:txBody>
           <a:bodyPr rtlCol="0" anchor="ctr"/>
           <a:lstStyle/>
+          <a:p/>
+        </p:txBody>
+      </p:sp>
+      <p:sp>
+        <p:nvSpPr>
+          <p:cNvPr id="18" name="TextBox 17"/>
+          <p:cNvSpPr txBox="1"/>
+          <p:nvPr/>
+        </p:nvSpPr>
+        <p:spPr>
+          <a:xfrm>
+            <a:off x="6446520" y="2057400"/>
+            <a:ext cx="5120640" cy="274320"/>
+          </a:xfrm>
+          <a:prstGeom prst="rect">
+            <a:avLst/>
+          </a:prstGeom>
+          <a:noFill/>
+        </p:spPr>
+        <p:txBody>
+          <a:bodyPr wrap="square" lIns="0" rIns="0" tIns="0" bIns="0" anchor="t">
+            <a:spAutoFit/>
+          </a:bodyPr>
+          <a:lstStyle/>
           <a:p>
             <a:pPr algn="ctr"/>
-            <a:endParaRPr/>
-          </a:p>
-        </p:txBody>
-      </p:sp>
-      <p:sp>
-        <p:nvSpPr>
-          <p:cNvPr id="8" name="Rounded Rectangle 7"/>
+            <a:r>
+              <a:rPr sz="1250" b="1">
+                <a:solidFill>
+                  <a:srgbClr val="BE0028"/>
+                </a:solidFill>
+                <a:latin typeface="Arial"/>
+              </a:rPr>
+              <a:t>TO-BE  ·  Hóa đơn điện tử</a:t>
+            </a:r>
+          </a:p>
+        </p:txBody>
+      </p:sp>
+      <p:sp>
+        <p:nvSpPr>
+          <p:cNvPr id="19" name="Rounded Rectangle 18"/>
           <p:cNvSpPr/>
           <p:nvPr/>
         </p:nvSpPr>
         <p:spPr>
           <a:xfrm>
-            <a:off x="8750808" y="1920240"/>
-            <a:ext cx="2660904" cy="2331720"/>
+            <a:off x="6675120" y="2487168"/>
+            <a:ext cx="4663440" cy="1874519"/>
           </a:xfrm>
           <a:prstGeom prst="roundRect">
             <a:avLst>
-              <a:gd name="adj" fmla="val 6000"/>
+              <a:gd name="adj" fmla="val 4000"/>
             </a:avLst>
           </a:prstGeom>
           <a:solidFill>
@@ -18343,22 +18659,19 @@
         <p:txBody>
           <a:bodyPr rtlCol="0" anchor="ctr"/>
           <a:lstStyle/>
-          <a:p>
-            <a:pPr algn="ctr"/>
-            <a:endParaRPr/>
-          </a:p>
-        </p:txBody>
-      </p:sp>
-      <p:sp>
-        <p:nvSpPr>
-          <p:cNvPr id="9" name="TextBox 8"/>
+          <a:p/>
+        </p:txBody>
+      </p:sp>
+      <p:sp>
+        <p:nvSpPr>
+          <p:cNvPr id="20" name="TextBox 19"/>
           <p:cNvSpPr txBox="1"/>
           <p:nvPr/>
         </p:nvSpPr>
         <p:spPr>
           <a:xfrm>
-            <a:off x="8915400" y="2057400"/>
-            <a:ext cx="2331720" cy="274320"/>
+            <a:off x="6858000" y="2651760"/>
+            <a:ext cx="4297680" cy="201168"/>
           </a:xfrm>
           <a:prstGeom prst="rect">
             <a:avLst/>
@@ -18366,42 +18679,40 @@
           <a:noFill/>
         </p:spPr>
         <p:txBody>
-          <a:bodyPr wrap="square" lIns="0" tIns="0" rIns="0" bIns="0">
+          <a:bodyPr wrap="square" lIns="0" rIns="0" tIns="0" bIns="0" anchor="t">
             <a:spAutoFit/>
           </a:bodyPr>
           <a:lstStyle/>
           <a:p>
             <a:pPr algn="l"/>
             <a:r>
-              <a:rPr sz="1300" b="1" i="0">
-                <a:solidFill>
-                  <a:srgbClr val="1A1A1A"/>
-                </a:solidFill>
-                <a:latin typeface="Calibri"/>
+              <a:rPr sz="1000" b="0">
+                <a:solidFill>
+                  <a:srgbClr val="6B6B6B"/>
+                </a:solidFill>
+                <a:latin typeface="Arial"/>
               </a:rPr>
-              <a:t>HÓA ĐƠN / EIV</a:t>
-            </a:r>
-          </a:p>
-        </p:txBody>
-      </p:sp>
-      <p:sp>
-        <p:nvSpPr>
-          <p:cNvPr id="10" name="Rounded Rectangle 9"/>
+              <a:t>Tên hàng hóa, dịch vụ</a:t>
+            </a:r>
+          </a:p>
+        </p:txBody>
+      </p:sp>
+      <p:sp>
+        <p:nvSpPr>
+          <p:cNvPr id="21" name="Rectangle 20"/>
           <p:cNvSpPr/>
           <p:nvPr/>
         </p:nvSpPr>
         <p:spPr>
           <a:xfrm>
-            <a:off x="10360152" y="2057400"/>
-            <a:ext cx="914400" cy="274320"/>
-          </a:xfrm>
-          <a:prstGeom prst="roundRect">
-            <a:avLst>
-              <a:gd name="adj" fmla="val 50000"/>
-            </a:avLst>
+            <a:off x="6858000" y="2907792"/>
+            <a:ext cx="4297680" cy="10972"/>
+          </a:xfrm>
+          <a:prstGeom prst="rect">
+            <a:avLst/>
           </a:prstGeom>
           <a:solidFill>
-            <a:srgbClr val="EF233C"/>
+            <a:srgbClr val="E9E9E9"/>
           </a:solidFill>
           <a:ln>
             <a:noFill/>
@@ -18423,110 +18734,21 @@
           </a:fontRef>
         </p:style>
         <p:txBody>
-          <a:bodyPr wrap="none" lIns="0" tIns="0" rIns="0" bIns="0" rtlCol="0" anchor="ctr"/>
-          <a:lstStyle/>
-          <a:p>
-            <a:pPr algn="ctr"/>
-            <a:r>
-              <a:rPr sz="1100" b="1">
-                <a:solidFill>
-                  <a:srgbClr val="FFFFFF"/>
-                </a:solidFill>
-                <a:latin typeface="Calibri"/>
-              </a:rPr>
-              <a:t>LAYOUT</a:t>
-            </a:r>
-          </a:p>
-        </p:txBody>
-      </p:sp>
-      <p:sp>
-        <p:nvSpPr>
-          <p:cNvPr id="11" name="Rectangle 10"/>
-          <p:cNvSpPr/>
-          <p:nvPr/>
-        </p:nvSpPr>
-        <p:spPr>
-          <a:xfrm>
-            <a:off x="8750808" y="2450592"/>
-            <a:ext cx="2660904" cy="1"/>
-          </a:xfrm>
-          <a:prstGeom prst="rect">
-            <a:avLst/>
-          </a:prstGeom>
-          <a:ln>
-            <a:solidFill>
-              <a:srgbClr val="E9E9E9"/>
-            </a:solidFill>
-          </a:ln>
-        </p:spPr>
-        <p:style>
-          <a:lnRef idx="1">
-            <a:schemeClr val="accent1"/>
-          </a:lnRef>
-          <a:fillRef idx="3">
-            <a:schemeClr val="accent1"/>
-          </a:fillRef>
-          <a:effectRef idx="2">
-            <a:schemeClr val="accent1"/>
-          </a:effectRef>
-          <a:fontRef idx="minor">
-            <a:schemeClr val="lt1"/>
-          </a:fontRef>
-        </p:style>
-        <p:txBody>
           <a:bodyPr rtlCol="0" anchor="ctr"/>
           <a:lstStyle/>
-          <a:p>
-            <a:pPr algn="ctr"/>
-            <a:endParaRPr/>
-          </a:p>
-        </p:txBody>
-      </p:sp>
-      <p:cxnSp>
-        <p:nvCxnSpPr>
-          <p:cNvPr id="12" name="Connector 11"/>
-          <p:cNvCxnSpPr/>
-          <p:nvPr/>
-        </p:nvCxnSpPr>
-        <p:spPr>
-          <a:xfrm>
-            <a:off x="8750808" y="2450592"/>
-            <a:ext cx="2660904" cy="0"/>
-          </a:xfrm>
-          <a:prstGeom prst="line">
-            <a:avLst/>
-          </a:prstGeom>
-          <a:ln w="9525">
-            <a:solidFill>
-              <a:srgbClr val="E9E9E9"/>
-            </a:solidFill>
-          </a:ln>
-        </p:spPr>
-        <p:style>
-          <a:lnRef idx="2">
-            <a:schemeClr val="accent1"/>
-          </a:lnRef>
-          <a:fillRef idx="0">
-            <a:schemeClr val="accent1"/>
-          </a:fillRef>
-          <a:effectRef idx="1">
-            <a:schemeClr val="accent1"/>
-          </a:effectRef>
-          <a:fontRef idx="minor">
-            <a:schemeClr val="tx1"/>
-          </a:fontRef>
-        </p:style>
-      </p:cxnSp>
-      <p:sp>
-        <p:nvSpPr>
-          <p:cNvPr id="13" name="TextBox 12"/>
+          <a:p/>
+        </p:txBody>
+      </p:sp>
+      <p:sp>
+        <p:nvSpPr>
+          <p:cNvPr id="22" name="TextBox 21"/>
           <p:cNvSpPr txBox="1"/>
           <p:nvPr/>
         </p:nvSpPr>
         <p:spPr>
           <a:xfrm>
-            <a:off x="8915400" y="2578608"/>
-            <a:ext cx="2331720" cy="274320"/>
+            <a:off x="6858000" y="3035808"/>
+            <a:ext cx="3931920" cy="566928"/>
           </a:xfrm>
           <a:prstGeom prst="rect">
             <a:avLst/>
@@ -18534,34 +18756,34 @@
           <a:noFill/>
         </p:spPr>
         <p:txBody>
-          <a:bodyPr wrap="square" lIns="0" tIns="0" rIns="0" bIns="0">
+          <a:bodyPr wrap="square" lIns="0" rIns="0" tIns="0" bIns="0" anchor="t">
             <a:spAutoFit/>
           </a:bodyPr>
           <a:lstStyle/>
           <a:p>
             <a:pPr algn="l"/>
             <a:r>
-              <a:rPr sz="1050" b="0" i="0">
+              <a:rPr sz="1300" b="1">
                 <a:solidFill>
                   <a:srgbClr val="1A1A1A"/>
                 </a:solidFill>
-                <a:latin typeface="Calibri"/>
+                <a:latin typeface="Arial"/>
               </a:rPr>
-              <a:t>Tên tiếng Việt — dòng 1</a:t>
-            </a:r>
-          </a:p>
-        </p:txBody>
-      </p:sp>
-      <p:sp>
-        <p:nvSpPr>
-          <p:cNvPr id="14" name="TextBox 13"/>
+              <a:t>Kem dưỡng da chống nắng ABC SPF50+ dạng gel 50ml</a:t>
+            </a:r>
+          </a:p>
+        </p:txBody>
+      </p:sp>
+      <p:sp>
+        <p:nvSpPr>
+          <p:cNvPr id="23" name="TextBox 22"/>
           <p:cNvSpPr txBox="1"/>
           <p:nvPr/>
         </p:nvSpPr>
         <p:spPr>
           <a:xfrm>
-            <a:off x="8915400" y="2880360"/>
-            <a:ext cx="2331720" cy="502920"/>
+            <a:off x="6858000" y="3712463"/>
+            <a:ext cx="3931920" cy="237744"/>
           </a:xfrm>
           <a:prstGeom prst="rect">
             <a:avLst/>
@@ -18569,173 +18791,34 @@
           <a:noFill/>
         </p:spPr>
         <p:txBody>
-          <a:bodyPr wrap="square" lIns="0" tIns="0" rIns="0" bIns="0">
+          <a:bodyPr wrap="square" lIns="0" rIns="0" tIns="0" bIns="0" anchor="t">
             <a:spAutoFit/>
           </a:bodyPr>
           <a:lstStyle/>
           <a:p>
             <a:pPr algn="l"/>
             <a:r>
-              <a:rPr sz="1000" b="0" i="1">
+              <a:rPr sz="950" b="0">
                 <a:solidFill>
                   <a:srgbClr val="6B6B6B"/>
                 </a:solidFill>
-                <a:latin typeface="Calibri"/>
+                <a:latin typeface="Arial"/>
               </a:rPr>
-              <a:t>English name — dòng 2</a:t>
-            </a:r>
-            <a:br/>
-            <a:r>
-              <a:rPr sz="1000" b="0" i="1">
-                <a:solidFill>
-                  <a:srgbClr val="6B6B6B"/>
-                </a:solidFill>
-                <a:latin typeface="Calibri"/>
-              </a:rPr>
-              <a:t>chữ nhỏ hơn trên EIV</a:t>
-            </a:r>
-          </a:p>
-        </p:txBody>
-      </p:sp>
-      <p:sp>
-        <p:nvSpPr>
-          <p:cNvPr id="15" name="TextBox 14"/>
-          <p:cNvSpPr txBox="1"/>
-          <p:nvPr/>
-        </p:nvSpPr>
-        <p:spPr>
-          <a:xfrm>
-            <a:off x="8915400" y="3456432"/>
-            <a:ext cx="2331720" cy="274320"/>
-          </a:xfrm>
-          <a:prstGeom prst="rect">
-            <a:avLst/>
-          </a:prstGeom>
-          <a:noFill/>
-        </p:spPr>
-        <p:txBody>
-          <a:bodyPr wrap="square" lIns="0" tIns="0" rIns="0" bIns="0">
-            <a:spAutoFit/>
-          </a:bodyPr>
-          <a:lstStyle/>
-          <a:p>
-            <a:pPr algn="l"/>
-            <a:r>
-              <a:rPr sz="950" b="0" i="0">
-                <a:solidFill>
-                  <a:srgbClr val="BE0028"/>
-                </a:solidFill>
-                <a:latin typeface="Calibri"/>
-              </a:rPr>
-              <a:t>PGN · PXKDL · PXKNB</a:t>
-            </a:r>
-          </a:p>
-        </p:txBody>
-      </p:sp>
-      <p:pic>
-        <p:nvPicPr>
-          <p:cNvPr id="16" name="Picture 15" descr="image.png"/>
-          <p:cNvPicPr>
-            <a:picLocks noChangeAspect="1"/>
-          </p:cNvPicPr>
-          <p:nvPr/>
-        </p:nvPicPr>
-        <p:blipFill>
-          <a:blip r:embed="rId2"/>
-          <a:stretch>
-            <a:fillRect/>
-          </a:stretch>
-        </p:blipFill>
-        <p:spPr>
-          <a:xfrm>
-            <a:off x="10863072" y="3749040"/>
-            <a:ext cx="384048" cy="384048"/>
-          </a:xfrm>
-          <a:prstGeom prst="rect">
-            <a:avLst/>
-          </a:prstGeom>
-        </p:spPr>
-      </p:pic>
-      <p:sp>
-        <p:nvSpPr>
-          <p:cNvPr id="17" name="TextBox 16"/>
-          <p:cNvSpPr txBox="1"/>
-          <p:nvPr/>
-        </p:nvSpPr>
-        <p:spPr>
-          <a:xfrm>
-            <a:off x="8915400" y="3822192"/>
-            <a:ext cx="1929384" cy="274320"/>
-          </a:xfrm>
-          <a:prstGeom prst="rect">
-            <a:avLst/>
-          </a:prstGeom>
-          <a:noFill/>
-        </p:spPr>
-        <p:txBody>
-          <a:bodyPr wrap="square" lIns="0" tIns="0" rIns="0" bIns="0">
-            <a:spAutoFit/>
-          </a:bodyPr>
-          <a:lstStyle/>
-          <a:p>
-            <a:pPr algn="l"/>
-            <a:r>
-              <a:rPr sz="950" b="0" i="1">
-                <a:solidFill>
-                  <a:srgbClr val="6B6B6B"/>
-                </a:solidFill>
-                <a:latin typeface="Calibri"/>
-              </a:rPr>
-              <a:t>All BU nationwide</a:t>
-            </a:r>
-          </a:p>
-        </p:txBody>
-      </p:sp>
-      <p:sp>
-        <p:nvSpPr>
-          <p:cNvPr id="18" name="TextBox 17"/>
-          <p:cNvSpPr txBox="1"/>
-          <p:nvPr/>
-        </p:nvSpPr>
-        <p:spPr>
-          <a:xfrm>
-            <a:off x="8549640" y="4507992"/>
-            <a:ext cx="3063240" cy="320040"/>
-          </a:xfrm>
-          <a:prstGeom prst="rect">
-            <a:avLst/>
-          </a:prstGeom>
-          <a:noFill/>
-        </p:spPr>
-        <p:txBody>
-          <a:bodyPr wrap="square" lIns="0" tIns="0" rIns="0" bIns="0">
-            <a:spAutoFit/>
-          </a:bodyPr>
-          <a:lstStyle/>
-          <a:p>
-            <a:pPr algn="ctr"/>
-            <a:r>
-              <a:rPr sz="1250" b="1" i="0">
-                <a:solidFill>
-                  <a:srgbClr val="BE0028"/>
-                </a:solidFill>
-                <a:latin typeface="Calibri"/>
-              </a:rPr>
-              <a:t>REQUIREMENT  ·  Display Format</a:t>
-            </a:r>
-          </a:p>
-        </p:txBody>
-      </p:sp>
-      <p:sp>
-        <p:nvSpPr>
-          <p:cNvPr id="19" name="Rounded Rectangle 18"/>
+              <a:t>ABC SUNSCREEN GEL SPF50+ 50ML</a:t>
+            </a:r>
+          </a:p>
+        </p:txBody>
+      </p:sp>
+      <p:sp>
+        <p:nvSpPr>
+          <p:cNvPr id="24" name="Rounded Rectangle 23"/>
           <p:cNvSpPr/>
           <p:nvPr/>
         </p:nvSpPr>
         <p:spPr>
           <a:xfrm>
-            <a:off x="9304020" y="5468112"/>
-            <a:ext cx="1554480" cy="347472"/>
+            <a:off x="10881360" y="3054096"/>
+            <a:ext cx="274320" cy="274320"/>
           </a:xfrm>
           <a:prstGeom prst="roundRect">
             <a:avLst>
@@ -18765,18 +18848,196 @@
           </a:fontRef>
         </p:style>
         <p:txBody>
-          <a:bodyPr wrap="none" lIns="0" tIns="0" rIns="0" bIns="0" rtlCol="0" anchor="ctr"/>
+          <a:bodyPr rtlCol="0" anchor="ctr" lIns="0" rIns="0" tIns="0" bIns="0"/>
           <a:lstStyle/>
           <a:p>
             <a:pPr algn="ctr"/>
             <a:r>
+              <a:rPr sz="1000" b="1">
+                <a:solidFill>
+                  <a:srgbClr val="FFFFFF"/>
+                </a:solidFill>
+                <a:latin typeface="Arial"/>
+              </a:rPr>
+              <a:t>1</a:t>
+            </a:r>
+          </a:p>
+        </p:txBody>
+      </p:sp>
+      <p:sp>
+        <p:nvSpPr>
+          <p:cNvPr id="25" name="Rounded Rectangle 24"/>
+          <p:cNvSpPr/>
+          <p:nvPr/>
+        </p:nvSpPr>
+        <p:spPr>
+          <a:xfrm>
+            <a:off x="10881360" y="3703320"/>
+            <a:ext cx="274320" cy="274320"/>
+          </a:xfrm>
+          <a:prstGeom prst="roundRect">
+            <a:avLst>
+              <a:gd name="adj" fmla="val 50000"/>
+            </a:avLst>
+          </a:prstGeom>
+          <a:solidFill>
+            <a:srgbClr val="6B6B6B"/>
+          </a:solidFill>
+          <a:ln>
+            <a:noFill/>
+          </a:ln>
+          <a:effectLst/>
+        </p:spPr>
+        <p:style>
+          <a:lnRef idx="1">
+            <a:schemeClr val="accent1"/>
+          </a:lnRef>
+          <a:fillRef idx="3">
+            <a:schemeClr val="accent1"/>
+          </a:fillRef>
+          <a:effectRef idx="2">
+            <a:schemeClr val="accent1"/>
+          </a:effectRef>
+          <a:fontRef idx="minor">
+            <a:schemeClr val="lt1"/>
+          </a:fontRef>
+        </p:style>
+        <p:txBody>
+          <a:bodyPr rtlCol="0" anchor="ctr" lIns="0" rIns="0" tIns="0" bIns="0"/>
+          <a:lstStyle/>
+          <a:p>
+            <a:pPr algn="ctr"/>
+            <a:r>
+              <a:rPr sz="1000" b="1">
+                <a:solidFill>
+                  <a:srgbClr val="FFFFFF"/>
+                </a:solidFill>
+                <a:latin typeface="Arial"/>
+              </a:rPr>
+              <a:t>2</a:t>
+            </a:r>
+          </a:p>
+        </p:txBody>
+      </p:sp>
+      <p:sp>
+        <p:nvSpPr>
+          <p:cNvPr id="26" name="TextBox 25"/>
+          <p:cNvSpPr txBox="1"/>
+          <p:nvPr/>
+        </p:nvSpPr>
+        <p:spPr>
+          <a:xfrm>
+            <a:off x="6675120" y="4572000"/>
+            <a:ext cx="4663440" cy="237744"/>
+          </a:xfrm>
+          <a:prstGeom prst="rect">
+            <a:avLst/>
+          </a:prstGeom>
+          <a:noFill/>
+        </p:spPr>
+        <p:txBody>
+          <a:bodyPr wrap="square" lIns="0" rIns="0" tIns="0" bIns="0" anchor="t">
+            <a:spAutoFit/>
+          </a:bodyPr>
+          <a:lstStyle/>
+          <a:p>
+            <a:pPr algn="l"/>
+            <a:r>
               <a:rPr sz="1100" b="1">
                 <a:solidFill>
-                  <a:srgbClr val="FFFFFF"/>
-                </a:solidFill>
-                <a:latin typeface="Calibri"/>
+                  <a:srgbClr val="BE0028"/>
+                </a:solidFill>
+                <a:latin typeface="Arial"/>
               </a:rPr>
-              <a:t>TO-BE</a:t>
+              <a:t>1</a:t>
+            </a:r>
+            <a:r>
+              <a:rPr sz="1100" b="0">
+                <a:solidFill>
+                  <a:srgbClr val="1A1A1A"/>
+                </a:solidFill>
+                <a:latin typeface="Arial"/>
+              </a:rPr>
+              <a:t>  Tiếng Việt có dấu — chữ lớn, dòng đầu</a:t>
+            </a:r>
+          </a:p>
+        </p:txBody>
+      </p:sp>
+      <p:sp>
+        <p:nvSpPr>
+          <p:cNvPr id="27" name="TextBox 26"/>
+          <p:cNvSpPr txBox="1"/>
+          <p:nvPr/>
+        </p:nvSpPr>
+        <p:spPr>
+          <a:xfrm>
+            <a:off x="6675120" y="4864608"/>
+            <a:ext cx="4663440" cy="237744"/>
+          </a:xfrm>
+          <a:prstGeom prst="rect">
+            <a:avLst/>
+          </a:prstGeom>
+          <a:noFill/>
+        </p:spPr>
+        <p:txBody>
+          <a:bodyPr wrap="square" lIns="0" rIns="0" tIns="0" bIns="0" anchor="t">
+            <a:spAutoFit/>
+          </a:bodyPr>
+          <a:lstStyle/>
+          <a:p>
+            <a:pPr algn="l"/>
+            <a:r>
+              <a:rPr sz="1100" b="1">
+                <a:solidFill>
+                  <a:srgbClr val="6B6B6B"/>
+                </a:solidFill>
+                <a:latin typeface="Arial"/>
+              </a:rPr>
+              <a:t>2</a:t>
+            </a:r>
+            <a:r>
+              <a:rPr sz="1100" b="0">
+                <a:solidFill>
+                  <a:srgbClr val="1A1A1A"/>
+                </a:solidFill>
+                <a:latin typeface="Arial"/>
+              </a:rPr>
+              <a:t>  Tiếng Anh — chữ nhỏ hơn, dòng dưới</a:t>
+            </a:r>
+          </a:p>
+        </p:txBody>
+      </p:sp>
+      <p:sp>
+        <p:nvSpPr>
+          <p:cNvPr id="28" name="TextBox 27"/>
+          <p:cNvSpPr txBox="1"/>
+          <p:nvPr/>
+        </p:nvSpPr>
+        <p:spPr>
+          <a:xfrm>
+            <a:off x="6675120" y="5285232"/>
+            <a:ext cx="4663440" cy="274320"/>
+          </a:xfrm>
+          <a:prstGeom prst="rect">
+            <a:avLst/>
+          </a:prstGeom>
+          <a:noFill/>
+        </p:spPr>
+        <p:txBody>
+          <a:bodyPr wrap="square" lIns="0" rIns="0" tIns="0" bIns="0" anchor="t">
+            <a:spAutoFit/>
+          </a:bodyPr>
+          <a:lstStyle/>
+          <a:p>
+            <a:pPr algn="l"/>
+            <a:r>
+              <a:rPr sz="1100" b="1">
+                <a:solidFill>
+                  <a:srgbClr val="BE0028"/>
+                </a:solidFill>
+                <a:latin typeface="Arial"/>
+              </a:rPr>
+              <a:t>→ Áp dụng cho EIV và cả PGN / PXKDL / PXKNB.</a:t>
             </a:r>
           </a:p>
         </p:txBody>
@@ -18836,7 +19097,7 @@
         <p:spPr>
           <a:xfrm>
             <a:off x="3260034" y="175127"/>
-            <a:ext cx="7189763" cy="1068457"/>
+            <a:ext cx="7189763" cy="1239838"/>
           </a:xfrm>
         </p:spPr>
         <p:txBody>
@@ -18849,12 +19110,12 @@
               </a:solidFill>
             </a:endParaRPr>
             <a:r>
-              <a:rPr lang="en-US" dirty="0">
+              <a:rPr lang="en-US">
                 <a:solidFill>
                   <a:schemeClr val="tx1"/>
                 </a:solidFill>
               </a:rPr>
-              <a:t>Giải pháp – Solution design</a:t>
+              <a:t>Giải pháp</a:t>
             </a:r>
           </a:p>
         </p:txBody>
@@ -18895,317 +19156,24 @@
       </p:sp>
       <p:sp>
         <p:nvSpPr>
-          <p:cNvPr id="5" name="Subtitle 2">
-            <a:extLst>
-              <a:ext uri="{FF2B5EF4-FFF2-40B4-BE49-F238E27FC236}">
-                <a16:creationId xmlns:a16="http://schemas.microsoft.com/office/drawing/2014/main" id="{73B36D05-A0DC-E96E-C0B3-3D162E2B34C4}"/>
-              </a:ext>
-            </a:extLst>
-          </p:cNvPr>
-          <p:cNvSpPr txBox="1">
-            <a:spLocks/>
-          </p:cNvSpPr>
-          <p:nvPr/>
-        </p:nvSpPr>
-        <p:spPr>
-          <a:xfrm>
-            <a:off x="1122977" y="2141550"/>
-            <a:ext cx="7040880" cy="3750095"/>
-          </a:xfrm>
-          <a:prstGeom prst="rect">
-            <a:avLst/>
-          </a:prstGeom>
-        </p:spPr>
-        <p:txBody>
-          <a:bodyPr vert="horz" wrap="square" lIns="91440" tIns="45720" rIns="91440" bIns="45720" rtlCol="0" anchor="ctr" anchorCtr="0">
-            <a:normAutofit/>
-          </a:bodyPr>
-          <a:lstStyle>
-            <a:lvl1pPr marL="0" indent="0" algn="l" defTabSz="914400" rtl="0" eaLnBrk="1" latinLnBrk="0" hangingPunct="1">
-              <a:lnSpc>
-                <a:spcPct val="120000"/>
-              </a:lnSpc>
-              <a:spcBef>
-                <a:spcPts val="0"/>
-              </a:spcBef>
-              <a:buFont typeface="Arial" panose="020B0604020202020204" pitchFamily="34" charset="0"/>
-              <a:buNone/>
-              <a:defRPr sz="1600" kern="1200">
-                <a:solidFill>
-                  <a:schemeClr val="tx1"/>
-                </a:solidFill>
-                <a:latin typeface="+mn-lt"/>
-                <a:ea typeface="+mn-ea"/>
-                <a:cs typeface="+mn-cs"/>
-              </a:defRPr>
-            </a:lvl1pPr>
-            <a:lvl2pPr marL="180000" indent="-180000" algn="l" defTabSz="914400" rtl="0" eaLnBrk="1" latinLnBrk="0" hangingPunct="1">
-              <a:lnSpc>
-                <a:spcPct val="120000"/>
-              </a:lnSpc>
-              <a:spcBef>
-                <a:spcPts val="0"/>
-              </a:spcBef>
-              <a:buFont typeface="Arial" panose="020B0604020202020204" pitchFamily="34" charset="0"/>
-              <a:buChar char="•"/>
-              <a:defRPr sz="1600" kern="1200">
-                <a:solidFill>
-                  <a:schemeClr val="tx1"/>
-                </a:solidFill>
-                <a:latin typeface="+mn-lt"/>
-                <a:ea typeface="+mn-ea"/>
-                <a:cs typeface="+mn-cs"/>
-              </a:defRPr>
-            </a:lvl2pPr>
-            <a:lvl3pPr marL="360000" indent="-180000" algn="l" defTabSz="914400" rtl="0" eaLnBrk="1" latinLnBrk="0" hangingPunct="1">
-              <a:lnSpc>
-                <a:spcPct val="120000"/>
-              </a:lnSpc>
-              <a:spcBef>
-                <a:spcPts val="0"/>
-              </a:spcBef>
-              <a:buFont typeface="Arial" panose="020B0604020202020204" pitchFamily="34" charset="0"/>
-              <a:buChar char="‒"/>
-              <a:defRPr sz="1600" kern="1200">
-                <a:solidFill>
-                  <a:schemeClr val="tx1"/>
-                </a:solidFill>
-                <a:latin typeface="+mn-lt"/>
-                <a:ea typeface="+mn-ea"/>
-                <a:cs typeface="+mn-cs"/>
-              </a:defRPr>
-            </a:lvl3pPr>
-            <a:lvl4pPr marL="540000" indent="-180000" algn="l" defTabSz="914400" rtl="0" eaLnBrk="1" latinLnBrk="0" hangingPunct="1">
-              <a:lnSpc>
-                <a:spcPct val="120000"/>
-              </a:lnSpc>
-              <a:spcBef>
-                <a:spcPts val="0"/>
-              </a:spcBef>
-              <a:buFont typeface="Arial" panose="020B0604020202020204" pitchFamily="34" charset="0"/>
-              <a:buChar char="‒"/>
-              <a:defRPr sz="1600" kern="1200">
-                <a:solidFill>
-                  <a:schemeClr val="tx1"/>
-                </a:solidFill>
-                <a:latin typeface="+mn-lt"/>
-                <a:ea typeface="+mn-ea"/>
-                <a:cs typeface="+mn-cs"/>
-              </a:defRPr>
-            </a:lvl4pPr>
-            <a:lvl5pPr marL="720000" indent="-180000" algn="l" defTabSz="914400" rtl="0" eaLnBrk="1" latinLnBrk="0" hangingPunct="1">
-              <a:lnSpc>
-                <a:spcPct val="120000"/>
-              </a:lnSpc>
-              <a:spcBef>
-                <a:spcPts val="0"/>
-              </a:spcBef>
-              <a:buFont typeface="Arial" panose="020B0604020202020204" pitchFamily="34" charset="0"/>
-              <a:buChar char="‒"/>
-              <a:defRPr sz="1600" kern="1200">
-                <a:solidFill>
-                  <a:schemeClr val="tx1"/>
-                </a:solidFill>
-                <a:latin typeface="+mn-lt"/>
-                <a:ea typeface="+mn-ea"/>
-                <a:cs typeface="+mn-cs"/>
-              </a:defRPr>
-            </a:lvl5pPr>
-            <a:lvl6pPr marL="900000" indent="-180000" algn="l" defTabSz="914400" rtl="0" eaLnBrk="1" latinLnBrk="0" hangingPunct="1">
-              <a:lnSpc>
-                <a:spcPct val="120000"/>
-              </a:lnSpc>
-              <a:spcBef>
-                <a:spcPts val="0"/>
-              </a:spcBef>
-              <a:buFont typeface="Arial" panose="020B0604020202020204" pitchFamily="34" charset="0"/>
-              <a:buChar char="‒"/>
-              <a:defRPr sz="1600" kern="1200">
-                <a:solidFill>
-                  <a:schemeClr val="tx1"/>
-                </a:solidFill>
-                <a:latin typeface="+mn-lt"/>
-                <a:ea typeface="+mn-ea"/>
-                <a:cs typeface="+mn-cs"/>
-              </a:defRPr>
-            </a:lvl6pPr>
-            <a:lvl7pPr marL="1080000" indent="-180000" algn="l" defTabSz="914400" rtl="0" eaLnBrk="1" latinLnBrk="0" hangingPunct="1">
-              <a:lnSpc>
-                <a:spcPct val="120000"/>
-              </a:lnSpc>
-              <a:spcBef>
-                <a:spcPts val="0"/>
-              </a:spcBef>
-              <a:buFont typeface="Arial" panose="020B0604020202020204" pitchFamily="34" charset="0"/>
-              <a:buChar char="‒"/>
-              <a:defRPr sz="1600" kern="1200">
-                <a:solidFill>
-                  <a:schemeClr val="tx1"/>
-                </a:solidFill>
-                <a:latin typeface="+mn-lt"/>
-                <a:ea typeface="+mn-ea"/>
-                <a:cs typeface="+mn-cs"/>
-              </a:defRPr>
-            </a:lvl7pPr>
-            <a:lvl8pPr marL="1260000" indent="-180000" algn="l" defTabSz="914400" rtl="0" eaLnBrk="1" latinLnBrk="0" hangingPunct="1">
-              <a:lnSpc>
-                <a:spcPct val="120000"/>
-              </a:lnSpc>
-              <a:spcBef>
-                <a:spcPts val="0"/>
-              </a:spcBef>
-              <a:buFont typeface="Arial" panose="020B0604020202020204" pitchFamily="34" charset="0"/>
-              <a:buChar char="‒"/>
-              <a:defRPr sz="1600" kern="1200">
-                <a:solidFill>
-                  <a:schemeClr val="tx1"/>
-                </a:solidFill>
-                <a:latin typeface="+mn-lt"/>
-                <a:ea typeface="+mn-ea"/>
-                <a:cs typeface="+mn-cs"/>
-              </a:defRPr>
-            </a:lvl8pPr>
-            <a:lvl9pPr marL="1440000" indent="-180000" algn="l" defTabSz="914400" rtl="0" eaLnBrk="1" latinLnBrk="0" hangingPunct="1">
-              <a:lnSpc>
-                <a:spcPct val="120000"/>
-              </a:lnSpc>
-              <a:spcBef>
-                <a:spcPts val="0"/>
-              </a:spcBef>
-              <a:buFont typeface="Arial" panose="020B0604020202020204" pitchFamily="34" charset="0"/>
-              <a:buChar char="‒"/>
-              <a:defRPr sz="1600" kern="1200">
-                <a:solidFill>
-                  <a:schemeClr val="tx1"/>
-                </a:solidFill>
-                <a:latin typeface="+mn-lt"/>
-                <a:ea typeface="+mn-ea"/>
-                <a:cs typeface="+mn-cs"/>
-              </a:defRPr>
-            </a:lvl9pPr>
-          </a:lstStyle>
-          <a:p>
-            <a:pPr marL="685800" lvl="1" indent="-457200">
-              <a:lnSpc>
-                <a:spcPct val="90000"/>
-              </a:lnSpc>
-              <a:spcAft>
-                <a:spcPts val="600"/>
-              </a:spcAft>
-              <a:buFont typeface="Wingdings" panose="05000000000000000000" pitchFamily="2" charset="2"/>
-              <a:buChar char="q"/>
-            </a:pPr>
-            <a:r>
-              <a:rPr lang="en-US" sz="2000" dirty="0"/>
-              <a:t>Use field INSP (max 220) for Vietnamese text with diacritics.</a:t>
-            </a:r>
-          </a:p>
-          <a:p>
-            <a:pPr marL="685800" lvl="1" indent="-457200">
-              <a:lnSpc>
-                <a:spcPct val="90000"/>
-              </a:lnSpc>
-              <a:spcAft>
-                <a:spcPts val="600"/>
-              </a:spcAft>
-              <a:buFont typeface="Wingdings" panose="05000000000000000000" pitchFamily="2" charset="2"/>
-              <a:buChar char="q"/>
-            </a:pPr>
-          </a:p>
-          <a:p>
-            <a:pPr marL="685800" lvl="1" indent="-457200">
-              <a:lnSpc>
-                <a:spcPct val="90000"/>
-              </a:lnSpc>
-              <a:spcAft>
-                <a:spcPts val="600"/>
-              </a:spcAft>
-              <a:buFont typeface="Wingdings" panose="05000000000000000000" pitchFamily="2" charset="2"/>
-              <a:buChar char="q"/>
-            </a:pPr>
-            <a:r>
-              <a:rPr lang="en-US" sz="2000" dirty="0"/>
-              <a:t>Concatenate it with Mat. Desc (default) to build the long product name.</a:t>
-            </a:r>
-          </a:p>
-          <a:p>
-            <a:pPr marL="685800" lvl="1" indent="-457200">
-              <a:lnSpc>
-                <a:spcPct val="90000"/>
-              </a:lnSpc>
-              <a:spcAft>
-                <a:spcPts val="600"/>
-              </a:spcAft>
-              <a:buFont typeface="Wingdings" panose="05000000000000000000" pitchFamily="2" charset="2"/>
-              <a:buChar char="q"/>
-            </a:pPr>
-          </a:p>
-          <a:p>
-            <a:pPr marL="685800" lvl="1" indent="-457200">
-              <a:lnSpc>
-                <a:spcPct val="90000"/>
-              </a:lnSpc>
-              <a:spcAft>
-                <a:spcPts val="600"/>
-              </a:spcAft>
-              <a:buFont typeface="Wingdings" panose="05000000000000000000" pitchFamily="2" charset="2"/>
-              <a:buChar char="q"/>
-            </a:pPr>
-            <a:r>
-              <a:rPr lang="en-US" sz="2000" dirty="0"/>
-              <a:t>Separator "| " joins the two fields (Mat. Desc + INSP text) for EIV VNPT.</a:t>
-            </a:r>
-          </a:p>
-          <a:p>
-            <a:pPr marL="685800" lvl="1" indent="-457200">
-              <a:lnSpc>
-                <a:spcPct val="90000"/>
-              </a:lnSpc>
-              <a:spcAft>
-                <a:spcPts val="600"/>
-              </a:spcAft>
-              <a:buFont typeface="Wingdings" panose="05000000000000000000" pitchFamily="2" charset="2"/>
-              <a:buChar char="q"/>
-            </a:pPr>
-          </a:p>
-          <a:p>
-            <a:pPr marL="685800" lvl="1" indent="-457200">
-              <a:lnSpc>
-                <a:spcPct val="90000"/>
-              </a:lnSpc>
-              <a:spcAft>
-                <a:spcPts val="600"/>
-              </a:spcAft>
-              <a:buFont typeface="Wingdings" panose="05000000000000000000" pitchFamily="2" charset="2"/>
-              <a:buChar char="q"/>
-            </a:pPr>
-            <a:r>
-              <a:rPr lang="en-US" sz="2000" dirty="0"/>
-              <a:t>Logic applies in order: CMIR › MG0156 › INSP.</a:t>
-            </a:r>
-          </a:p>
-        </p:txBody>
-      </p:sp>
-      <p:sp>
-        <p:nvSpPr>
-          <p:cNvPr id="6" name="Rounded Rectangle 5"/>
+          <p:cNvPr id="4" name="Rounded Rectangle 3"/>
           <p:cNvSpPr/>
           <p:nvPr/>
         </p:nvSpPr>
         <p:spPr>
           <a:xfrm>
-            <a:off x="8549640" y="1600200"/>
-            <a:ext cx="3063240" cy="4434840"/>
+            <a:off x="1188720" y="1783080"/>
+            <a:ext cx="3063240" cy="1097280"/>
           </a:xfrm>
           <a:prstGeom prst="roundRect">
             <a:avLst>
-              <a:gd name="adj" fmla="val 4500"/>
+              <a:gd name="adj" fmla="val 4000"/>
             </a:avLst>
           </a:prstGeom>
           <a:solidFill>
-            <a:srgbClr val="FBE7EA"/>
+            <a:srgbClr val="FFFFFF"/>
           </a:solidFill>
-          <a:ln w="15875">
+          <a:ln w="12700">
             <a:solidFill>
               <a:srgbClr val="BE0028"/>
             </a:solidFill>
@@ -19229,22 +19197,190 @@
         <p:txBody>
           <a:bodyPr rtlCol="0" anchor="ctr"/>
           <a:lstStyle/>
-          <a:p>
-            <a:pPr algn="ctr"/>
-            <a:endParaRPr/>
-          </a:p>
-        </p:txBody>
-      </p:sp>
-      <p:sp>
-        <p:nvSpPr>
-          <p:cNvPr id="7" name="Rounded Rectangle 6"/>
+          <a:p/>
+        </p:txBody>
+      </p:sp>
+      <p:sp>
+        <p:nvSpPr>
+          <p:cNvPr id="5" name="Rounded Rectangle 4"/>
           <p:cNvSpPr/>
           <p:nvPr/>
         </p:nvSpPr>
         <p:spPr>
           <a:xfrm>
-            <a:off x="8549640" y="1600200"/>
-            <a:ext cx="3063240" cy="128016"/>
+            <a:off x="1389888" y="1956816"/>
+            <a:ext cx="1417320" cy="274320"/>
+          </a:xfrm>
+          <a:prstGeom prst="roundRect">
+            <a:avLst>
+              <a:gd name="adj" fmla="val 50000"/>
+            </a:avLst>
+          </a:prstGeom>
+          <a:solidFill>
+            <a:srgbClr val="6B6B6B"/>
+          </a:solidFill>
+          <a:ln>
+            <a:noFill/>
+          </a:ln>
+          <a:effectLst/>
+        </p:spPr>
+        <p:style>
+          <a:lnRef idx="1">
+            <a:schemeClr val="accent1"/>
+          </a:lnRef>
+          <a:fillRef idx="3">
+            <a:schemeClr val="accent1"/>
+          </a:fillRef>
+          <a:effectRef idx="2">
+            <a:schemeClr val="accent1"/>
+          </a:effectRef>
+          <a:fontRef idx="minor">
+            <a:schemeClr val="lt1"/>
+          </a:fontRef>
+        </p:style>
+        <p:txBody>
+          <a:bodyPr rtlCol="0" anchor="ctr" lIns="0" rIns="0" tIns="0" bIns="0"/>
+          <a:lstStyle/>
+          <a:p>
+            <a:pPr algn="ctr"/>
+            <a:r>
+              <a:rPr sz="1150" b="1">
+                <a:solidFill>
+                  <a:srgbClr val="FFFFFF"/>
+                </a:solidFill>
+                <a:latin typeface="Arial"/>
+              </a:rPr>
+              <a:t>Mat. Desc</a:t>
+            </a:r>
+          </a:p>
+        </p:txBody>
+      </p:sp>
+      <p:sp>
+        <p:nvSpPr>
+          <p:cNvPr id="6" name="TextBox 5"/>
+          <p:cNvSpPr txBox="1"/>
+          <p:nvPr/>
+        </p:nvSpPr>
+        <p:spPr>
+          <a:xfrm>
+            <a:off x="2971800" y="1975104"/>
+            <a:ext cx="1097280" cy="237744"/>
+          </a:xfrm>
+          <a:prstGeom prst="rect">
+            <a:avLst/>
+          </a:prstGeom>
+          <a:noFill/>
+        </p:spPr>
+        <p:txBody>
+          <a:bodyPr wrap="square" lIns="0" rIns="0" tIns="0" bIns="0" anchor="t">
+            <a:spAutoFit/>
+          </a:bodyPr>
+          <a:lstStyle/>
+          <a:p>
+            <a:pPr algn="r"/>
+            <a:r>
+              <a:rPr sz="1050" b="1">
+                <a:solidFill>
+                  <a:srgbClr val="6B6B6B"/>
+                </a:solidFill>
+                <a:latin typeface="Arial"/>
+              </a:rPr>
+              <a:t>max 40 ký tự</a:t>
+            </a:r>
+          </a:p>
+        </p:txBody>
+      </p:sp>
+      <p:sp>
+        <p:nvSpPr>
+          <p:cNvPr id="7" name="TextBox 6"/>
+          <p:cNvSpPr txBox="1"/>
+          <p:nvPr/>
+        </p:nvSpPr>
+        <p:spPr>
+          <a:xfrm>
+            <a:off x="1389888" y="2395728"/>
+            <a:ext cx="2697480" cy="457200"/>
+          </a:xfrm>
+          <a:prstGeom prst="rect">
+            <a:avLst/>
+          </a:prstGeom>
+          <a:noFill/>
+        </p:spPr>
+        <p:txBody>
+          <a:bodyPr wrap="square" lIns="0" rIns="0" tIns="0" bIns="0" anchor="t">
+            <a:spAutoFit/>
+          </a:bodyPr>
+          <a:lstStyle/>
+          <a:p>
+            <a:pPr algn="l"/>
+            <a:r>
+              <a:rPr sz="1200" b="0">
+                <a:solidFill>
+                  <a:srgbClr val="1A1A1A"/>
+                </a:solidFill>
+                <a:latin typeface="Arial"/>
+              </a:rPr>
+              <a:t>Tên tiếng Anh (default)</a:t>
+            </a:r>
+          </a:p>
+        </p:txBody>
+      </p:sp>
+      <p:sp>
+        <p:nvSpPr>
+          <p:cNvPr id="8" name="Rounded Rectangle 7"/>
+          <p:cNvSpPr/>
+          <p:nvPr/>
+        </p:nvSpPr>
+        <p:spPr>
+          <a:xfrm>
+            <a:off x="5074920" y="1783080"/>
+            <a:ext cx="3063240" cy="1097280"/>
+          </a:xfrm>
+          <a:prstGeom prst="roundRect">
+            <a:avLst>
+              <a:gd name="adj" fmla="val 4000"/>
+            </a:avLst>
+          </a:prstGeom>
+          <a:solidFill>
+            <a:srgbClr val="FFFFFF"/>
+          </a:solidFill>
+          <a:ln w="12700">
+            <a:solidFill>
+              <a:srgbClr val="BE0028"/>
+            </a:solidFill>
+          </a:ln>
+          <a:effectLst/>
+        </p:spPr>
+        <p:style>
+          <a:lnRef idx="1">
+            <a:schemeClr val="accent1"/>
+          </a:lnRef>
+          <a:fillRef idx="3">
+            <a:schemeClr val="accent1"/>
+          </a:fillRef>
+          <a:effectRef idx="2">
+            <a:schemeClr val="accent1"/>
+          </a:effectRef>
+          <a:fontRef idx="minor">
+            <a:schemeClr val="lt1"/>
+          </a:fontRef>
+        </p:style>
+        <p:txBody>
+          <a:bodyPr rtlCol="0" anchor="ctr"/>
+          <a:lstStyle/>
+          <a:p/>
+        </p:txBody>
+      </p:sp>
+      <p:sp>
+        <p:nvSpPr>
+          <p:cNvPr id="9" name="Rounded Rectangle 8"/>
+          <p:cNvSpPr/>
+          <p:nvPr/>
+        </p:nvSpPr>
+        <p:spPr>
+          <a:xfrm>
+            <a:off x="5276088" y="1956816"/>
+            <a:ext cx="1417320" cy="274320"/>
           </a:xfrm>
           <a:prstGeom prst="roundRect">
             <a:avLst>
@@ -19274,28 +19410,218 @@
           </a:fontRef>
         </p:style>
         <p:txBody>
-          <a:bodyPr rtlCol="0" anchor="ctr"/>
+          <a:bodyPr rtlCol="0" anchor="ctr" lIns="0" rIns="0" tIns="0" bIns="0"/>
           <a:lstStyle/>
           <a:p>
             <a:pPr algn="ctr"/>
-            <a:endParaRPr/>
-          </a:p>
-        </p:txBody>
-      </p:sp>
-      <p:sp>
-        <p:nvSpPr>
-          <p:cNvPr id="8" name="Rounded Rectangle 7"/>
+            <a:r>
+              <a:rPr sz="1150" b="1">
+                <a:solidFill>
+                  <a:srgbClr val="FFFFFF"/>
+                </a:solidFill>
+                <a:latin typeface="Arial"/>
+              </a:rPr>
+              <a:t>INSP</a:t>
+            </a:r>
+          </a:p>
+        </p:txBody>
+      </p:sp>
+      <p:sp>
+        <p:nvSpPr>
+          <p:cNvPr id="10" name="TextBox 9"/>
+          <p:cNvSpPr txBox="1"/>
+          <p:nvPr/>
+        </p:nvSpPr>
+        <p:spPr>
+          <a:xfrm>
+            <a:off x="6858000" y="1975104"/>
+            <a:ext cx="1097280" cy="237744"/>
+          </a:xfrm>
+          <a:prstGeom prst="rect">
+            <a:avLst/>
+          </a:prstGeom>
+          <a:noFill/>
+        </p:spPr>
+        <p:txBody>
+          <a:bodyPr wrap="square" lIns="0" rIns="0" tIns="0" bIns="0" anchor="t">
+            <a:spAutoFit/>
+          </a:bodyPr>
+          <a:lstStyle/>
+          <a:p>
+            <a:pPr algn="r"/>
+            <a:r>
+              <a:rPr sz="1050" b="1">
+                <a:solidFill>
+                  <a:srgbClr val="BE0028"/>
+                </a:solidFill>
+                <a:latin typeface="Arial"/>
+              </a:rPr>
+              <a:t>max 220 ký tự</a:t>
+            </a:r>
+          </a:p>
+        </p:txBody>
+      </p:sp>
+      <p:sp>
+        <p:nvSpPr>
+          <p:cNvPr id="11" name="TextBox 10"/>
+          <p:cNvSpPr txBox="1"/>
+          <p:nvPr/>
+        </p:nvSpPr>
+        <p:spPr>
+          <a:xfrm>
+            <a:off x="5276088" y="2395728"/>
+            <a:ext cx="2697480" cy="457200"/>
+          </a:xfrm>
+          <a:prstGeom prst="rect">
+            <a:avLst/>
+          </a:prstGeom>
+          <a:noFill/>
+        </p:spPr>
+        <p:txBody>
+          <a:bodyPr wrap="square" lIns="0" rIns="0" tIns="0" bIns="0" anchor="t">
+            <a:spAutoFit/>
+          </a:bodyPr>
+          <a:lstStyle/>
+          <a:p>
+            <a:pPr algn="l"/>
+            <a:r>
+              <a:rPr sz="1200" b="0">
+                <a:solidFill>
+                  <a:srgbClr val="1A1A1A"/>
+                </a:solidFill>
+                <a:latin typeface="Arial"/>
+              </a:rPr>
+              <a:t>Tên tiếng Việt có dấu</a:t>
+            </a:r>
+          </a:p>
+        </p:txBody>
+      </p:sp>
+      <p:sp>
+        <p:nvSpPr>
+          <p:cNvPr id="12" name="TextBox 11"/>
+          <p:cNvSpPr txBox="1"/>
+          <p:nvPr/>
+        </p:nvSpPr>
+        <p:spPr>
+          <a:xfrm>
+            <a:off x="4251960" y="2176272"/>
+            <a:ext cx="822960" cy="457200"/>
+          </a:xfrm>
+          <a:prstGeom prst="rect">
+            <a:avLst/>
+          </a:prstGeom>
+          <a:noFill/>
+        </p:spPr>
+        <p:txBody>
+          <a:bodyPr wrap="square" lIns="0" rIns="0" tIns="0" bIns="0" anchor="t">
+            <a:spAutoFit/>
+          </a:bodyPr>
+          <a:lstStyle/>
+          <a:p>
+            <a:pPr algn="ctr"/>
+            <a:r>
+              <a:rPr sz="2600" b="1">
+                <a:solidFill>
+                  <a:srgbClr val="BE0028"/>
+                </a:solidFill>
+                <a:latin typeface="Arial"/>
+              </a:rPr>
+              <a:t>+</a:t>
+            </a:r>
+          </a:p>
+        </p:txBody>
+      </p:sp>
+      <p:sp>
+        <p:nvSpPr>
+          <p:cNvPr id="13" name="Down Arrow 12"/>
           <p:cNvSpPr/>
           <p:nvPr/>
         </p:nvSpPr>
         <p:spPr>
           <a:xfrm>
-            <a:off x="8750808" y="1920240"/>
-            <a:ext cx="2660904" cy="2331720"/>
+            <a:off x="4480560" y="3017520"/>
+            <a:ext cx="365760" cy="402336"/>
+          </a:xfrm>
+          <a:prstGeom prst="downArrow">
+            <a:avLst/>
+          </a:prstGeom>
+          <a:solidFill>
+            <a:srgbClr val="BE0028"/>
+          </a:solidFill>
+          <a:ln>
+            <a:noFill/>
+          </a:ln>
+          <a:effectLst/>
+        </p:spPr>
+        <p:style>
+          <a:lnRef idx="1">
+            <a:schemeClr val="accent1"/>
+          </a:lnRef>
+          <a:fillRef idx="3">
+            <a:schemeClr val="accent1"/>
+          </a:fillRef>
+          <a:effectRef idx="2">
+            <a:schemeClr val="accent1"/>
+          </a:effectRef>
+          <a:fontRef idx="minor">
+            <a:schemeClr val="lt1"/>
+          </a:fontRef>
+        </p:style>
+        <p:txBody>
+          <a:bodyPr rtlCol="0" anchor="ctr"/>
+          <a:lstStyle/>
+          <a:p/>
+        </p:txBody>
+      </p:sp>
+      <p:sp>
+        <p:nvSpPr>
+          <p:cNvPr id="14" name="TextBox 13"/>
+          <p:cNvSpPr txBox="1"/>
+          <p:nvPr/>
+        </p:nvSpPr>
+        <p:spPr>
+          <a:xfrm>
+            <a:off x="4983480" y="3108960"/>
+            <a:ext cx="3108960" cy="310896"/>
+          </a:xfrm>
+          <a:prstGeom prst="rect">
+            <a:avLst/>
+          </a:prstGeom>
+          <a:noFill/>
+        </p:spPr>
+        <p:txBody>
+          <a:bodyPr wrap="square" lIns="0" rIns="0" tIns="0" bIns="0" anchor="t">
+            <a:spAutoFit/>
+          </a:bodyPr>
+          <a:lstStyle/>
+          <a:p>
+            <a:pPr algn="l"/>
+            <a:r>
+              <a:rPr sz="1200" b="1">
+                <a:solidFill>
+                  <a:srgbClr val="BE0028"/>
+                </a:solidFill>
+                <a:latin typeface="Arial"/>
+              </a:rPr>
+              <a:t>nối bằng separator  "| "</a:t>
+            </a:r>
+          </a:p>
+        </p:txBody>
+      </p:sp>
+      <p:sp>
+        <p:nvSpPr>
+          <p:cNvPr id="15" name="Rounded Rectangle 14"/>
+          <p:cNvSpPr/>
+          <p:nvPr/>
+        </p:nvSpPr>
+        <p:spPr>
+          <a:xfrm>
+            <a:off x="1188720" y="3584448"/>
+            <a:ext cx="6949440" cy="868680"/>
           </a:xfrm>
           <a:prstGeom prst="roundRect">
             <a:avLst>
-              <a:gd name="adj" fmla="val 6000"/>
+              <a:gd name="adj" fmla="val 4000"/>
             </a:avLst>
           </a:prstGeom>
           <a:solidFill>
@@ -19325,22 +19651,19 @@
         <p:txBody>
           <a:bodyPr rtlCol="0" anchor="ctr"/>
           <a:lstStyle/>
-          <a:p>
-            <a:pPr algn="ctr"/>
-            <a:endParaRPr/>
-          </a:p>
-        </p:txBody>
-      </p:sp>
-      <p:sp>
-        <p:nvSpPr>
-          <p:cNvPr id="9" name="TextBox 8"/>
+          <a:p/>
+        </p:txBody>
+      </p:sp>
+      <p:sp>
+        <p:nvSpPr>
+          <p:cNvPr id="16" name="TextBox 15"/>
           <p:cNvSpPr txBox="1"/>
           <p:nvPr/>
         </p:nvSpPr>
         <p:spPr>
           <a:xfrm>
-            <a:off x="8915400" y="2057400"/>
-            <a:ext cx="2331720" cy="274320"/>
+            <a:off x="1389888" y="3730752"/>
+            <a:ext cx="6547104" cy="219456"/>
           </a:xfrm>
           <a:prstGeom prst="rect">
             <a:avLst/>
@@ -19348,42 +19671,244 @@
           <a:noFill/>
         </p:spPr>
         <p:txBody>
-          <a:bodyPr wrap="square" lIns="0" tIns="0" rIns="0" bIns="0">
+          <a:bodyPr wrap="square" lIns="0" rIns="0" tIns="0" bIns="0" anchor="t">
             <a:spAutoFit/>
           </a:bodyPr>
           <a:lstStyle/>
           <a:p>
             <a:pPr algn="l"/>
             <a:r>
-              <a:rPr sz="1300" b="1" i="0">
+              <a:rPr sz="1000" b="0">
+                <a:solidFill>
+                  <a:srgbClr val="6B6B6B"/>
+                </a:solidFill>
+                <a:latin typeface="Arial"/>
+              </a:rPr>
+              <a:t>Chuỗi gửi sang EIV VNPT</a:t>
+            </a:r>
+          </a:p>
+        </p:txBody>
+      </p:sp>
+      <p:sp>
+        <p:nvSpPr>
+          <p:cNvPr id="17" name="TextBox 16"/>
+          <p:cNvSpPr txBox="1"/>
+          <p:nvPr/>
+        </p:nvSpPr>
+        <p:spPr>
+          <a:xfrm>
+            <a:off x="1389888" y="3986784"/>
+            <a:ext cx="6547104" cy="402336"/>
+          </a:xfrm>
+          <a:prstGeom prst="rect">
+            <a:avLst/>
+          </a:prstGeom>
+          <a:noFill/>
+        </p:spPr>
+        <p:txBody>
+          <a:bodyPr wrap="square" lIns="0" rIns="0" tIns="0" bIns="0" anchor="t">
+            <a:spAutoFit/>
+          </a:bodyPr>
+          <a:lstStyle/>
+          <a:p>
+            <a:pPr algn="l"/>
+            <a:r>
+              <a:rPr sz="1500" b="1">
+                <a:solidFill>
+                  <a:srgbClr val="6B6B6B"/>
+                </a:solidFill>
+                <a:latin typeface="Arial"/>
+              </a:rPr>
+              <a:t>Mat. Desc</a:t>
+            </a:r>
+            <a:r>
+              <a:rPr sz="1500" b="1">
+                <a:solidFill>
+                  <a:srgbClr val="EF233C"/>
+                </a:solidFill>
+                <a:latin typeface="Arial"/>
+              </a:rPr>
+              <a:t>  |  </a:t>
+            </a:r>
+            <a:r>
+              <a:rPr sz="1500" b="1">
+                <a:solidFill>
+                  <a:srgbClr val="BE0028"/>
+                </a:solidFill>
+                <a:latin typeface="Arial"/>
+              </a:rPr>
+              <a:t>INSP text</a:t>
+            </a:r>
+          </a:p>
+        </p:txBody>
+      </p:sp>
+      <p:sp>
+        <p:nvSpPr>
+          <p:cNvPr id="18" name="TextBox 17"/>
+          <p:cNvSpPr txBox="1"/>
+          <p:nvPr/>
+        </p:nvSpPr>
+        <p:spPr>
+          <a:xfrm>
+            <a:off x="1188720" y="4800600"/>
+            <a:ext cx="2926080" cy="256032"/>
+          </a:xfrm>
+          <a:prstGeom prst="rect">
+            <a:avLst/>
+          </a:prstGeom>
+          <a:noFill/>
+        </p:spPr>
+        <p:txBody>
+          <a:bodyPr wrap="square" lIns="0" rIns="0" tIns="0" bIns="0" anchor="t">
+            <a:spAutoFit/>
+          </a:bodyPr>
+          <a:lstStyle/>
+          <a:p>
+            <a:pPr algn="l"/>
+            <a:r>
+              <a:rPr sz="1150" b="1">
                 <a:solidFill>
                   <a:srgbClr val="1A1A1A"/>
                 </a:solidFill>
-                <a:latin typeface="Calibri"/>
+                <a:latin typeface="Arial"/>
               </a:rPr>
-              <a:t>INSP TEXT</a:t>
-            </a:r>
-          </a:p>
-        </p:txBody>
-      </p:sp>
-      <p:sp>
-        <p:nvSpPr>
-          <p:cNvPr id="10" name="Rounded Rectangle 9"/>
+              <a:t>Thứ tự ưu tiên logic</a:t>
+            </a:r>
+          </a:p>
+        </p:txBody>
+      </p:sp>
+      <p:sp>
+        <p:nvSpPr>
+          <p:cNvPr id="19" name="Rounded Rectangle 18"/>
           <p:cNvSpPr/>
           <p:nvPr/>
         </p:nvSpPr>
         <p:spPr>
           <a:xfrm>
-            <a:off x="10268712" y="2057400"/>
-            <a:ext cx="1005840" cy="274320"/>
+            <a:off x="1188720" y="5074920"/>
+            <a:ext cx="2011680" cy="731520"/>
           </a:xfrm>
           <a:prstGeom prst="roundRect">
             <a:avLst>
-              <a:gd name="adj" fmla="val 50000"/>
+              <a:gd name="adj" fmla="val 4000"/>
             </a:avLst>
           </a:prstGeom>
           <a:solidFill>
-            <a:srgbClr val="EF233C"/>
+            <a:srgbClr val="FFFFFF"/>
+          </a:solidFill>
+          <a:ln w="12700">
+            <a:solidFill>
+              <a:srgbClr val="BE0028"/>
+            </a:solidFill>
+          </a:ln>
+          <a:effectLst/>
+        </p:spPr>
+        <p:style>
+          <a:lnRef idx="1">
+            <a:schemeClr val="accent1"/>
+          </a:lnRef>
+          <a:fillRef idx="3">
+            <a:schemeClr val="accent1"/>
+          </a:fillRef>
+          <a:effectRef idx="2">
+            <a:schemeClr val="accent1"/>
+          </a:effectRef>
+          <a:fontRef idx="minor">
+            <a:schemeClr val="lt1"/>
+          </a:fontRef>
+        </p:style>
+        <p:txBody>
+          <a:bodyPr rtlCol="0" anchor="ctr"/>
+          <a:lstStyle/>
+          <a:p/>
+        </p:txBody>
+      </p:sp>
+      <p:sp>
+        <p:nvSpPr>
+          <p:cNvPr id="20" name="TextBox 19"/>
+          <p:cNvSpPr txBox="1"/>
+          <p:nvPr/>
+        </p:nvSpPr>
+        <p:spPr>
+          <a:xfrm>
+            <a:off x="1188720" y="5202936"/>
+            <a:ext cx="2011680" cy="237744"/>
+          </a:xfrm>
+          <a:prstGeom prst="rect">
+            <a:avLst/>
+          </a:prstGeom>
+          <a:noFill/>
+        </p:spPr>
+        <p:txBody>
+          <a:bodyPr wrap="square" lIns="0" rIns="0" tIns="0" bIns="0" anchor="t">
+            <a:spAutoFit/>
+          </a:bodyPr>
+          <a:lstStyle/>
+          <a:p>
+            <a:pPr algn="ctr"/>
+            <a:r>
+              <a:rPr sz="1300" b="1">
+                <a:solidFill>
+                  <a:srgbClr val="BE0028"/>
+                </a:solidFill>
+                <a:latin typeface="Arial"/>
+              </a:rPr>
+              <a:t>CMIR</a:t>
+            </a:r>
+          </a:p>
+        </p:txBody>
+      </p:sp>
+      <p:sp>
+        <p:nvSpPr>
+          <p:cNvPr id="21" name="TextBox 20"/>
+          <p:cNvSpPr txBox="1"/>
+          <p:nvPr/>
+        </p:nvSpPr>
+        <p:spPr>
+          <a:xfrm>
+            <a:off x="1188720" y="5458968"/>
+            <a:ext cx="2011680" cy="219456"/>
+          </a:xfrm>
+          <a:prstGeom prst="rect">
+            <a:avLst/>
+          </a:prstGeom>
+          <a:noFill/>
+        </p:spPr>
+        <p:txBody>
+          <a:bodyPr wrap="square" lIns="0" rIns="0" tIns="0" bIns="0" anchor="t">
+            <a:spAutoFit/>
+          </a:bodyPr>
+          <a:lstStyle/>
+          <a:p>
+            <a:pPr algn="ctr"/>
+            <a:r>
+              <a:rPr sz="950" b="0">
+                <a:solidFill>
+                  <a:srgbClr val="6B6B6B"/>
+                </a:solidFill>
+                <a:latin typeface="Arial"/>
+              </a:rPr>
+              <a:t>khách Tender</a:t>
+            </a:r>
+          </a:p>
+        </p:txBody>
+      </p:sp>
+      <p:sp>
+        <p:nvSpPr>
+          <p:cNvPr id="22" name="Chevron 21"/>
+          <p:cNvSpPr/>
+          <p:nvPr/>
+        </p:nvSpPr>
+        <p:spPr>
+          <a:xfrm>
+            <a:off x="3310128" y="5294376"/>
+            <a:ext cx="292608" cy="292608"/>
+          </a:xfrm>
+          <a:prstGeom prst="chevron">
+            <a:avLst/>
+          </a:prstGeom>
+          <a:solidFill>
+            <a:srgbClr val="BE0028"/>
           </a:solidFill>
           <a:ln>
             <a:noFill/>
@@ -19405,91 +19930,67 @@
           </a:fontRef>
         </p:style>
         <p:txBody>
-          <a:bodyPr wrap="none" lIns="0" tIns="0" rIns="0" bIns="0" rtlCol="0" anchor="ctr"/>
-          <a:lstStyle/>
-          <a:p>
-            <a:pPr algn="ctr"/>
-            <a:r>
-              <a:rPr sz="1100" b="1">
-                <a:solidFill>
-                  <a:srgbClr val="FFFFFF"/>
-                </a:solidFill>
-                <a:latin typeface="Calibri"/>
-              </a:rPr>
-              <a:t>220 CHAR</a:t>
-            </a:r>
-          </a:p>
-        </p:txBody>
-      </p:sp>
-      <p:cxnSp>
-        <p:nvCxnSpPr>
-          <p:cNvPr id="11" name="Connector 10"/>
-          <p:cNvCxnSpPr/>
+          <a:bodyPr rtlCol="0" anchor="ctr"/>
+          <a:lstStyle/>
+          <a:p/>
+        </p:txBody>
+      </p:sp>
+      <p:sp>
+        <p:nvSpPr>
+          <p:cNvPr id="23" name="Rounded Rectangle 22"/>
+          <p:cNvSpPr/>
           <p:nvPr/>
-        </p:nvCxnSpPr>
+        </p:nvSpPr>
         <p:spPr>
           <a:xfrm>
-            <a:off x="8750808" y="2450592"/>
-            <a:ext cx="2660904" cy="0"/>
-          </a:xfrm>
-          <a:prstGeom prst="line">
-            <a:avLst/>
+            <a:off x="3657600" y="5074920"/>
+            <a:ext cx="2011680" cy="731520"/>
+          </a:xfrm>
+          <a:prstGeom prst="roundRect">
+            <a:avLst>
+              <a:gd name="adj" fmla="val 4000"/>
+            </a:avLst>
           </a:prstGeom>
-          <a:ln w="9525">
+          <a:solidFill>
+            <a:srgbClr val="FFFFFF"/>
+          </a:solidFill>
+          <a:ln w="12700">
             <a:solidFill>
-              <a:srgbClr val="E9E9E9"/>
+              <a:srgbClr val="BE0028"/>
             </a:solidFill>
           </a:ln>
+          <a:effectLst/>
         </p:spPr>
         <p:style>
-          <a:lnRef idx="2">
+          <a:lnRef idx="1">
             <a:schemeClr val="accent1"/>
           </a:lnRef>
-          <a:fillRef idx="0">
+          <a:fillRef idx="3">
             <a:schemeClr val="accent1"/>
           </a:fillRef>
-          <a:effectRef idx="1">
+          <a:effectRef idx="2">
             <a:schemeClr val="accent1"/>
           </a:effectRef>
           <a:fontRef idx="minor">
-            <a:schemeClr val="tx1"/>
+            <a:schemeClr val="lt1"/>
           </a:fontRef>
         </p:style>
-      </p:cxnSp>
-      <p:pic>
-        <p:nvPicPr>
-          <p:cNvPr id="12" name="Picture 11" descr="image.png"/>
-          <p:cNvPicPr>
-            <a:picLocks noChangeAspect="1"/>
-          </p:cNvPicPr>
-          <p:nvPr/>
-        </p:nvPicPr>
-        <p:blipFill>
-          <a:blip r:embed="rId2"/>
-          <a:stretch>
-            <a:fillRect/>
-          </a:stretch>
-        </p:blipFill>
-        <p:spPr>
-          <a:xfrm>
-            <a:off x="8915400" y="2606040"/>
-            <a:ext cx="502920" cy="502920"/>
-          </a:xfrm>
-          <a:prstGeom prst="rect">
-            <a:avLst/>
-          </a:prstGeom>
-        </p:spPr>
-      </p:pic>
-      <p:sp>
-        <p:nvSpPr>
-          <p:cNvPr id="13" name="TextBox 12"/>
+        <p:txBody>
+          <a:bodyPr rtlCol="0" anchor="ctr"/>
+          <a:lstStyle/>
+          <a:p/>
+        </p:txBody>
+      </p:sp>
+      <p:sp>
+        <p:nvSpPr>
+          <p:cNvPr id="24" name="TextBox 23"/>
           <p:cNvSpPr txBox="1"/>
           <p:nvPr/>
         </p:nvSpPr>
         <p:spPr>
           <a:xfrm>
-            <a:off x="9573768" y="2633472"/>
-            <a:ext cx="1655064" cy="274320"/>
+            <a:off x="3657600" y="5202936"/>
+            <a:ext cx="2011680" cy="237744"/>
           </a:xfrm>
           <a:prstGeom prst="rect">
             <a:avLst/>
@@ -19497,34 +19998,34 @@
           <a:noFill/>
         </p:spPr>
         <p:txBody>
-          <a:bodyPr wrap="square" lIns="0" tIns="0" rIns="0" bIns="0">
+          <a:bodyPr wrap="square" lIns="0" rIns="0" tIns="0" bIns="0" anchor="t">
             <a:spAutoFit/>
           </a:bodyPr>
           <a:lstStyle/>
           <a:p>
-            <a:pPr algn="l"/>
-            <a:r>
-              <a:rPr sz="1050" b="1" i="0">
-                <a:solidFill>
-                  <a:srgbClr val="1A1A1A"/>
-                </a:solidFill>
-                <a:latin typeface="Calibri"/>
+            <a:pPr algn="ctr"/>
+            <a:r>
+              <a:rPr sz="1300" b="1">
+                <a:solidFill>
+                  <a:srgbClr val="BE0028"/>
+                </a:solidFill>
+                <a:latin typeface="Arial"/>
               </a:rPr>
-              <a:t>Mat. Desc  |  INSP</a:t>
-            </a:r>
-          </a:p>
-        </p:txBody>
-      </p:sp>
-      <p:sp>
-        <p:nvSpPr>
-          <p:cNvPr id="14" name="TextBox 13"/>
+              <a:t>MG0156</a:t>
+            </a:r>
+          </a:p>
+        </p:txBody>
+      </p:sp>
+      <p:sp>
+        <p:nvSpPr>
+          <p:cNvPr id="25" name="TextBox 24"/>
           <p:cNvSpPr txBox="1"/>
           <p:nvPr/>
         </p:nvSpPr>
         <p:spPr>
           <a:xfrm>
-            <a:off x="9573768" y="2907792"/>
-            <a:ext cx="1655064" cy="146194"/>
+            <a:off x="3657600" y="5458968"/>
+            <a:ext cx="2011680" cy="219456"/>
           </a:xfrm>
           <a:prstGeom prst="rect">
             <a:avLst/>
@@ -19532,69 +20033,122 @@
           <a:noFill/>
         </p:spPr>
         <p:txBody>
-          <a:bodyPr wrap="square" lIns="0" tIns="0" rIns="0" bIns="0">
+          <a:bodyPr wrap="square" lIns="0" rIns="0" tIns="0" bIns="0" anchor="t">
             <a:spAutoFit/>
           </a:bodyPr>
           <a:lstStyle/>
           <a:p>
-            <a:pPr algn="l"/>
-            <a:r>
-              <a:rPr sz="950" b="0" i="1" dirty="0">
+            <a:pPr algn="ctr"/>
+            <a:r>
+              <a:rPr sz="950" b="0">
                 <a:solidFill>
                   <a:srgbClr val="6B6B6B"/>
                 </a:solidFill>
-                <a:latin typeface="Calibri"/>
+                <a:latin typeface="Arial"/>
               </a:rPr>
-              <a:t>Separator "| "</a:t>
-            </a:r>
-          </a:p>
-        </p:txBody>
-      </p:sp>
-      <p:cxnSp>
-        <p:nvCxnSpPr>
-          <p:cNvPr id="15" name="Connector 14"/>
-          <p:cNvCxnSpPr/>
+              <a:t>Basis Text</a:t>
+            </a:r>
+          </a:p>
+        </p:txBody>
+      </p:sp>
+      <p:sp>
+        <p:nvSpPr>
+          <p:cNvPr id="26" name="Chevron 25"/>
+          <p:cNvSpPr/>
           <p:nvPr/>
-        </p:nvCxnSpPr>
+        </p:nvSpPr>
         <p:spPr>
           <a:xfrm>
-            <a:off x="8750808" y="3291840"/>
-            <a:ext cx="2660904" cy="0"/>
-          </a:xfrm>
-          <a:prstGeom prst="line">
+            <a:off x="5779008" y="5294376"/>
+            <a:ext cx="292608" cy="292608"/>
+          </a:xfrm>
+          <a:prstGeom prst="chevron">
             <a:avLst/>
           </a:prstGeom>
-          <a:ln w="9525">
+          <a:solidFill>
+            <a:srgbClr val="BE0028"/>
+          </a:solidFill>
+          <a:ln>
+            <a:noFill/>
+          </a:ln>
+          <a:effectLst/>
+        </p:spPr>
+        <p:style>
+          <a:lnRef idx="1">
+            <a:schemeClr val="accent1"/>
+          </a:lnRef>
+          <a:fillRef idx="3">
+            <a:schemeClr val="accent1"/>
+          </a:fillRef>
+          <a:effectRef idx="2">
+            <a:schemeClr val="accent1"/>
+          </a:effectRef>
+          <a:fontRef idx="minor">
+            <a:schemeClr val="lt1"/>
+          </a:fontRef>
+        </p:style>
+        <p:txBody>
+          <a:bodyPr rtlCol="0" anchor="ctr"/>
+          <a:lstStyle/>
+          <a:p/>
+        </p:txBody>
+      </p:sp>
+      <p:sp>
+        <p:nvSpPr>
+          <p:cNvPr id="27" name="Rounded Rectangle 26"/>
+          <p:cNvSpPr/>
+          <p:nvPr/>
+        </p:nvSpPr>
+        <p:spPr>
+          <a:xfrm>
+            <a:off x="6126480" y="5074920"/>
+            <a:ext cx="2011680" cy="731520"/>
+          </a:xfrm>
+          <a:prstGeom prst="roundRect">
+            <a:avLst>
+              <a:gd name="adj" fmla="val 4000"/>
+            </a:avLst>
+          </a:prstGeom>
+          <a:solidFill>
+            <a:srgbClr val="FFFFFF"/>
+          </a:solidFill>
+          <a:ln w="12700">
             <a:solidFill>
-              <a:srgbClr val="E9E9E9"/>
+              <a:srgbClr val="BE0028"/>
             </a:solidFill>
           </a:ln>
+          <a:effectLst/>
         </p:spPr>
         <p:style>
-          <a:lnRef idx="2">
+          <a:lnRef idx="1">
             <a:schemeClr val="accent1"/>
           </a:lnRef>
-          <a:fillRef idx="0">
+          <a:fillRef idx="3">
             <a:schemeClr val="accent1"/>
           </a:fillRef>
-          <a:effectRef idx="1">
+          <a:effectRef idx="2">
             <a:schemeClr val="accent1"/>
           </a:effectRef>
           <a:fontRef idx="minor">
-            <a:schemeClr val="tx1"/>
+            <a:schemeClr val="lt1"/>
           </a:fontRef>
         </p:style>
-      </p:cxnSp>
-      <p:sp>
-        <p:nvSpPr>
-          <p:cNvPr id="16" name="TextBox 15"/>
+        <p:txBody>
+          <a:bodyPr rtlCol="0" anchor="ctr"/>
+          <a:lstStyle/>
+          <a:p/>
+        </p:txBody>
+      </p:sp>
+      <p:sp>
+        <p:nvSpPr>
+          <p:cNvPr id="28" name="TextBox 27"/>
           <p:cNvSpPr txBox="1"/>
           <p:nvPr/>
         </p:nvSpPr>
         <p:spPr>
           <a:xfrm>
-            <a:off x="8915400" y="3429000"/>
-            <a:ext cx="2331720" cy="274320"/>
+            <a:off x="6126480" y="5202936"/>
+            <a:ext cx="2011680" cy="237744"/>
           </a:xfrm>
           <a:prstGeom prst="rect">
             <a:avLst/>
@@ -19602,34 +20156,34 @@
           <a:noFill/>
         </p:spPr>
         <p:txBody>
-          <a:bodyPr wrap="square" lIns="0" tIns="0" rIns="0" bIns="0">
+          <a:bodyPr wrap="square" lIns="0" rIns="0" tIns="0" bIns="0" anchor="t">
             <a:spAutoFit/>
           </a:bodyPr>
           <a:lstStyle/>
           <a:p>
-            <a:pPr algn="l"/>
-            <a:r>
-              <a:rPr sz="1000" b="0" i="0">
-                <a:solidFill>
-                  <a:srgbClr val="6B6B6B"/>
-                </a:solidFill>
-                <a:latin typeface="Calibri"/>
+            <a:pPr algn="ctr"/>
+            <a:r>
+              <a:rPr sz="1300" b="1">
+                <a:solidFill>
+                  <a:srgbClr val="BE0028"/>
+                </a:solidFill>
+                <a:latin typeface="Arial"/>
               </a:rPr>
-              <a:t>Vietnamese with diacritics</a:t>
-            </a:r>
-          </a:p>
-        </p:txBody>
-      </p:sp>
-      <p:sp>
-        <p:nvSpPr>
-          <p:cNvPr id="17" name="TextBox 16"/>
+              <a:t>INSP</a:t>
+            </a:r>
+          </a:p>
+        </p:txBody>
+      </p:sp>
+      <p:sp>
+        <p:nvSpPr>
+          <p:cNvPr id="29" name="TextBox 28"/>
           <p:cNvSpPr txBox="1"/>
           <p:nvPr/>
         </p:nvSpPr>
         <p:spPr>
           <a:xfrm>
-            <a:off x="8915400" y="3730752"/>
-            <a:ext cx="2331720" cy="274320"/>
+            <a:off x="6126480" y="5458968"/>
+            <a:ext cx="2011680" cy="219456"/>
           </a:xfrm>
           <a:prstGeom prst="rect">
             <a:avLst/>
@@ -19637,69 +20191,80 @@
           <a:noFill/>
         </p:spPr>
         <p:txBody>
-          <a:bodyPr wrap="square" lIns="0" tIns="0" rIns="0" bIns="0">
+          <a:bodyPr wrap="square" lIns="0" rIns="0" tIns="0" bIns="0" anchor="t">
             <a:spAutoFit/>
           </a:bodyPr>
           <a:lstStyle/>
           <a:p>
-            <a:pPr algn="l"/>
-            <a:r>
-              <a:rPr sz="1000" b="0" i="0">
+            <a:pPr algn="ctr"/>
+            <a:r>
+              <a:rPr sz="950" b="0">
                 <a:solidFill>
                   <a:srgbClr val="6B6B6B"/>
                 </a:solidFill>
-                <a:latin typeface="Calibri"/>
+                <a:latin typeface="Arial"/>
               </a:rPr>
-              <a:t>Priority: CMIR › MG0156 › INSP</a:t>
-            </a:r>
-          </a:p>
-        </p:txBody>
-      </p:sp>
-      <p:sp>
-        <p:nvSpPr>
-          <p:cNvPr id="18" name="TextBox 17"/>
-          <p:cNvSpPr txBox="1"/>
-          <p:nvPr/>
-        </p:nvSpPr>
-        <p:spPr>
-          <a:xfrm>
-            <a:off x="8549640" y="4507992"/>
-            <a:ext cx="3063240" cy="320040"/>
-          </a:xfrm>
-          <a:prstGeom prst="rect">
-            <a:avLst/>
-          </a:prstGeom>
-          <a:noFill/>
-        </p:spPr>
-        <p:txBody>
-          <a:bodyPr wrap="square" lIns="0" tIns="0" rIns="0" bIns="0">
-            <a:spAutoFit/>
-          </a:bodyPr>
-          <a:lstStyle/>
-          <a:p>
-            <a:pPr algn="ctr"/>
-            <a:r>
-              <a:rPr sz="1250" b="1" i="0">
-                <a:solidFill>
-                  <a:srgbClr val="BE0028"/>
-                </a:solidFill>
-                <a:latin typeface="Calibri"/>
-              </a:rPr>
-              <a:t>SOLUTION  ·  Field Concatenation</a:t>
-            </a:r>
-          </a:p>
-        </p:txBody>
-      </p:sp>
-      <p:sp>
-        <p:nvSpPr>
-          <p:cNvPr id="19" name="Rounded Rectangle 18"/>
+              <a:t>phần còn lại</a:t>
+            </a:r>
+          </a:p>
+        </p:txBody>
+      </p:sp>
+      <p:sp>
+        <p:nvSpPr>
+          <p:cNvPr id="30" name="Rounded Rectangle 29"/>
           <p:cNvSpPr/>
           <p:nvPr/>
         </p:nvSpPr>
         <p:spPr>
           <a:xfrm>
-            <a:off x="9304020" y="5468112"/>
-            <a:ext cx="1554480" cy="347472"/>
+            <a:off x="8641080" y="1783080"/>
+            <a:ext cx="2971800" cy="4023360"/>
+          </a:xfrm>
+          <a:prstGeom prst="roundRect">
+            <a:avLst>
+              <a:gd name="adj" fmla="val 3000"/>
+            </a:avLst>
+          </a:prstGeom>
+          <a:solidFill>
+            <a:srgbClr val="FBE7EA"/>
+          </a:solidFill>
+          <a:ln w="15875">
+            <a:solidFill>
+              <a:srgbClr val="BE0028"/>
+            </a:solidFill>
+          </a:ln>
+          <a:effectLst/>
+        </p:spPr>
+        <p:style>
+          <a:lnRef idx="1">
+            <a:schemeClr val="accent1"/>
+          </a:lnRef>
+          <a:fillRef idx="3">
+            <a:schemeClr val="accent1"/>
+          </a:fillRef>
+          <a:effectRef idx="2">
+            <a:schemeClr val="accent1"/>
+          </a:effectRef>
+          <a:fontRef idx="minor">
+            <a:schemeClr val="lt1"/>
+          </a:fontRef>
+        </p:style>
+        <p:txBody>
+          <a:bodyPr rtlCol="0" anchor="ctr"/>
+          <a:lstStyle/>
+          <a:p/>
+        </p:txBody>
+      </p:sp>
+      <p:sp>
+        <p:nvSpPr>
+          <p:cNvPr id="31" name="Rounded Rectangle 30"/>
+          <p:cNvSpPr/>
+          <p:nvPr/>
+        </p:nvSpPr>
+        <p:spPr>
+          <a:xfrm>
+            <a:off x="8641080" y="1783080"/>
+            <a:ext cx="2971800" cy="128016"/>
           </a:xfrm>
           <a:prstGeom prst="roundRect">
             <a:avLst>
@@ -19729,18 +20294,231 @@
           </a:fontRef>
         </p:style>
         <p:txBody>
-          <a:bodyPr wrap="none" lIns="0" tIns="0" rIns="0" bIns="0" rtlCol="0" anchor="ctr"/>
+          <a:bodyPr rtlCol="0" anchor="ctr"/>
+          <a:lstStyle/>
+          <a:p/>
+        </p:txBody>
+      </p:sp>
+      <p:sp>
+        <p:nvSpPr>
+          <p:cNvPr id="32" name="TextBox 31"/>
+          <p:cNvSpPr txBox="1"/>
+          <p:nvPr/>
+        </p:nvSpPr>
+        <p:spPr>
+          <a:xfrm>
+            <a:off x="8641080" y="2057400"/>
+            <a:ext cx="2971800" cy="274320"/>
+          </a:xfrm>
+          <a:prstGeom prst="rect">
+            <a:avLst/>
+          </a:prstGeom>
+          <a:noFill/>
+        </p:spPr>
+        <p:txBody>
+          <a:bodyPr wrap="square" lIns="0" rIns="0" tIns="0" bIns="0" anchor="t">
+            <a:spAutoFit/>
+          </a:bodyPr>
           <a:lstStyle/>
           <a:p>
             <a:pPr algn="ctr"/>
             <a:r>
-              <a:rPr sz="1100" b="1">
-                <a:solidFill>
-                  <a:srgbClr val="FFFFFF"/>
-                </a:solidFill>
-                <a:latin typeface="Calibri"/>
+              <a:rPr sz="1250" b="1">
+                <a:solidFill>
+                  <a:srgbClr val="BE0028"/>
+                </a:solidFill>
+                <a:latin typeface="Arial"/>
               </a:rPr>
-              <a:t>DESIGN</a:t>
+              <a:t>KEY POINT</a:t>
+            </a:r>
+          </a:p>
+        </p:txBody>
+      </p:sp>
+      <p:sp>
+        <p:nvSpPr>
+          <p:cNvPr id="33" name="TextBox 32"/>
+          <p:cNvSpPr txBox="1"/>
+          <p:nvPr/>
+        </p:nvSpPr>
+        <p:spPr>
+          <a:xfrm>
+            <a:off x="8869680" y="2450592"/>
+            <a:ext cx="2514600" cy="777240"/>
+          </a:xfrm>
+          <a:prstGeom prst="rect">
+            <a:avLst/>
+          </a:prstGeom>
+          <a:noFill/>
+        </p:spPr>
+        <p:txBody>
+          <a:bodyPr wrap="square" lIns="0" rIns="0" tIns="0" bIns="0" anchor="t">
+            <a:spAutoFit/>
+          </a:bodyPr>
+          <a:lstStyle/>
+          <a:p>
+            <a:pPr algn="l"/>
+            <a:r>
+              <a:rPr sz="1300" b="1">
+                <a:solidFill>
+                  <a:srgbClr val="1A1A1A"/>
+                </a:solidFill>
+                <a:latin typeface="Arial"/>
+              </a:rPr>
+              <a:t>INSP chứa được 220 ký tự và giữ nguyên dấu tiếng Việt.</a:t>
+            </a:r>
+          </a:p>
+        </p:txBody>
+      </p:sp>
+      <p:sp>
+        <p:nvSpPr>
+          <p:cNvPr id="34" name="Rectangle 33"/>
+          <p:cNvSpPr/>
+          <p:nvPr/>
+        </p:nvSpPr>
+        <p:spPr>
+          <a:xfrm>
+            <a:off x="8869680" y="3310128"/>
+            <a:ext cx="2514600" cy="10972"/>
+          </a:xfrm>
+          <a:prstGeom prst="rect">
+            <a:avLst/>
+          </a:prstGeom>
+          <a:solidFill>
+            <a:srgbClr val="E9E9E9"/>
+          </a:solidFill>
+          <a:ln>
+            <a:noFill/>
+          </a:ln>
+          <a:effectLst/>
+        </p:spPr>
+        <p:style>
+          <a:lnRef idx="1">
+            <a:schemeClr val="accent1"/>
+          </a:lnRef>
+          <a:fillRef idx="3">
+            <a:schemeClr val="accent1"/>
+          </a:fillRef>
+          <a:effectRef idx="2">
+            <a:schemeClr val="accent1"/>
+          </a:effectRef>
+          <a:fontRef idx="minor">
+            <a:schemeClr val="lt1"/>
+          </a:fontRef>
+        </p:style>
+        <p:txBody>
+          <a:bodyPr rtlCol="0" anchor="ctr"/>
+          <a:lstStyle/>
+          <a:p/>
+        </p:txBody>
+      </p:sp>
+      <p:sp>
+        <p:nvSpPr>
+          <p:cNvPr id="35" name="TextBox 34"/>
+          <p:cNvSpPr txBox="1"/>
+          <p:nvPr/>
+        </p:nvSpPr>
+        <p:spPr>
+          <a:xfrm>
+            <a:off x="8869680" y="3456432"/>
+            <a:ext cx="2514600" cy="731520"/>
+          </a:xfrm>
+          <a:prstGeom prst="rect">
+            <a:avLst/>
+          </a:prstGeom>
+          <a:noFill/>
+        </p:spPr>
+        <p:txBody>
+          <a:bodyPr wrap="square" lIns="0" rIns="0" tIns="0" bIns="0" anchor="t">
+            <a:spAutoFit/>
+          </a:bodyPr>
+          <a:lstStyle/>
+          <a:p>
+            <a:pPr algn="l"/>
+            <a:r>
+              <a:rPr sz="1100" b="0">
+                <a:solidFill>
+                  <a:srgbClr val="6B6B6B"/>
+                </a:solidFill>
+                <a:latin typeface="Arial"/>
+              </a:rPr>
+              <a:t>Mat. Desc giữ nguyên như hiện tại — không phải sửa master data cũ.</a:t>
+            </a:r>
+          </a:p>
+        </p:txBody>
+      </p:sp>
+      <p:sp>
+        <p:nvSpPr>
+          <p:cNvPr id="36" name="Rectangle 35"/>
+          <p:cNvSpPr/>
+          <p:nvPr/>
+        </p:nvSpPr>
+        <p:spPr>
+          <a:xfrm>
+            <a:off x="8869680" y="4297680"/>
+            <a:ext cx="2514600" cy="10972"/>
+          </a:xfrm>
+          <a:prstGeom prst="rect">
+            <a:avLst/>
+          </a:prstGeom>
+          <a:solidFill>
+            <a:srgbClr val="E9E9E9"/>
+          </a:solidFill>
+          <a:ln>
+            <a:noFill/>
+          </a:ln>
+          <a:effectLst/>
+        </p:spPr>
+        <p:style>
+          <a:lnRef idx="1">
+            <a:schemeClr val="accent1"/>
+          </a:lnRef>
+          <a:fillRef idx="3">
+            <a:schemeClr val="accent1"/>
+          </a:fillRef>
+          <a:effectRef idx="2">
+            <a:schemeClr val="accent1"/>
+          </a:effectRef>
+          <a:fontRef idx="minor">
+            <a:schemeClr val="lt1"/>
+          </a:fontRef>
+        </p:style>
+        <p:txBody>
+          <a:bodyPr rtlCol="0" anchor="ctr"/>
+          <a:lstStyle/>
+          <a:p/>
+        </p:txBody>
+      </p:sp>
+      <p:sp>
+        <p:nvSpPr>
+          <p:cNvPr id="37" name="TextBox 36"/>
+          <p:cNvSpPr txBox="1"/>
+          <p:nvPr/>
+        </p:nvSpPr>
+        <p:spPr>
+          <a:xfrm>
+            <a:off x="8869680" y="4443984"/>
+            <a:ext cx="2514600" cy="777240"/>
+          </a:xfrm>
+          <a:prstGeom prst="rect">
+            <a:avLst/>
+          </a:prstGeom>
+          <a:noFill/>
+        </p:spPr>
+        <p:txBody>
+          <a:bodyPr wrap="square" lIns="0" rIns="0" tIns="0" bIns="0" anchor="t">
+            <a:spAutoFit/>
+          </a:bodyPr>
+          <a:lstStyle/>
+          <a:p>
+            <a:pPr algn="l"/>
+            <a:r>
+              <a:rPr sz="1100" b="0">
+                <a:solidFill>
+                  <a:srgbClr val="6B6B6B"/>
+                </a:solidFill>
+                <a:latin typeface="Arial"/>
+              </a:rPr>
+              <a:t>VNPT tách chuỗi theo "| " để xếp thành 2 dòng trên hóa đơn.</a:t>
             </a:r>
           </a:p>
         </p:txBody>
@@ -19800,7 +20578,7 @@
         <p:spPr>
           <a:xfrm>
             <a:off x="3260034" y="175127"/>
-            <a:ext cx="7189763" cy="1068457"/>
+            <a:ext cx="7189763" cy="1239838"/>
           </a:xfrm>
         </p:spPr>
         <p:txBody>
@@ -19813,12 +20591,12 @@
               </a:solidFill>
             </a:endParaRPr>
             <a:r>
-              <a:rPr lang="en-US" dirty="0">
+              <a:rPr lang="en-US">
                 <a:solidFill>
                   <a:schemeClr val="tx1"/>
                 </a:solidFill>
               </a:rPr>
-              <a:t>Lập trình – Development scope</a:t>
+              <a:t>Ví dụ thực tế</a:t>
             </a:r>
           </a:p>
         </p:txBody>
@@ -19859,283 +20637,507 @@
       </p:sp>
       <p:sp>
         <p:nvSpPr>
-          <p:cNvPr id="5" name="Subtitle 2">
-            <a:extLst>
-              <a:ext uri="{FF2B5EF4-FFF2-40B4-BE49-F238E27FC236}">
-                <a16:creationId xmlns:a16="http://schemas.microsoft.com/office/drawing/2014/main" id="{73B36D05-A0DC-E96E-C0B3-3D162E2B34C4}"/>
-              </a:ext>
-            </a:extLst>
-          </p:cNvPr>
-          <p:cNvSpPr txBox="1">
-            <a:spLocks/>
-          </p:cNvSpPr>
+          <p:cNvPr id="4" name="TextBox 3"/>
+          <p:cNvSpPr txBox="1"/>
           <p:nvPr/>
         </p:nvSpPr>
         <p:spPr>
           <a:xfrm>
-            <a:off x="1122977" y="2141550"/>
-            <a:ext cx="7040880" cy="3750095"/>
+            <a:off x="777240" y="1783080"/>
+            <a:ext cx="10835640" cy="256032"/>
           </a:xfrm>
           <a:prstGeom prst="rect">
             <a:avLst/>
           </a:prstGeom>
-        </p:spPr>
-        <p:txBody>
-          <a:bodyPr vert="horz" wrap="square" lIns="91440" tIns="45720" rIns="91440" bIns="45720" rtlCol="0" anchor="ctr" anchorCtr="0">
-            <a:normAutofit/>
+          <a:noFill/>
+        </p:spPr>
+        <p:txBody>
+          <a:bodyPr wrap="square" lIns="0" rIns="0" tIns="0" bIns="0" anchor="t">
+            <a:spAutoFit/>
           </a:bodyPr>
-          <a:lstStyle>
-            <a:lvl1pPr marL="0" indent="0" algn="l" defTabSz="914400" rtl="0" eaLnBrk="1" latinLnBrk="0" hangingPunct="1">
-              <a:lnSpc>
-                <a:spcPct val="120000"/>
-              </a:lnSpc>
-              <a:spcBef>
-                <a:spcPts val="0"/>
-              </a:spcBef>
-              <a:buFont typeface="Arial" panose="020B0604020202020204" pitchFamily="34" charset="0"/>
-              <a:buNone/>
-              <a:defRPr sz="1600" kern="1200">
-                <a:solidFill>
-                  <a:schemeClr val="tx1"/>
-                </a:solidFill>
-                <a:latin typeface="+mn-lt"/>
-                <a:ea typeface="+mn-ea"/>
-                <a:cs typeface="+mn-cs"/>
-              </a:defRPr>
-            </a:lvl1pPr>
-            <a:lvl2pPr marL="180000" indent="-180000" algn="l" defTabSz="914400" rtl="0" eaLnBrk="1" latinLnBrk="0" hangingPunct="1">
-              <a:lnSpc>
-                <a:spcPct val="120000"/>
-              </a:lnSpc>
-              <a:spcBef>
-                <a:spcPts val="0"/>
-              </a:spcBef>
-              <a:buFont typeface="Arial" panose="020B0604020202020204" pitchFamily="34" charset="0"/>
-              <a:buChar char="•"/>
-              <a:defRPr sz="1600" kern="1200">
-                <a:solidFill>
-                  <a:schemeClr val="tx1"/>
-                </a:solidFill>
-                <a:latin typeface="+mn-lt"/>
-                <a:ea typeface="+mn-ea"/>
-                <a:cs typeface="+mn-cs"/>
-              </a:defRPr>
-            </a:lvl2pPr>
-            <a:lvl3pPr marL="360000" indent="-180000" algn="l" defTabSz="914400" rtl="0" eaLnBrk="1" latinLnBrk="0" hangingPunct="1">
-              <a:lnSpc>
-                <a:spcPct val="120000"/>
-              </a:lnSpc>
-              <a:spcBef>
-                <a:spcPts val="0"/>
-              </a:spcBef>
-              <a:buFont typeface="Arial" panose="020B0604020202020204" pitchFamily="34" charset="0"/>
-              <a:buChar char="‒"/>
-              <a:defRPr sz="1600" kern="1200">
-                <a:solidFill>
-                  <a:schemeClr val="tx1"/>
-                </a:solidFill>
-                <a:latin typeface="+mn-lt"/>
-                <a:ea typeface="+mn-ea"/>
-                <a:cs typeface="+mn-cs"/>
-              </a:defRPr>
-            </a:lvl3pPr>
-            <a:lvl4pPr marL="540000" indent="-180000" algn="l" defTabSz="914400" rtl="0" eaLnBrk="1" latinLnBrk="0" hangingPunct="1">
-              <a:lnSpc>
-                <a:spcPct val="120000"/>
-              </a:lnSpc>
-              <a:spcBef>
-                <a:spcPts val="0"/>
-              </a:spcBef>
-              <a:buFont typeface="Arial" panose="020B0604020202020204" pitchFamily="34" charset="0"/>
-              <a:buChar char="‒"/>
-              <a:defRPr sz="1600" kern="1200">
-                <a:solidFill>
-                  <a:schemeClr val="tx1"/>
-                </a:solidFill>
-                <a:latin typeface="+mn-lt"/>
-                <a:ea typeface="+mn-ea"/>
-                <a:cs typeface="+mn-cs"/>
-              </a:defRPr>
-            </a:lvl4pPr>
-            <a:lvl5pPr marL="720000" indent="-180000" algn="l" defTabSz="914400" rtl="0" eaLnBrk="1" latinLnBrk="0" hangingPunct="1">
-              <a:lnSpc>
-                <a:spcPct val="120000"/>
-              </a:lnSpc>
-              <a:spcBef>
-                <a:spcPts val="0"/>
-              </a:spcBef>
-              <a:buFont typeface="Arial" panose="020B0604020202020204" pitchFamily="34" charset="0"/>
-              <a:buChar char="‒"/>
-              <a:defRPr sz="1600" kern="1200">
-                <a:solidFill>
-                  <a:schemeClr val="tx1"/>
-                </a:solidFill>
-                <a:latin typeface="+mn-lt"/>
-                <a:ea typeface="+mn-ea"/>
-                <a:cs typeface="+mn-cs"/>
-              </a:defRPr>
-            </a:lvl5pPr>
-            <a:lvl6pPr marL="900000" indent="-180000" algn="l" defTabSz="914400" rtl="0" eaLnBrk="1" latinLnBrk="0" hangingPunct="1">
-              <a:lnSpc>
-                <a:spcPct val="120000"/>
-              </a:lnSpc>
-              <a:spcBef>
-                <a:spcPts val="0"/>
-              </a:spcBef>
-              <a:buFont typeface="Arial" panose="020B0604020202020204" pitchFamily="34" charset="0"/>
-              <a:buChar char="‒"/>
-              <a:defRPr sz="1600" kern="1200">
-                <a:solidFill>
-                  <a:schemeClr val="tx1"/>
-                </a:solidFill>
-                <a:latin typeface="+mn-lt"/>
-                <a:ea typeface="+mn-ea"/>
-                <a:cs typeface="+mn-cs"/>
-              </a:defRPr>
-            </a:lvl6pPr>
-            <a:lvl7pPr marL="1080000" indent="-180000" algn="l" defTabSz="914400" rtl="0" eaLnBrk="1" latinLnBrk="0" hangingPunct="1">
-              <a:lnSpc>
-                <a:spcPct val="120000"/>
-              </a:lnSpc>
-              <a:spcBef>
-                <a:spcPts val="0"/>
-              </a:spcBef>
-              <a:buFont typeface="Arial" panose="020B0604020202020204" pitchFamily="34" charset="0"/>
-              <a:buChar char="‒"/>
-              <a:defRPr sz="1600" kern="1200">
-                <a:solidFill>
-                  <a:schemeClr val="tx1"/>
-                </a:solidFill>
-                <a:latin typeface="+mn-lt"/>
-                <a:ea typeface="+mn-ea"/>
-                <a:cs typeface="+mn-cs"/>
-              </a:defRPr>
-            </a:lvl7pPr>
-            <a:lvl8pPr marL="1260000" indent="-180000" algn="l" defTabSz="914400" rtl="0" eaLnBrk="1" latinLnBrk="0" hangingPunct="1">
-              <a:lnSpc>
-                <a:spcPct val="120000"/>
-              </a:lnSpc>
-              <a:spcBef>
-                <a:spcPts val="0"/>
-              </a:spcBef>
-              <a:buFont typeface="Arial" panose="020B0604020202020204" pitchFamily="34" charset="0"/>
-              <a:buChar char="‒"/>
-              <a:defRPr sz="1600" kern="1200">
-                <a:solidFill>
-                  <a:schemeClr val="tx1"/>
-                </a:solidFill>
-                <a:latin typeface="+mn-lt"/>
-                <a:ea typeface="+mn-ea"/>
-                <a:cs typeface="+mn-cs"/>
-              </a:defRPr>
-            </a:lvl8pPr>
-            <a:lvl9pPr marL="1440000" indent="-180000" algn="l" defTabSz="914400" rtl="0" eaLnBrk="1" latinLnBrk="0" hangingPunct="1">
-              <a:lnSpc>
-                <a:spcPct val="120000"/>
-              </a:lnSpc>
-              <a:spcBef>
-                <a:spcPts val="0"/>
-              </a:spcBef>
-              <a:buFont typeface="Arial" panose="020B0604020202020204" pitchFamily="34" charset="0"/>
-              <a:buChar char="‒"/>
-              <a:defRPr sz="1600" kern="1200">
-                <a:solidFill>
-                  <a:schemeClr val="tx1"/>
-                </a:solidFill>
-                <a:latin typeface="+mn-lt"/>
-                <a:ea typeface="+mn-ea"/>
-                <a:cs typeface="+mn-cs"/>
-              </a:defRPr>
-            </a:lvl9pPr>
-          </a:lstStyle>
-          <a:p>
-            <a:pPr marL="685800" lvl="1" indent="-457200">
-              <a:lnSpc>
-                <a:spcPct val="90000"/>
-              </a:lnSpc>
-              <a:spcAft>
-                <a:spcPts val="600"/>
-              </a:spcAft>
-              <a:buFont typeface="Wingdings" panose="05000000000000000000" pitchFamily="2" charset="2"/>
-              <a:buChar char="q"/>
-            </a:pPr>
-            <a:r>
-              <a:rPr lang="en-US" sz="2200" dirty="0"/>
-              <a:t>Billing Output @SAP — concatenate Mat. Desc + INSP with separator "| ".</a:t>
-            </a:r>
-          </a:p>
-          <a:p>
-            <a:pPr marL="685800" lvl="1" indent="-457200">
-              <a:lnSpc>
-                <a:spcPct val="90000"/>
-              </a:lnSpc>
-              <a:spcAft>
-                <a:spcPts val="600"/>
-              </a:spcAft>
-              <a:buFont typeface="Wingdings" panose="05000000000000000000" pitchFamily="2" charset="2"/>
-              <a:buChar char="q"/>
-            </a:pPr>
-          </a:p>
-          <a:p>
-            <a:pPr marL="685800" lvl="1" indent="-457200">
-              <a:lnSpc>
-                <a:spcPct val="90000"/>
-              </a:lnSpc>
-              <a:spcAft>
-                <a:spcPts val="600"/>
-              </a:spcAft>
-              <a:buFont typeface="Wingdings" panose="05000000000000000000" pitchFamily="2" charset="2"/>
-              <a:buChar char="q"/>
-            </a:pPr>
-            <a:r>
-              <a:rPr lang="en-US" sz="2200" dirty="0"/>
-              <a:t>Form PGN / PXKDL / PXKNB @PP# — print the long product name.</a:t>
-            </a:r>
-          </a:p>
-          <a:p>
-            <a:pPr marL="685800" lvl="1" indent="-457200">
-              <a:lnSpc>
-                <a:spcPct val="90000"/>
-              </a:lnSpc>
-              <a:spcAft>
-                <a:spcPts val="600"/>
-              </a:spcAft>
-              <a:buFont typeface="Wingdings" panose="05000000000000000000" pitchFamily="2" charset="2"/>
-              <a:buChar char="q"/>
-            </a:pPr>
-          </a:p>
-          <a:p>
-            <a:pPr marL="685800" lvl="1" indent="-457200">
-              <a:lnSpc>
-                <a:spcPct val="90000"/>
-              </a:lnSpc>
-              <a:spcAft>
-                <a:spcPts val="600"/>
-              </a:spcAft>
-              <a:buFont typeface="Wingdings" panose="05000000000000000000" pitchFamily="2" charset="2"/>
-              <a:buChar char="q"/>
-            </a:pPr>
-            <a:r>
-              <a:rPr lang="en-US" sz="2200" dirty="0"/>
-              <a:t>@VNPT — detect the separator "| " and lay out the long name on EIV.</a:t>
-            </a:r>
-          </a:p>
-        </p:txBody>
-      </p:sp>
-      <p:sp>
-        <p:nvSpPr>
-          <p:cNvPr id="6" name="Rounded Rectangle 5"/>
+          <a:lstStyle/>
+          <a:p>
+            <a:pPr algn="l"/>
+            <a:r>
+              <a:rPr sz="1150" b="1">
+                <a:solidFill>
+                  <a:srgbClr val="1A1A1A"/>
+                </a:solidFill>
+                <a:latin typeface="Arial"/>
+              </a:rPr>
+              <a:t>Master data nhập vào</a:t>
+            </a:r>
+          </a:p>
+        </p:txBody>
+      </p:sp>
+      <p:sp>
+        <p:nvSpPr>
+          <p:cNvPr id="5" name="Rounded Rectangle 4"/>
           <p:cNvSpPr/>
           <p:nvPr/>
         </p:nvSpPr>
         <p:spPr>
           <a:xfrm>
-            <a:off x="8549640" y="1600200"/>
-            <a:ext cx="3063240" cy="4434840"/>
+            <a:off x="777240" y="2103120"/>
+            <a:ext cx="5257800" cy="868680"/>
           </a:xfrm>
           <a:prstGeom prst="roundRect">
             <a:avLst>
-              <a:gd name="adj" fmla="val 4500"/>
+              <a:gd name="adj" fmla="val 4000"/>
+            </a:avLst>
+          </a:prstGeom>
+          <a:solidFill>
+            <a:srgbClr val="FFFFFF"/>
+          </a:solidFill>
+          <a:ln w="12700">
+            <a:solidFill>
+              <a:srgbClr val="BE0028"/>
+            </a:solidFill>
+          </a:ln>
+          <a:effectLst/>
+        </p:spPr>
+        <p:style>
+          <a:lnRef idx="1">
+            <a:schemeClr val="accent1"/>
+          </a:lnRef>
+          <a:fillRef idx="3">
+            <a:schemeClr val="accent1"/>
+          </a:fillRef>
+          <a:effectRef idx="2">
+            <a:schemeClr val="accent1"/>
+          </a:effectRef>
+          <a:fontRef idx="minor">
+            <a:schemeClr val="lt1"/>
+          </a:fontRef>
+        </p:style>
+        <p:txBody>
+          <a:bodyPr rtlCol="0" anchor="ctr"/>
+          <a:lstStyle/>
+          <a:p/>
+        </p:txBody>
+      </p:sp>
+      <p:sp>
+        <p:nvSpPr>
+          <p:cNvPr id="6" name="TextBox 5"/>
+          <p:cNvSpPr txBox="1"/>
+          <p:nvPr/>
+        </p:nvSpPr>
+        <p:spPr>
+          <a:xfrm>
+            <a:off x="960120" y="2231136"/>
+            <a:ext cx="4892040" cy="201168"/>
+          </a:xfrm>
+          <a:prstGeom prst="rect">
+            <a:avLst/>
+          </a:prstGeom>
+          <a:noFill/>
+        </p:spPr>
+        <p:txBody>
+          <a:bodyPr wrap="square" lIns="0" rIns="0" tIns="0" bIns="0" anchor="t">
+            <a:spAutoFit/>
+          </a:bodyPr>
+          <a:lstStyle/>
+          <a:p>
+            <a:pPr algn="l"/>
+            <a:r>
+              <a:rPr sz="1000" b="1">
+                <a:solidFill>
+                  <a:srgbClr val="6B6B6B"/>
+                </a:solidFill>
+                <a:latin typeface="Arial"/>
+              </a:rPr>
+              <a:t>Mat. Desc</a:t>
+            </a:r>
+          </a:p>
+        </p:txBody>
+      </p:sp>
+      <p:sp>
+        <p:nvSpPr>
+          <p:cNvPr id="7" name="TextBox 6"/>
+          <p:cNvSpPr txBox="1"/>
+          <p:nvPr/>
+        </p:nvSpPr>
+        <p:spPr>
+          <a:xfrm>
+            <a:off x="960120" y="2487168"/>
+            <a:ext cx="4892040" cy="274320"/>
+          </a:xfrm>
+          <a:prstGeom prst="rect">
+            <a:avLst/>
+          </a:prstGeom>
+          <a:noFill/>
+        </p:spPr>
+        <p:txBody>
+          <a:bodyPr wrap="square" lIns="0" rIns="0" tIns="0" bIns="0" anchor="t">
+            <a:spAutoFit/>
+          </a:bodyPr>
+          <a:lstStyle/>
+          <a:p>
+            <a:pPr algn="l"/>
+            <a:r>
+              <a:rPr sz="1200" b="0">
+                <a:solidFill>
+                  <a:srgbClr val="1A1A1A"/>
+                </a:solidFill>
+                <a:latin typeface="Arial"/>
+              </a:rPr>
+              <a:t>ABC SUNSCREEN GEL SPF50+ 50ML</a:t>
+            </a:r>
+          </a:p>
+        </p:txBody>
+      </p:sp>
+      <p:sp>
+        <p:nvSpPr>
+          <p:cNvPr id="8" name="Rounded Rectangle 7"/>
+          <p:cNvSpPr/>
+          <p:nvPr/>
+        </p:nvSpPr>
+        <p:spPr>
+          <a:xfrm>
+            <a:off x="6355080" y="2103120"/>
+            <a:ext cx="5257800" cy="868680"/>
+          </a:xfrm>
+          <a:prstGeom prst="roundRect">
+            <a:avLst>
+              <a:gd name="adj" fmla="val 4000"/>
+            </a:avLst>
+          </a:prstGeom>
+          <a:solidFill>
+            <a:srgbClr val="FFFFFF"/>
+          </a:solidFill>
+          <a:ln w="12700">
+            <a:solidFill>
+              <a:srgbClr val="BE0028"/>
+            </a:solidFill>
+          </a:ln>
+          <a:effectLst/>
+        </p:spPr>
+        <p:style>
+          <a:lnRef idx="1">
+            <a:schemeClr val="accent1"/>
+          </a:lnRef>
+          <a:fillRef idx="3">
+            <a:schemeClr val="accent1"/>
+          </a:fillRef>
+          <a:effectRef idx="2">
+            <a:schemeClr val="accent1"/>
+          </a:effectRef>
+          <a:fontRef idx="minor">
+            <a:schemeClr val="lt1"/>
+          </a:fontRef>
+        </p:style>
+        <p:txBody>
+          <a:bodyPr rtlCol="0" anchor="ctr"/>
+          <a:lstStyle/>
+          <a:p/>
+        </p:txBody>
+      </p:sp>
+      <p:sp>
+        <p:nvSpPr>
+          <p:cNvPr id="9" name="TextBox 8"/>
+          <p:cNvSpPr txBox="1"/>
+          <p:nvPr/>
+        </p:nvSpPr>
+        <p:spPr>
+          <a:xfrm>
+            <a:off x="6537960" y="2231136"/>
+            <a:ext cx="4892040" cy="201168"/>
+          </a:xfrm>
+          <a:prstGeom prst="rect">
+            <a:avLst/>
+          </a:prstGeom>
+          <a:noFill/>
+        </p:spPr>
+        <p:txBody>
+          <a:bodyPr wrap="square" lIns="0" rIns="0" tIns="0" bIns="0" anchor="t">
+            <a:spAutoFit/>
+          </a:bodyPr>
+          <a:lstStyle/>
+          <a:p>
+            <a:pPr algn="l"/>
+            <a:r>
+              <a:rPr sz="1000" b="1">
+                <a:solidFill>
+                  <a:srgbClr val="BE0028"/>
+                </a:solidFill>
+                <a:latin typeface="Arial"/>
+              </a:rPr>
+              <a:t>INSP</a:t>
+            </a:r>
+          </a:p>
+        </p:txBody>
+      </p:sp>
+      <p:sp>
+        <p:nvSpPr>
+          <p:cNvPr id="10" name="TextBox 9"/>
+          <p:cNvSpPr txBox="1"/>
+          <p:nvPr/>
+        </p:nvSpPr>
+        <p:spPr>
+          <a:xfrm>
+            <a:off x="6537960" y="2487168"/>
+            <a:ext cx="4892040" cy="274320"/>
+          </a:xfrm>
+          <a:prstGeom prst="rect">
+            <a:avLst/>
+          </a:prstGeom>
+          <a:noFill/>
+        </p:spPr>
+        <p:txBody>
+          <a:bodyPr wrap="square" lIns="0" rIns="0" tIns="0" bIns="0" anchor="t">
+            <a:spAutoFit/>
+          </a:bodyPr>
+          <a:lstStyle/>
+          <a:p>
+            <a:pPr algn="l"/>
+            <a:r>
+              <a:rPr sz="1200" b="0">
+                <a:solidFill>
+                  <a:srgbClr val="1A1A1A"/>
+                </a:solidFill>
+                <a:latin typeface="Arial"/>
+              </a:rPr>
+              <a:t>Kem dưỡng da chống nắng ABC SPF50+ dạng gel 50ml</a:t>
+            </a:r>
+          </a:p>
+        </p:txBody>
+      </p:sp>
+      <p:sp>
+        <p:nvSpPr>
+          <p:cNvPr id="11" name="TextBox 10"/>
+          <p:cNvSpPr txBox="1"/>
+          <p:nvPr/>
+        </p:nvSpPr>
+        <p:spPr>
+          <a:xfrm>
+            <a:off x="777240" y="3246120"/>
+            <a:ext cx="10835640" cy="256032"/>
+          </a:xfrm>
+          <a:prstGeom prst="rect">
+            <a:avLst/>
+          </a:prstGeom>
+          <a:noFill/>
+        </p:spPr>
+        <p:txBody>
+          <a:bodyPr wrap="square" lIns="0" rIns="0" tIns="0" bIns="0" anchor="t">
+            <a:spAutoFit/>
+          </a:bodyPr>
+          <a:lstStyle/>
+          <a:p>
+            <a:pPr algn="l"/>
+            <a:r>
+              <a:rPr sz="1150" b="1">
+                <a:solidFill>
+                  <a:srgbClr val="1A1A1A"/>
+                </a:solidFill>
+                <a:latin typeface="Arial"/>
+              </a:rPr>
+              <a:t>Chuỗi SAP ghép và gửi sang EIV</a:t>
+            </a:r>
+          </a:p>
+        </p:txBody>
+      </p:sp>
+      <p:sp>
+        <p:nvSpPr>
+          <p:cNvPr id="12" name="Rounded Rectangle 11"/>
+          <p:cNvSpPr/>
+          <p:nvPr/>
+        </p:nvSpPr>
+        <p:spPr>
+          <a:xfrm>
+            <a:off x="777240" y="3566160"/>
+            <a:ext cx="10835640" cy="658368"/>
+          </a:xfrm>
+          <a:prstGeom prst="roundRect">
+            <a:avLst>
+              <a:gd name="adj" fmla="val 4000"/>
+            </a:avLst>
+          </a:prstGeom>
+          <a:solidFill>
+            <a:srgbClr val="FFFFFF"/>
+          </a:solidFill>
+          <a:ln w="12700">
+            <a:solidFill>
+              <a:srgbClr val="BE0028"/>
+            </a:solidFill>
+          </a:ln>
+          <a:effectLst/>
+        </p:spPr>
+        <p:style>
+          <a:lnRef idx="1">
+            <a:schemeClr val="accent1"/>
+          </a:lnRef>
+          <a:fillRef idx="3">
+            <a:schemeClr val="accent1"/>
+          </a:fillRef>
+          <a:effectRef idx="2">
+            <a:schemeClr val="accent1"/>
+          </a:effectRef>
+          <a:fontRef idx="minor">
+            <a:schemeClr val="lt1"/>
+          </a:fontRef>
+        </p:style>
+        <p:txBody>
+          <a:bodyPr rtlCol="0" anchor="ctr"/>
+          <a:lstStyle/>
+          <a:p/>
+        </p:txBody>
+      </p:sp>
+      <p:sp>
+        <p:nvSpPr>
+          <p:cNvPr id="13" name="TextBox 12"/>
+          <p:cNvSpPr txBox="1"/>
+          <p:nvPr/>
+        </p:nvSpPr>
+        <p:spPr>
+          <a:xfrm>
+            <a:off x="960120" y="3730752"/>
+            <a:ext cx="10469880" cy="329184"/>
+          </a:xfrm>
+          <a:prstGeom prst="rect">
+            <a:avLst/>
+          </a:prstGeom>
+          <a:noFill/>
+        </p:spPr>
+        <p:txBody>
+          <a:bodyPr wrap="square" lIns="0" rIns="0" tIns="0" bIns="0" anchor="t">
+            <a:spAutoFit/>
+          </a:bodyPr>
+          <a:lstStyle/>
+          <a:p>
+            <a:pPr algn="l"/>
+            <a:r>
+              <a:rPr sz="1250" b="1">
+                <a:solidFill>
+                  <a:srgbClr val="6B6B6B"/>
+                </a:solidFill>
+                <a:latin typeface="Arial"/>
+              </a:rPr>
+              <a:t>ABC SUNSCREEN GEL SPF50+ 50ML</a:t>
+            </a:r>
+            <a:r>
+              <a:rPr sz="1250" b="1">
+                <a:solidFill>
+                  <a:srgbClr val="EF233C"/>
+                </a:solidFill>
+                <a:latin typeface="Arial"/>
+              </a:rPr>
+              <a:t>|  </a:t>
+            </a:r>
+            <a:r>
+              <a:rPr sz="1250" b="1">
+                <a:solidFill>
+                  <a:srgbClr val="BE0028"/>
+                </a:solidFill>
+                <a:latin typeface="Arial"/>
+              </a:rPr>
+              <a:t>Kem dưỡng da chống nắng ABC SPF50+ dạng gel 50ml</a:t>
+            </a:r>
+          </a:p>
+        </p:txBody>
+      </p:sp>
+      <p:sp>
+        <p:nvSpPr>
+          <p:cNvPr id="14" name="TextBox 13"/>
+          <p:cNvSpPr txBox="1"/>
+          <p:nvPr/>
+        </p:nvSpPr>
+        <p:spPr>
+          <a:xfrm>
+            <a:off x="960120" y="4279392"/>
+            <a:ext cx="10469880" cy="219456"/>
+          </a:xfrm>
+          <a:prstGeom prst="rect">
+            <a:avLst/>
+          </a:prstGeom>
+          <a:noFill/>
+        </p:spPr>
+        <p:txBody>
+          <a:bodyPr wrap="square" lIns="0" rIns="0" tIns="0" bIns="0" anchor="t">
+            <a:spAutoFit/>
+          </a:bodyPr>
+          <a:lstStyle/>
+          <a:p>
+            <a:pPr algn="l"/>
+            <a:r>
+              <a:rPr sz="950" b="1">
+                <a:solidFill>
+                  <a:srgbClr val="6B6B6B"/>
+                </a:solidFill>
+                <a:latin typeface="Arial"/>
+              </a:rPr>
+              <a:t>● Mat. Desc — tiếng Anh</a:t>
+            </a:r>
+            <a:r>
+              <a:rPr sz="950" b="1">
+                <a:solidFill>
+                  <a:srgbClr val="EF233C"/>
+                </a:solidFill>
+                <a:latin typeface="Arial"/>
+              </a:rPr>
+              <a:t>      ● separator "| "</a:t>
+            </a:r>
+            <a:r>
+              <a:rPr sz="950" b="1">
+                <a:solidFill>
+                  <a:srgbClr val="BE0028"/>
+                </a:solidFill>
+                <a:latin typeface="Arial"/>
+              </a:rPr>
+              <a:t>      ● INSP — tiếng Việt có dấu</a:t>
+            </a:r>
+          </a:p>
+        </p:txBody>
+      </p:sp>
+      <p:sp>
+        <p:nvSpPr>
+          <p:cNvPr id="15" name="TextBox 14"/>
+          <p:cNvSpPr txBox="1"/>
+          <p:nvPr/>
+        </p:nvSpPr>
+        <p:spPr>
+          <a:xfrm>
+            <a:off x="777240" y="4590288"/>
+            <a:ext cx="10835640" cy="256032"/>
+          </a:xfrm>
+          <a:prstGeom prst="rect">
+            <a:avLst/>
+          </a:prstGeom>
+          <a:noFill/>
+        </p:spPr>
+        <p:txBody>
+          <a:bodyPr wrap="square" lIns="0" rIns="0" tIns="0" bIns="0" anchor="t">
+            <a:spAutoFit/>
+          </a:bodyPr>
+          <a:lstStyle/>
+          <a:p>
+            <a:pPr algn="l"/>
+            <a:r>
+              <a:rPr sz="1150" b="1">
+                <a:solidFill>
+                  <a:srgbClr val="1A1A1A"/>
+                </a:solidFill>
+                <a:latin typeface="Arial"/>
+              </a:rPr>
+              <a:t>Kết quả trình bày trên hóa đơn / phiếu kho</a:t>
+            </a:r>
+          </a:p>
+        </p:txBody>
+      </p:sp>
+      <p:sp>
+        <p:nvSpPr>
+          <p:cNvPr id="16" name="Rounded Rectangle 15"/>
+          <p:cNvSpPr/>
+          <p:nvPr/>
+        </p:nvSpPr>
+        <p:spPr>
+          <a:xfrm>
+            <a:off x="777240" y="4901184"/>
+            <a:ext cx="10835640" cy="1517904"/>
+          </a:xfrm>
+          <a:prstGeom prst="roundRect">
+            <a:avLst>
+              <a:gd name="adj" fmla="val 3000"/>
             </a:avLst>
           </a:prstGeom>
           <a:solidFill>
@@ -20165,22 +21167,19 @@
         <p:txBody>
           <a:bodyPr rtlCol="0" anchor="ctr"/>
           <a:lstStyle/>
-          <a:p>
-            <a:pPr algn="ctr"/>
-            <a:endParaRPr/>
-          </a:p>
-        </p:txBody>
-      </p:sp>
-      <p:sp>
-        <p:nvSpPr>
-          <p:cNvPr id="7" name="Rounded Rectangle 6"/>
+          <a:p/>
+        </p:txBody>
+      </p:sp>
+      <p:sp>
+        <p:nvSpPr>
+          <p:cNvPr id="17" name="Rounded Rectangle 16"/>
           <p:cNvSpPr/>
           <p:nvPr/>
         </p:nvSpPr>
         <p:spPr>
           <a:xfrm>
-            <a:off x="8549640" y="1600200"/>
-            <a:ext cx="3063240" cy="128016"/>
+            <a:off x="777240" y="4901184"/>
+            <a:ext cx="10835640" cy="128016"/>
           </a:xfrm>
           <a:prstGeom prst="roundRect">
             <a:avLst>
@@ -20212,26 +21211,58 @@
         <p:txBody>
           <a:bodyPr rtlCol="0" anchor="ctr"/>
           <a:lstStyle/>
+          <a:p/>
+        </p:txBody>
+      </p:sp>
+      <p:sp>
+        <p:nvSpPr>
+          <p:cNvPr id="18" name="TextBox 17"/>
+          <p:cNvSpPr txBox="1"/>
+          <p:nvPr/>
+        </p:nvSpPr>
+        <p:spPr>
+          <a:xfrm>
+            <a:off x="777240" y="5175504"/>
+            <a:ext cx="10835640" cy="274320"/>
+          </a:xfrm>
+          <a:prstGeom prst="rect">
+            <a:avLst/>
+          </a:prstGeom>
+          <a:noFill/>
+        </p:spPr>
+        <p:txBody>
+          <a:bodyPr wrap="square" lIns="0" rIns="0" tIns="0" bIns="0" anchor="t">
+            <a:spAutoFit/>
+          </a:bodyPr>
+          <a:lstStyle/>
           <a:p>
             <a:pPr algn="ctr"/>
-            <a:endParaRPr/>
-          </a:p>
-        </p:txBody>
-      </p:sp>
-      <p:sp>
-        <p:nvSpPr>
-          <p:cNvPr id="8" name="Rounded Rectangle 7"/>
+            <a:r>
+              <a:rPr sz="1250" b="1">
+                <a:solidFill>
+                  <a:srgbClr val="BE0028"/>
+                </a:solidFill>
+                <a:latin typeface="Arial"/>
+              </a:rPr>
+              <a:t/>
+            </a:r>
+          </a:p>
+        </p:txBody>
+      </p:sp>
+      <p:sp>
+        <p:nvSpPr>
+          <p:cNvPr id="19" name="Rounded Rectangle 18"/>
           <p:cNvSpPr/>
           <p:nvPr/>
         </p:nvSpPr>
         <p:spPr>
           <a:xfrm>
-            <a:off x="8750808" y="1920240"/>
-            <a:ext cx="2660904" cy="2331720"/>
+            <a:off x="1005840" y="5084064"/>
+            <a:ext cx="10378440" cy="1133856"/>
           </a:xfrm>
           <a:prstGeom prst="roundRect">
             <a:avLst>
-              <a:gd name="adj" fmla="val 6000"/>
+              <a:gd name="adj" fmla="val 4000"/>
             </a:avLst>
           </a:prstGeom>
           <a:solidFill>
@@ -20261,22 +21292,19 @@
         <p:txBody>
           <a:bodyPr rtlCol="0" anchor="ctr"/>
           <a:lstStyle/>
-          <a:p>
-            <a:pPr algn="ctr"/>
-            <a:endParaRPr/>
-          </a:p>
-        </p:txBody>
-      </p:sp>
-      <p:sp>
-        <p:nvSpPr>
-          <p:cNvPr id="9" name="TextBox 8"/>
+          <a:p/>
+        </p:txBody>
+      </p:sp>
+      <p:sp>
+        <p:nvSpPr>
+          <p:cNvPr id="20" name="TextBox 19"/>
           <p:cNvSpPr txBox="1"/>
           <p:nvPr/>
         </p:nvSpPr>
         <p:spPr>
           <a:xfrm>
-            <a:off x="8915400" y="2057400"/>
-            <a:ext cx="2331720" cy="274320"/>
+            <a:off x="1234440" y="5212080"/>
+            <a:ext cx="9921240" cy="201168"/>
           </a:xfrm>
           <a:prstGeom prst="rect">
             <a:avLst/>
@@ -20284,42 +21312,40 @@
           <a:noFill/>
         </p:spPr>
         <p:txBody>
-          <a:bodyPr wrap="square" lIns="0" tIns="0" rIns="0" bIns="0">
+          <a:bodyPr wrap="square" lIns="0" rIns="0" tIns="0" bIns="0" anchor="t">
             <a:spAutoFit/>
           </a:bodyPr>
           <a:lstStyle/>
           <a:p>
             <a:pPr algn="l"/>
             <a:r>
-              <a:rPr sz="1300" b="1" i="0">
-                <a:solidFill>
-                  <a:srgbClr val="1A1A1A"/>
-                </a:solidFill>
-                <a:latin typeface="Calibri"/>
+              <a:rPr sz="950" b="0">
+                <a:solidFill>
+                  <a:srgbClr val="6B6B6B"/>
+                </a:solidFill>
+                <a:latin typeface="Arial"/>
               </a:rPr>
-              <a:t>DEV SCOPE</a:t>
-            </a:r>
-          </a:p>
-        </p:txBody>
-      </p:sp>
-      <p:sp>
-        <p:nvSpPr>
-          <p:cNvPr id="10" name="Rounded Rectangle 9"/>
+              <a:t>Tên hàng hóa, dịch vụ</a:t>
+            </a:r>
+          </a:p>
+        </p:txBody>
+      </p:sp>
+      <p:sp>
+        <p:nvSpPr>
+          <p:cNvPr id="21" name="Rectangle 20"/>
           <p:cNvSpPr/>
           <p:nvPr/>
         </p:nvSpPr>
         <p:spPr>
           <a:xfrm>
-            <a:off x="10268712" y="2057400"/>
-            <a:ext cx="1005840" cy="274320"/>
-          </a:xfrm>
-          <a:prstGeom prst="roundRect">
-            <a:avLst>
-              <a:gd name="adj" fmla="val 50000"/>
-            </a:avLst>
+            <a:off x="1234440" y="5449824"/>
+            <a:ext cx="9921240" cy="10972"/>
+          </a:xfrm>
+          <a:prstGeom prst="rect">
+            <a:avLst/>
           </a:prstGeom>
           <a:solidFill>
-            <a:srgbClr val="6B6B6B"/>
+            <a:srgbClr val="E9E9E9"/>
           </a:solidFill>
           <a:ln>
             <a:noFill/>
@@ -20341,91 +21367,21 @@
           </a:fontRef>
         </p:style>
         <p:txBody>
-          <a:bodyPr wrap="none" lIns="0" tIns="0" rIns="0" bIns="0" rtlCol="0" anchor="ctr"/>
-          <a:lstStyle/>
-          <a:p>
-            <a:pPr algn="ctr"/>
-            <a:r>
-              <a:rPr sz="1100" b="1">
-                <a:solidFill>
-                  <a:srgbClr val="FFFFFF"/>
-                </a:solidFill>
-                <a:latin typeface="Calibri"/>
-              </a:rPr>
-              <a:t>BUILD</a:t>
-            </a:r>
-          </a:p>
-        </p:txBody>
-      </p:sp>
-      <p:cxnSp>
-        <p:nvCxnSpPr>
-          <p:cNvPr id="11" name="Connector 10"/>
-          <p:cNvCxnSpPr/>
-          <p:nvPr/>
-        </p:nvCxnSpPr>
-        <p:spPr>
-          <a:xfrm>
-            <a:off x="8750808" y="2450592"/>
-            <a:ext cx="2660904" cy="0"/>
-          </a:xfrm>
-          <a:prstGeom prst="line">
-            <a:avLst/>
-          </a:prstGeom>
-          <a:ln w="9525">
-            <a:solidFill>
-              <a:srgbClr val="E9E9E9"/>
-            </a:solidFill>
-          </a:ln>
-        </p:spPr>
-        <p:style>
-          <a:lnRef idx="2">
-            <a:schemeClr val="accent1"/>
-          </a:lnRef>
-          <a:fillRef idx="0">
-            <a:schemeClr val="accent1"/>
-          </a:fillRef>
-          <a:effectRef idx="1">
-            <a:schemeClr val="accent1"/>
-          </a:effectRef>
-          <a:fontRef idx="minor">
-            <a:schemeClr val="tx1"/>
-          </a:fontRef>
-        </p:style>
-      </p:cxnSp>
-      <p:pic>
-        <p:nvPicPr>
-          <p:cNvPr id="12" name="Picture 11" descr="image.png"/>
-          <p:cNvPicPr>
-            <a:picLocks noChangeAspect="1"/>
-          </p:cNvPicPr>
-          <p:nvPr/>
-        </p:nvPicPr>
-        <p:blipFill>
-          <a:blip r:embed="rId2"/>
-          <a:stretch>
-            <a:fillRect/>
-          </a:stretch>
-        </p:blipFill>
-        <p:spPr>
-          <a:xfrm>
-            <a:off x="8915400" y="2606040"/>
-            <a:ext cx="502920" cy="502920"/>
-          </a:xfrm>
-          <a:prstGeom prst="rect">
-            <a:avLst/>
-          </a:prstGeom>
-        </p:spPr>
-      </p:pic>
-      <p:sp>
-        <p:nvSpPr>
-          <p:cNvPr id="13" name="TextBox 12"/>
+          <a:bodyPr rtlCol="0" anchor="ctr"/>
+          <a:lstStyle/>
+          <a:p/>
+        </p:txBody>
+      </p:sp>
+      <p:sp>
+        <p:nvSpPr>
+          <p:cNvPr id="22" name="TextBox 21"/>
           <p:cNvSpPr txBox="1"/>
           <p:nvPr/>
         </p:nvSpPr>
         <p:spPr>
           <a:xfrm>
-            <a:off x="9573768" y="2633472"/>
-            <a:ext cx="1655064" cy="274320"/>
+            <a:off x="1234440" y="5559552"/>
+            <a:ext cx="9921240" cy="292608"/>
           </a:xfrm>
           <a:prstGeom prst="rect">
             <a:avLst/>
@@ -20433,34 +21389,34 @@
           <a:noFill/>
         </p:spPr>
         <p:txBody>
-          <a:bodyPr wrap="square" lIns="0" tIns="0" rIns="0" bIns="0">
+          <a:bodyPr wrap="square" lIns="0" rIns="0" tIns="0" bIns="0" anchor="t">
             <a:spAutoFit/>
           </a:bodyPr>
           <a:lstStyle/>
           <a:p>
             <a:pPr algn="l"/>
             <a:r>
-              <a:rPr sz="1050" b="1" i="0">
+              <a:rPr sz="1400" b="1">
                 <a:solidFill>
                   <a:srgbClr val="1A1A1A"/>
                 </a:solidFill>
-                <a:latin typeface="Calibri"/>
+                <a:latin typeface="Arial"/>
               </a:rPr>
-              <a:t>Billing Output</a:t>
-            </a:r>
-          </a:p>
-        </p:txBody>
-      </p:sp>
-      <p:sp>
-        <p:nvSpPr>
-          <p:cNvPr id="14" name="TextBox 13"/>
+              <a:t>Kem dưỡng da chống nắng ABC SPF50+ dạng gel 50ml</a:t>
+            </a:r>
+          </a:p>
+        </p:txBody>
+      </p:sp>
+      <p:sp>
+        <p:nvSpPr>
+          <p:cNvPr id="23" name="TextBox 22"/>
           <p:cNvSpPr txBox="1"/>
           <p:nvPr/>
         </p:nvSpPr>
         <p:spPr>
           <a:xfrm>
-            <a:off x="9573768" y="2907792"/>
-            <a:ext cx="1655064" cy="146194"/>
+            <a:off x="1234440" y="5907024"/>
+            <a:ext cx="9921240" cy="237744"/>
           </a:xfrm>
           <a:prstGeom prst="rect">
             <a:avLst/>
@@ -20468,215 +21424,20 @@
           <a:noFill/>
         </p:spPr>
         <p:txBody>
-          <a:bodyPr wrap="square" lIns="0" tIns="0" rIns="0" bIns="0">
+          <a:bodyPr wrap="square" lIns="0" rIns="0" tIns="0" bIns="0" anchor="t">
             <a:spAutoFit/>
           </a:bodyPr>
           <a:lstStyle/>
           <a:p>
             <a:pPr algn="l"/>
             <a:r>
-              <a:rPr sz="950" b="0" i="1" dirty="0">
+              <a:rPr sz="1000" b="0">
                 <a:solidFill>
                   <a:srgbClr val="6B6B6B"/>
                 </a:solidFill>
-                <a:latin typeface="Calibri"/>
+                <a:latin typeface="Arial"/>
               </a:rPr>
-              <a:t>@SAP</a:t>
-            </a:r>
-          </a:p>
-        </p:txBody>
-      </p:sp>
-      <p:cxnSp>
-        <p:nvCxnSpPr>
-          <p:cNvPr id="15" name="Connector 14"/>
-          <p:cNvCxnSpPr/>
-          <p:nvPr/>
-        </p:nvCxnSpPr>
-        <p:spPr>
-          <a:xfrm>
-            <a:off x="8750808" y="3291840"/>
-            <a:ext cx="2660904" cy="0"/>
-          </a:xfrm>
-          <a:prstGeom prst="line">
-            <a:avLst/>
-          </a:prstGeom>
-          <a:ln w="9525">
-            <a:solidFill>
-              <a:srgbClr val="E9E9E9"/>
-            </a:solidFill>
-          </a:ln>
-        </p:spPr>
-        <p:style>
-          <a:lnRef idx="2">
-            <a:schemeClr val="accent1"/>
-          </a:lnRef>
-          <a:fillRef idx="0">
-            <a:schemeClr val="accent1"/>
-          </a:fillRef>
-          <a:effectRef idx="1">
-            <a:schemeClr val="accent1"/>
-          </a:effectRef>
-          <a:fontRef idx="minor">
-            <a:schemeClr val="tx1"/>
-          </a:fontRef>
-        </p:style>
-      </p:cxnSp>
-      <p:sp>
-        <p:nvSpPr>
-          <p:cNvPr id="16" name="TextBox 15"/>
-          <p:cNvSpPr txBox="1"/>
-          <p:nvPr/>
-        </p:nvSpPr>
-        <p:spPr>
-          <a:xfrm>
-            <a:off x="8915400" y="3429000"/>
-            <a:ext cx="2331720" cy="274320"/>
-          </a:xfrm>
-          <a:prstGeom prst="rect">
-            <a:avLst/>
-          </a:prstGeom>
-          <a:noFill/>
-        </p:spPr>
-        <p:txBody>
-          <a:bodyPr wrap="square" lIns="0" tIns="0" rIns="0" bIns="0">
-            <a:spAutoFit/>
-          </a:bodyPr>
-          <a:lstStyle/>
-          <a:p>
-            <a:pPr algn="l"/>
-            <a:r>
-              <a:rPr sz="1000" b="0" i="0">
-                <a:solidFill>
-                  <a:srgbClr val="6B6B6B"/>
-                </a:solidFill>
-                <a:latin typeface="Calibri"/>
-              </a:rPr>
-              <a:t>Forms PGN/PXKDL/PXKNB — @PP#</a:t>
-            </a:r>
-          </a:p>
-        </p:txBody>
-      </p:sp>
-      <p:sp>
-        <p:nvSpPr>
-          <p:cNvPr id="17" name="TextBox 16"/>
-          <p:cNvSpPr txBox="1"/>
-          <p:nvPr/>
-        </p:nvSpPr>
-        <p:spPr>
-          <a:xfrm>
-            <a:off x="8915400" y="3730752"/>
-            <a:ext cx="2331720" cy="274320"/>
-          </a:xfrm>
-          <a:prstGeom prst="rect">
-            <a:avLst/>
-          </a:prstGeom>
-          <a:noFill/>
-        </p:spPr>
-        <p:txBody>
-          <a:bodyPr wrap="square" lIns="0" tIns="0" rIns="0" bIns="0">
-            <a:spAutoFit/>
-          </a:bodyPr>
-          <a:lstStyle/>
-          <a:p>
-            <a:pPr algn="l"/>
-            <a:r>
-              <a:rPr sz="1000" b="0" i="0">
-                <a:solidFill>
-                  <a:srgbClr val="6B6B6B"/>
-                </a:solidFill>
-                <a:latin typeface="Calibri"/>
-              </a:rPr>
-              <a:t>Separator handling — @VNPT</a:t>
-            </a:r>
-          </a:p>
-        </p:txBody>
-      </p:sp>
-      <p:sp>
-        <p:nvSpPr>
-          <p:cNvPr id="18" name="TextBox 17"/>
-          <p:cNvSpPr txBox="1"/>
-          <p:nvPr/>
-        </p:nvSpPr>
-        <p:spPr>
-          <a:xfrm>
-            <a:off x="8549640" y="4507992"/>
-            <a:ext cx="3063240" cy="320040"/>
-          </a:xfrm>
-          <a:prstGeom prst="rect">
-            <a:avLst/>
-          </a:prstGeom>
-          <a:noFill/>
-        </p:spPr>
-        <p:txBody>
-          <a:bodyPr wrap="square" lIns="0" tIns="0" rIns="0" bIns="0">
-            <a:spAutoFit/>
-          </a:bodyPr>
-          <a:lstStyle/>
-          <a:p>
-            <a:pPr algn="ctr"/>
-            <a:r>
-              <a:rPr sz="1250" b="1" i="0">
-                <a:solidFill>
-                  <a:srgbClr val="BE0028"/>
-                </a:solidFill>
-                <a:latin typeface="Calibri"/>
-              </a:rPr>
-              <a:t>DEVELOPMENT  ·  Three Parties</a:t>
-            </a:r>
-          </a:p>
-        </p:txBody>
-      </p:sp>
-      <p:sp>
-        <p:nvSpPr>
-          <p:cNvPr id="19" name="Rounded Rectangle 18"/>
-          <p:cNvSpPr/>
-          <p:nvPr/>
-        </p:nvSpPr>
-        <p:spPr>
-          <a:xfrm>
-            <a:off x="9304020" y="5468112"/>
-            <a:ext cx="1554480" cy="347472"/>
-          </a:xfrm>
-          <a:prstGeom prst="roundRect">
-            <a:avLst>
-              <a:gd name="adj" fmla="val 50000"/>
-            </a:avLst>
-          </a:prstGeom>
-          <a:solidFill>
-            <a:srgbClr val="6B6B6B"/>
-          </a:solidFill>
-          <a:ln>
-            <a:noFill/>
-          </a:ln>
-          <a:effectLst/>
-        </p:spPr>
-        <p:style>
-          <a:lnRef idx="1">
-            <a:schemeClr val="accent1"/>
-          </a:lnRef>
-          <a:fillRef idx="3">
-            <a:schemeClr val="accent1"/>
-          </a:fillRef>
-          <a:effectRef idx="2">
-            <a:schemeClr val="accent1"/>
-          </a:effectRef>
-          <a:fontRef idx="minor">
-            <a:schemeClr val="lt1"/>
-          </a:fontRef>
-        </p:style>
-        <p:txBody>
-          <a:bodyPr wrap="none" lIns="0" tIns="0" rIns="0" bIns="0" rtlCol="0" anchor="ctr"/>
-          <a:lstStyle/>
-          <a:p>
-            <a:pPr algn="ctr"/>
-            <a:r>
-              <a:rPr sz="1100" b="1">
-                <a:solidFill>
-                  <a:srgbClr val="FFFFFF"/>
-                </a:solidFill>
-                <a:latin typeface="Calibri"/>
-              </a:rPr>
-              <a:t>IN PROGRESS</a:t>
+              <a:t>ABC SUNSCREEN GEL SPF50+ 50ML</a:t>
             </a:r>
           </a:p>
         </p:txBody>
@@ -20695,6 +21456,1629 @@
 </file>
 
 <file path=ppt/slides/slide7.xml><?xml version="1.0" encoding="utf-8"?>
+<p:sld xmlns:a="http://schemas.openxmlformats.org/drawingml/2006/main" xmlns:r="http://schemas.openxmlformats.org/officeDocument/2006/relationships" xmlns:p="http://schemas.openxmlformats.org/presentationml/2006/main">
+  <p:cSld>
+    <p:spTree>
+      <p:nvGrpSpPr>
+        <p:cNvPr id="1" name="">
+          <a:extLst>
+            <a:ext uri="{FF2B5EF4-FFF2-40B4-BE49-F238E27FC236}">
+              <a16:creationId xmlns:a16="http://schemas.microsoft.com/office/drawing/2014/main" id="{2E0C377E-D596-207C-ABB1-648DFE5CD840}"/>
+            </a:ext>
+          </a:extLst>
+        </p:cNvPr>
+        <p:cNvGrpSpPr/>
+        <p:nvPr/>
+      </p:nvGrpSpPr>
+      <p:grpSpPr>
+        <a:xfrm>
+          <a:off x="0" y="0"/>
+          <a:ext cx="0" cy="0"/>
+          <a:chOff x="0" y="0"/>
+          <a:chExt cx="0" cy="0"/>
+        </a:xfrm>
+      </p:grpSpPr>
+      <p:sp>
+        <p:nvSpPr>
+          <p:cNvPr id="2" name="Title 1">
+            <a:extLst>
+              <a:ext uri="{FF2B5EF4-FFF2-40B4-BE49-F238E27FC236}">
+                <a16:creationId xmlns:a16="http://schemas.microsoft.com/office/drawing/2014/main" id="{D3AB4E6D-1D83-44F5-B52A-8D9EDD7475D1}"/>
+              </a:ext>
+            </a:extLst>
+          </p:cNvPr>
+          <p:cNvSpPr>
+            <a:spLocks noGrp="1"/>
+          </p:cNvSpPr>
+          <p:nvPr>
+            <p:ph type="title"/>
+          </p:nvPr>
+        </p:nvSpPr>
+        <p:spPr>
+          <a:xfrm>
+            <a:off x="3260034" y="175127"/>
+            <a:ext cx="7189763" cy="1239838"/>
+          </a:xfrm>
+        </p:spPr>
+        <p:txBody>
+          <a:bodyPr/>
+          <a:lstStyle/>
+          <a:p>
+            <a:endParaRPr lang="en-DE" dirty="0">
+              <a:solidFill>
+                <a:schemeClr val="tx1"/>
+              </a:solidFill>
+            </a:endParaRPr>
+            <a:r>
+              <a:rPr lang="en-US">
+                <a:solidFill>
+                  <a:schemeClr val="tx1"/>
+                </a:solidFill>
+              </a:rPr>
+              <a:t>Lập trình</a:t>
+            </a:r>
+          </a:p>
+        </p:txBody>
+      </p:sp>
+      <p:sp>
+        <p:nvSpPr>
+          <p:cNvPr id="3" name="Text Placeholder 2">
+            <a:extLst>
+              <a:ext uri="{FF2B5EF4-FFF2-40B4-BE49-F238E27FC236}">
+                <a16:creationId xmlns:a16="http://schemas.microsoft.com/office/drawing/2014/main" id="{0198C1E5-FE96-B041-F896-386DB29FB6BD}"/>
+              </a:ext>
+            </a:extLst>
+          </p:cNvPr>
+          <p:cNvSpPr>
+            <a:spLocks noGrp="1"/>
+          </p:cNvSpPr>
+          <p:nvPr>
+            <p:ph type="body" sz="quarter" idx="18"/>
+          </p:nvPr>
+        </p:nvSpPr>
+        <p:spPr>
+          <a:xfrm>
+            <a:off x="106005" y="126869"/>
+            <a:ext cx="2755899" cy="1476642"/>
+          </a:xfrm>
+        </p:spPr>
+        <p:txBody>
+          <a:bodyPr/>
+          <a:lstStyle/>
+          <a:p>
+            <a:endParaRPr lang="en-DE" dirty="0"/>
+            <a:r>
+              <a:rPr lang="en-US"/>
+              <a:t>5</a:t>
+            </a:r>
+          </a:p>
+        </p:txBody>
+      </p:sp>
+      <p:sp>
+        <p:nvSpPr>
+          <p:cNvPr id="4" name="Rounded Rectangle 3"/>
+          <p:cNvSpPr/>
+          <p:nvPr/>
+        </p:nvSpPr>
+        <p:spPr>
+          <a:xfrm>
+            <a:off x="777240" y="1828800"/>
+            <a:ext cx="3520440" cy="3977639"/>
+          </a:xfrm>
+          <a:prstGeom prst="roundRect">
+            <a:avLst>
+              <a:gd name="adj" fmla="val 4000"/>
+            </a:avLst>
+          </a:prstGeom>
+          <a:solidFill>
+            <a:srgbClr val="FFFFFF"/>
+          </a:solidFill>
+          <a:ln w="12700">
+            <a:solidFill>
+              <a:srgbClr val="BE0028"/>
+            </a:solidFill>
+          </a:ln>
+          <a:effectLst/>
+        </p:spPr>
+        <p:style>
+          <a:lnRef idx="1">
+            <a:schemeClr val="accent1"/>
+          </a:lnRef>
+          <a:fillRef idx="3">
+            <a:schemeClr val="accent1"/>
+          </a:fillRef>
+          <a:effectRef idx="2">
+            <a:schemeClr val="accent1"/>
+          </a:effectRef>
+          <a:fontRef idx="minor">
+            <a:schemeClr val="lt1"/>
+          </a:fontRef>
+        </p:style>
+        <p:txBody>
+          <a:bodyPr rtlCol="0" anchor="ctr"/>
+          <a:lstStyle/>
+          <a:p/>
+        </p:txBody>
+      </p:sp>
+      <p:sp>
+        <p:nvSpPr>
+          <p:cNvPr id="5" name="Rounded Rectangle 4"/>
+          <p:cNvSpPr/>
+          <p:nvPr/>
+        </p:nvSpPr>
+        <p:spPr>
+          <a:xfrm>
+            <a:off x="777240" y="1828800"/>
+            <a:ext cx="3520440" cy="118872"/>
+          </a:xfrm>
+          <a:prstGeom prst="roundRect">
+            <a:avLst>
+              <a:gd name="adj" fmla="val 50000"/>
+            </a:avLst>
+          </a:prstGeom>
+          <a:solidFill>
+            <a:srgbClr val="BE0028"/>
+          </a:solidFill>
+          <a:ln>
+            <a:noFill/>
+          </a:ln>
+          <a:effectLst/>
+        </p:spPr>
+        <p:style>
+          <a:lnRef idx="1">
+            <a:schemeClr val="accent1"/>
+          </a:lnRef>
+          <a:fillRef idx="3">
+            <a:schemeClr val="accent1"/>
+          </a:fillRef>
+          <a:effectRef idx="2">
+            <a:schemeClr val="accent1"/>
+          </a:effectRef>
+          <a:fontRef idx="minor">
+            <a:schemeClr val="lt1"/>
+          </a:fontRef>
+        </p:style>
+        <p:txBody>
+          <a:bodyPr rtlCol="0" anchor="ctr"/>
+          <a:lstStyle/>
+          <a:p/>
+        </p:txBody>
+      </p:sp>
+      <p:sp>
+        <p:nvSpPr>
+          <p:cNvPr id="6" name="Rounded Rectangle 5"/>
+          <p:cNvSpPr/>
+          <p:nvPr/>
+        </p:nvSpPr>
+        <p:spPr>
+          <a:xfrm>
+            <a:off x="1033271" y="2157984"/>
+            <a:ext cx="1143000" cy="310896"/>
+          </a:xfrm>
+          <a:prstGeom prst="roundRect">
+            <a:avLst>
+              <a:gd name="adj" fmla="val 50000"/>
+            </a:avLst>
+          </a:prstGeom>
+          <a:solidFill>
+            <a:srgbClr val="BE0028"/>
+          </a:solidFill>
+          <a:ln>
+            <a:noFill/>
+          </a:ln>
+          <a:effectLst/>
+        </p:spPr>
+        <p:style>
+          <a:lnRef idx="1">
+            <a:schemeClr val="accent1"/>
+          </a:lnRef>
+          <a:fillRef idx="3">
+            <a:schemeClr val="accent1"/>
+          </a:fillRef>
+          <a:effectRef idx="2">
+            <a:schemeClr val="accent1"/>
+          </a:effectRef>
+          <a:fontRef idx="minor">
+            <a:schemeClr val="lt1"/>
+          </a:fontRef>
+        </p:style>
+        <p:txBody>
+          <a:bodyPr rtlCol="0" anchor="ctr" lIns="0" rIns="0" tIns="0" bIns="0"/>
+          <a:lstStyle/>
+          <a:p>
+            <a:pPr algn="ctr"/>
+            <a:r>
+              <a:rPr sz="1200" b="1">
+                <a:solidFill>
+                  <a:srgbClr val="FFFFFF"/>
+                </a:solidFill>
+                <a:latin typeface="Arial"/>
+              </a:rPr>
+              <a:t>SAP</a:t>
+            </a:r>
+          </a:p>
+        </p:txBody>
+      </p:sp>
+      <p:sp>
+        <p:nvSpPr>
+          <p:cNvPr id="7" name="TextBox 6"/>
+          <p:cNvSpPr txBox="1"/>
+          <p:nvPr/>
+        </p:nvSpPr>
+        <p:spPr>
+          <a:xfrm>
+            <a:off x="1033271" y="2670048"/>
+            <a:ext cx="3017520" cy="512064"/>
+          </a:xfrm>
+          <a:prstGeom prst="rect">
+            <a:avLst/>
+          </a:prstGeom>
+          <a:noFill/>
+        </p:spPr>
+        <p:txBody>
+          <a:bodyPr wrap="square" lIns="0" rIns="0" tIns="0" bIns="0" anchor="t">
+            <a:spAutoFit/>
+          </a:bodyPr>
+          <a:lstStyle/>
+          <a:p>
+            <a:pPr algn="l"/>
+            <a:r>
+              <a:rPr sz="1500" b="1">
+                <a:solidFill>
+                  <a:srgbClr val="1A1A1A"/>
+                </a:solidFill>
+                <a:latin typeface="Arial"/>
+              </a:rPr>
+              <a:t>Billing Output</a:t>
+            </a:r>
+          </a:p>
+        </p:txBody>
+      </p:sp>
+      <p:sp>
+        <p:nvSpPr>
+          <p:cNvPr id="8" name="Rectangle 7"/>
+          <p:cNvSpPr/>
+          <p:nvPr/>
+        </p:nvSpPr>
+        <p:spPr>
+          <a:xfrm>
+            <a:off x="1033271" y="3291840"/>
+            <a:ext cx="3017520" cy="10972"/>
+          </a:xfrm>
+          <a:prstGeom prst="rect">
+            <a:avLst/>
+          </a:prstGeom>
+          <a:solidFill>
+            <a:srgbClr val="E9E9E9"/>
+          </a:solidFill>
+          <a:ln>
+            <a:noFill/>
+          </a:ln>
+          <a:effectLst/>
+        </p:spPr>
+        <p:style>
+          <a:lnRef idx="1">
+            <a:schemeClr val="accent1"/>
+          </a:lnRef>
+          <a:fillRef idx="3">
+            <a:schemeClr val="accent1"/>
+          </a:fillRef>
+          <a:effectRef idx="2">
+            <a:schemeClr val="accent1"/>
+          </a:effectRef>
+          <a:fontRef idx="minor">
+            <a:schemeClr val="lt1"/>
+          </a:fontRef>
+        </p:style>
+        <p:txBody>
+          <a:bodyPr rtlCol="0" anchor="ctr"/>
+          <a:lstStyle/>
+          <a:p/>
+        </p:txBody>
+      </p:sp>
+      <p:sp>
+        <p:nvSpPr>
+          <p:cNvPr id="9" name="Rounded Rectangle 8"/>
+          <p:cNvSpPr/>
+          <p:nvPr/>
+        </p:nvSpPr>
+        <p:spPr>
+          <a:xfrm>
+            <a:off x="1033271" y="3511296"/>
+            <a:ext cx="118872" cy="118872"/>
+          </a:xfrm>
+          <a:prstGeom prst="roundRect">
+            <a:avLst>
+              <a:gd name="adj" fmla="val 50000"/>
+            </a:avLst>
+          </a:prstGeom>
+          <a:solidFill>
+            <a:srgbClr val="BE0028"/>
+          </a:solidFill>
+          <a:ln>
+            <a:noFill/>
+          </a:ln>
+          <a:effectLst/>
+        </p:spPr>
+        <p:style>
+          <a:lnRef idx="1">
+            <a:schemeClr val="accent1"/>
+          </a:lnRef>
+          <a:fillRef idx="3">
+            <a:schemeClr val="accent1"/>
+          </a:fillRef>
+          <a:effectRef idx="2">
+            <a:schemeClr val="accent1"/>
+          </a:effectRef>
+          <a:fontRef idx="minor">
+            <a:schemeClr val="lt1"/>
+          </a:fontRef>
+        </p:style>
+        <p:txBody>
+          <a:bodyPr rtlCol="0" anchor="ctr" lIns="0" rIns="0" tIns="0" bIns="0"/>
+          <a:lstStyle/>
+          <a:p>
+            <a:pPr algn="ctr"/>
+            <a:r>
+              <a:rPr sz="1050" b="1">
+                <a:solidFill>
+                  <a:srgbClr val="FFFFFF"/>
+                </a:solidFill>
+                <a:latin typeface="Arial"/>
+              </a:rPr>
+              <a:t/>
+            </a:r>
+          </a:p>
+        </p:txBody>
+      </p:sp>
+      <p:sp>
+        <p:nvSpPr>
+          <p:cNvPr id="10" name="TextBox 9"/>
+          <p:cNvSpPr txBox="1"/>
+          <p:nvPr/>
+        </p:nvSpPr>
+        <p:spPr>
+          <a:xfrm>
+            <a:off x="1289304" y="3474720"/>
+            <a:ext cx="2761488" cy="566928"/>
+          </a:xfrm>
+          <a:prstGeom prst="rect">
+            <a:avLst/>
+          </a:prstGeom>
+          <a:noFill/>
+        </p:spPr>
+        <p:txBody>
+          <a:bodyPr wrap="square" lIns="0" rIns="0" tIns="0" bIns="0" anchor="t">
+            <a:spAutoFit/>
+          </a:bodyPr>
+          <a:lstStyle/>
+          <a:p>
+            <a:pPr algn="l"/>
+            <a:r>
+              <a:rPr sz="1150" b="0">
+                <a:solidFill>
+                  <a:srgbClr val="1A1A1A"/>
+                </a:solidFill>
+                <a:latin typeface="Arial"/>
+              </a:rPr>
+              <a:t>Ghép Mat. Desc + INSP text</a:t>
+            </a:r>
+          </a:p>
+        </p:txBody>
+      </p:sp>
+      <p:sp>
+        <p:nvSpPr>
+          <p:cNvPr id="11" name="Rounded Rectangle 10"/>
+          <p:cNvSpPr/>
+          <p:nvPr/>
+        </p:nvSpPr>
+        <p:spPr>
+          <a:xfrm>
+            <a:off x="1033271" y="4169663"/>
+            <a:ext cx="118872" cy="118872"/>
+          </a:xfrm>
+          <a:prstGeom prst="roundRect">
+            <a:avLst>
+              <a:gd name="adj" fmla="val 50000"/>
+            </a:avLst>
+          </a:prstGeom>
+          <a:solidFill>
+            <a:srgbClr val="BE0028"/>
+          </a:solidFill>
+          <a:ln>
+            <a:noFill/>
+          </a:ln>
+          <a:effectLst/>
+        </p:spPr>
+        <p:style>
+          <a:lnRef idx="1">
+            <a:schemeClr val="accent1"/>
+          </a:lnRef>
+          <a:fillRef idx="3">
+            <a:schemeClr val="accent1"/>
+          </a:fillRef>
+          <a:effectRef idx="2">
+            <a:schemeClr val="accent1"/>
+          </a:effectRef>
+          <a:fontRef idx="minor">
+            <a:schemeClr val="lt1"/>
+          </a:fontRef>
+        </p:style>
+        <p:txBody>
+          <a:bodyPr rtlCol="0" anchor="ctr" lIns="0" rIns="0" tIns="0" bIns="0"/>
+          <a:lstStyle/>
+          <a:p>
+            <a:pPr algn="ctr"/>
+            <a:r>
+              <a:rPr sz="1050" b="1">
+                <a:solidFill>
+                  <a:srgbClr val="FFFFFF"/>
+                </a:solidFill>
+                <a:latin typeface="Arial"/>
+              </a:rPr>
+              <a:t/>
+            </a:r>
+          </a:p>
+        </p:txBody>
+      </p:sp>
+      <p:sp>
+        <p:nvSpPr>
+          <p:cNvPr id="12" name="TextBox 11"/>
+          <p:cNvSpPr txBox="1"/>
+          <p:nvPr/>
+        </p:nvSpPr>
+        <p:spPr>
+          <a:xfrm>
+            <a:off x="1289304" y="4133087"/>
+            <a:ext cx="2761488" cy="566928"/>
+          </a:xfrm>
+          <a:prstGeom prst="rect">
+            <a:avLst/>
+          </a:prstGeom>
+          <a:noFill/>
+        </p:spPr>
+        <p:txBody>
+          <a:bodyPr wrap="square" lIns="0" rIns="0" tIns="0" bIns="0" anchor="t">
+            <a:spAutoFit/>
+          </a:bodyPr>
+          <a:lstStyle/>
+          <a:p>
+            <a:pPr algn="l"/>
+            <a:r>
+              <a:rPr sz="1150" b="0">
+                <a:solidFill>
+                  <a:srgbClr val="1A1A1A"/>
+                </a:solidFill>
+                <a:latin typeface="Arial"/>
+              </a:rPr>
+              <a:t>Chèn separator "| "</a:t>
+            </a:r>
+          </a:p>
+        </p:txBody>
+      </p:sp>
+      <p:sp>
+        <p:nvSpPr>
+          <p:cNvPr id="13" name="Rounded Rectangle 12"/>
+          <p:cNvSpPr/>
+          <p:nvPr/>
+        </p:nvSpPr>
+        <p:spPr>
+          <a:xfrm>
+            <a:off x="1033271" y="4828031"/>
+            <a:ext cx="118872" cy="118872"/>
+          </a:xfrm>
+          <a:prstGeom prst="roundRect">
+            <a:avLst>
+              <a:gd name="adj" fmla="val 50000"/>
+            </a:avLst>
+          </a:prstGeom>
+          <a:solidFill>
+            <a:srgbClr val="BE0028"/>
+          </a:solidFill>
+          <a:ln>
+            <a:noFill/>
+          </a:ln>
+          <a:effectLst/>
+        </p:spPr>
+        <p:style>
+          <a:lnRef idx="1">
+            <a:schemeClr val="accent1"/>
+          </a:lnRef>
+          <a:fillRef idx="3">
+            <a:schemeClr val="accent1"/>
+          </a:fillRef>
+          <a:effectRef idx="2">
+            <a:schemeClr val="accent1"/>
+          </a:effectRef>
+          <a:fontRef idx="minor">
+            <a:schemeClr val="lt1"/>
+          </a:fontRef>
+        </p:style>
+        <p:txBody>
+          <a:bodyPr rtlCol="0" anchor="ctr" lIns="0" rIns="0" tIns="0" bIns="0"/>
+          <a:lstStyle/>
+          <a:p>
+            <a:pPr algn="ctr"/>
+            <a:r>
+              <a:rPr sz="1050" b="1">
+                <a:solidFill>
+                  <a:srgbClr val="FFFFFF"/>
+                </a:solidFill>
+                <a:latin typeface="Arial"/>
+              </a:rPr>
+              <a:t/>
+            </a:r>
+          </a:p>
+        </p:txBody>
+      </p:sp>
+      <p:sp>
+        <p:nvSpPr>
+          <p:cNvPr id="14" name="TextBox 13"/>
+          <p:cNvSpPr txBox="1"/>
+          <p:nvPr/>
+        </p:nvSpPr>
+        <p:spPr>
+          <a:xfrm>
+            <a:off x="1289304" y="4791455"/>
+            <a:ext cx="2761488" cy="566928"/>
+          </a:xfrm>
+          <a:prstGeom prst="rect">
+            <a:avLst/>
+          </a:prstGeom>
+          <a:noFill/>
+        </p:spPr>
+        <p:txBody>
+          <a:bodyPr wrap="square" lIns="0" rIns="0" tIns="0" bIns="0" anchor="t">
+            <a:spAutoFit/>
+          </a:bodyPr>
+          <a:lstStyle/>
+          <a:p>
+            <a:pPr algn="l"/>
+            <a:r>
+              <a:rPr sz="1150" b="0">
+                <a:solidFill>
+                  <a:srgbClr val="1A1A1A"/>
+                </a:solidFill>
+                <a:latin typeface="Arial"/>
+              </a:rPr>
+              <a:t>Áp thứ tự CMIR › MG0156 › INSP</a:t>
+            </a:r>
+          </a:p>
+        </p:txBody>
+      </p:sp>
+      <p:sp>
+        <p:nvSpPr>
+          <p:cNvPr id="15" name="Rounded Rectangle 14"/>
+          <p:cNvSpPr/>
+          <p:nvPr/>
+        </p:nvSpPr>
+        <p:spPr>
+          <a:xfrm>
+            <a:off x="4581144" y="1828800"/>
+            <a:ext cx="3520440" cy="3977639"/>
+          </a:xfrm>
+          <a:prstGeom prst="roundRect">
+            <a:avLst>
+              <a:gd name="adj" fmla="val 4000"/>
+            </a:avLst>
+          </a:prstGeom>
+          <a:solidFill>
+            <a:srgbClr val="FFFFFF"/>
+          </a:solidFill>
+          <a:ln w="12700">
+            <a:solidFill>
+              <a:srgbClr val="BE0028"/>
+            </a:solidFill>
+          </a:ln>
+          <a:effectLst/>
+        </p:spPr>
+        <p:style>
+          <a:lnRef idx="1">
+            <a:schemeClr val="accent1"/>
+          </a:lnRef>
+          <a:fillRef idx="3">
+            <a:schemeClr val="accent1"/>
+          </a:fillRef>
+          <a:effectRef idx="2">
+            <a:schemeClr val="accent1"/>
+          </a:effectRef>
+          <a:fontRef idx="minor">
+            <a:schemeClr val="lt1"/>
+          </a:fontRef>
+        </p:style>
+        <p:txBody>
+          <a:bodyPr rtlCol="0" anchor="ctr"/>
+          <a:lstStyle/>
+          <a:p/>
+        </p:txBody>
+      </p:sp>
+      <p:sp>
+        <p:nvSpPr>
+          <p:cNvPr id="16" name="Rounded Rectangle 15"/>
+          <p:cNvSpPr/>
+          <p:nvPr/>
+        </p:nvSpPr>
+        <p:spPr>
+          <a:xfrm>
+            <a:off x="4581144" y="1828800"/>
+            <a:ext cx="3520440" cy="118872"/>
+          </a:xfrm>
+          <a:prstGeom prst="roundRect">
+            <a:avLst>
+              <a:gd name="adj" fmla="val 50000"/>
+            </a:avLst>
+          </a:prstGeom>
+          <a:solidFill>
+            <a:srgbClr val="BE0028"/>
+          </a:solidFill>
+          <a:ln>
+            <a:noFill/>
+          </a:ln>
+          <a:effectLst/>
+        </p:spPr>
+        <p:style>
+          <a:lnRef idx="1">
+            <a:schemeClr val="accent1"/>
+          </a:lnRef>
+          <a:fillRef idx="3">
+            <a:schemeClr val="accent1"/>
+          </a:fillRef>
+          <a:effectRef idx="2">
+            <a:schemeClr val="accent1"/>
+          </a:effectRef>
+          <a:fontRef idx="minor">
+            <a:schemeClr val="lt1"/>
+          </a:fontRef>
+        </p:style>
+        <p:txBody>
+          <a:bodyPr rtlCol="0" anchor="ctr"/>
+          <a:lstStyle/>
+          <a:p/>
+        </p:txBody>
+      </p:sp>
+      <p:sp>
+        <p:nvSpPr>
+          <p:cNvPr id="17" name="Rounded Rectangle 16"/>
+          <p:cNvSpPr/>
+          <p:nvPr/>
+        </p:nvSpPr>
+        <p:spPr>
+          <a:xfrm>
+            <a:off x="4837176" y="2157984"/>
+            <a:ext cx="1143000" cy="310896"/>
+          </a:xfrm>
+          <a:prstGeom prst="roundRect">
+            <a:avLst>
+              <a:gd name="adj" fmla="val 50000"/>
+            </a:avLst>
+          </a:prstGeom>
+          <a:solidFill>
+            <a:srgbClr val="BE0028"/>
+          </a:solidFill>
+          <a:ln>
+            <a:noFill/>
+          </a:ln>
+          <a:effectLst/>
+        </p:spPr>
+        <p:style>
+          <a:lnRef idx="1">
+            <a:schemeClr val="accent1"/>
+          </a:lnRef>
+          <a:fillRef idx="3">
+            <a:schemeClr val="accent1"/>
+          </a:fillRef>
+          <a:effectRef idx="2">
+            <a:schemeClr val="accent1"/>
+          </a:effectRef>
+          <a:fontRef idx="minor">
+            <a:schemeClr val="lt1"/>
+          </a:fontRef>
+        </p:style>
+        <p:txBody>
+          <a:bodyPr rtlCol="0" anchor="ctr" lIns="0" rIns="0" tIns="0" bIns="0"/>
+          <a:lstStyle/>
+          <a:p>
+            <a:pPr algn="ctr"/>
+            <a:r>
+              <a:rPr sz="1200" b="1">
+                <a:solidFill>
+                  <a:srgbClr val="FFFFFF"/>
+                </a:solidFill>
+                <a:latin typeface="Arial"/>
+              </a:rPr>
+              <a:t>PP#</a:t>
+            </a:r>
+          </a:p>
+        </p:txBody>
+      </p:sp>
+      <p:sp>
+        <p:nvSpPr>
+          <p:cNvPr id="18" name="TextBox 17"/>
+          <p:cNvSpPr txBox="1"/>
+          <p:nvPr/>
+        </p:nvSpPr>
+        <p:spPr>
+          <a:xfrm>
+            <a:off x="4837176" y="2670048"/>
+            <a:ext cx="3017520" cy="512064"/>
+          </a:xfrm>
+          <a:prstGeom prst="rect">
+            <a:avLst/>
+          </a:prstGeom>
+          <a:noFill/>
+        </p:spPr>
+        <p:txBody>
+          <a:bodyPr wrap="square" lIns="0" rIns="0" tIns="0" bIns="0" anchor="t">
+            <a:spAutoFit/>
+          </a:bodyPr>
+          <a:lstStyle/>
+          <a:p>
+            <a:pPr algn="l"/>
+            <a:r>
+              <a:rPr sz="1500" b="1">
+                <a:solidFill>
+                  <a:srgbClr val="1A1A1A"/>
+                </a:solidFill>
+                <a:latin typeface="Arial"/>
+              </a:rPr>
+              <a:t>Form chứng từ kho</a:t>
+            </a:r>
+          </a:p>
+        </p:txBody>
+      </p:sp>
+      <p:sp>
+        <p:nvSpPr>
+          <p:cNvPr id="19" name="Rectangle 18"/>
+          <p:cNvSpPr/>
+          <p:nvPr/>
+        </p:nvSpPr>
+        <p:spPr>
+          <a:xfrm>
+            <a:off x="4837176" y="3291840"/>
+            <a:ext cx="3017520" cy="10972"/>
+          </a:xfrm>
+          <a:prstGeom prst="rect">
+            <a:avLst/>
+          </a:prstGeom>
+          <a:solidFill>
+            <a:srgbClr val="E9E9E9"/>
+          </a:solidFill>
+          <a:ln>
+            <a:noFill/>
+          </a:ln>
+          <a:effectLst/>
+        </p:spPr>
+        <p:style>
+          <a:lnRef idx="1">
+            <a:schemeClr val="accent1"/>
+          </a:lnRef>
+          <a:fillRef idx="3">
+            <a:schemeClr val="accent1"/>
+          </a:fillRef>
+          <a:effectRef idx="2">
+            <a:schemeClr val="accent1"/>
+          </a:effectRef>
+          <a:fontRef idx="minor">
+            <a:schemeClr val="lt1"/>
+          </a:fontRef>
+        </p:style>
+        <p:txBody>
+          <a:bodyPr rtlCol="0" anchor="ctr"/>
+          <a:lstStyle/>
+          <a:p/>
+        </p:txBody>
+      </p:sp>
+      <p:sp>
+        <p:nvSpPr>
+          <p:cNvPr id="20" name="Rounded Rectangle 19"/>
+          <p:cNvSpPr/>
+          <p:nvPr/>
+        </p:nvSpPr>
+        <p:spPr>
+          <a:xfrm>
+            <a:off x="4837176" y="3511296"/>
+            <a:ext cx="118872" cy="118872"/>
+          </a:xfrm>
+          <a:prstGeom prst="roundRect">
+            <a:avLst>
+              <a:gd name="adj" fmla="val 50000"/>
+            </a:avLst>
+          </a:prstGeom>
+          <a:solidFill>
+            <a:srgbClr val="BE0028"/>
+          </a:solidFill>
+          <a:ln>
+            <a:noFill/>
+          </a:ln>
+          <a:effectLst/>
+        </p:spPr>
+        <p:style>
+          <a:lnRef idx="1">
+            <a:schemeClr val="accent1"/>
+          </a:lnRef>
+          <a:fillRef idx="3">
+            <a:schemeClr val="accent1"/>
+          </a:fillRef>
+          <a:effectRef idx="2">
+            <a:schemeClr val="accent1"/>
+          </a:effectRef>
+          <a:fontRef idx="minor">
+            <a:schemeClr val="lt1"/>
+          </a:fontRef>
+        </p:style>
+        <p:txBody>
+          <a:bodyPr rtlCol="0" anchor="ctr" lIns="0" rIns="0" tIns="0" bIns="0"/>
+          <a:lstStyle/>
+          <a:p>
+            <a:pPr algn="ctr"/>
+            <a:r>
+              <a:rPr sz="1050" b="1">
+                <a:solidFill>
+                  <a:srgbClr val="FFFFFF"/>
+                </a:solidFill>
+                <a:latin typeface="Arial"/>
+              </a:rPr>
+              <a:t/>
+            </a:r>
+          </a:p>
+        </p:txBody>
+      </p:sp>
+      <p:sp>
+        <p:nvSpPr>
+          <p:cNvPr id="21" name="TextBox 20"/>
+          <p:cNvSpPr txBox="1"/>
+          <p:nvPr/>
+        </p:nvSpPr>
+        <p:spPr>
+          <a:xfrm>
+            <a:off x="5093208" y="3474720"/>
+            <a:ext cx="2761488" cy="566928"/>
+          </a:xfrm>
+          <a:prstGeom prst="rect">
+            <a:avLst/>
+          </a:prstGeom>
+          <a:noFill/>
+        </p:spPr>
+        <p:txBody>
+          <a:bodyPr wrap="square" lIns="0" rIns="0" tIns="0" bIns="0" anchor="t">
+            <a:spAutoFit/>
+          </a:bodyPr>
+          <a:lstStyle/>
+          <a:p>
+            <a:pPr algn="l"/>
+            <a:r>
+              <a:rPr sz="1150" b="0">
+                <a:solidFill>
+                  <a:srgbClr val="1A1A1A"/>
+                </a:solidFill>
+                <a:latin typeface="Arial"/>
+              </a:rPr>
+              <a:t>Phiếu Giao Nhận (PGN)</a:t>
+            </a:r>
+          </a:p>
+        </p:txBody>
+      </p:sp>
+      <p:sp>
+        <p:nvSpPr>
+          <p:cNvPr id="22" name="Rounded Rectangle 21"/>
+          <p:cNvSpPr/>
+          <p:nvPr/>
+        </p:nvSpPr>
+        <p:spPr>
+          <a:xfrm>
+            <a:off x="4837176" y="4169663"/>
+            <a:ext cx="118872" cy="118872"/>
+          </a:xfrm>
+          <a:prstGeom prst="roundRect">
+            <a:avLst>
+              <a:gd name="adj" fmla="val 50000"/>
+            </a:avLst>
+          </a:prstGeom>
+          <a:solidFill>
+            <a:srgbClr val="BE0028"/>
+          </a:solidFill>
+          <a:ln>
+            <a:noFill/>
+          </a:ln>
+          <a:effectLst/>
+        </p:spPr>
+        <p:style>
+          <a:lnRef idx="1">
+            <a:schemeClr val="accent1"/>
+          </a:lnRef>
+          <a:fillRef idx="3">
+            <a:schemeClr val="accent1"/>
+          </a:fillRef>
+          <a:effectRef idx="2">
+            <a:schemeClr val="accent1"/>
+          </a:effectRef>
+          <a:fontRef idx="minor">
+            <a:schemeClr val="lt1"/>
+          </a:fontRef>
+        </p:style>
+        <p:txBody>
+          <a:bodyPr rtlCol="0" anchor="ctr" lIns="0" rIns="0" tIns="0" bIns="0"/>
+          <a:lstStyle/>
+          <a:p>
+            <a:pPr algn="ctr"/>
+            <a:r>
+              <a:rPr sz="1050" b="1">
+                <a:solidFill>
+                  <a:srgbClr val="FFFFFF"/>
+                </a:solidFill>
+                <a:latin typeface="Arial"/>
+              </a:rPr>
+              <a:t/>
+            </a:r>
+          </a:p>
+        </p:txBody>
+      </p:sp>
+      <p:sp>
+        <p:nvSpPr>
+          <p:cNvPr id="23" name="TextBox 22"/>
+          <p:cNvSpPr txBox="1"/>
+          <p:nvPr/>
+        </p:nvSpPr>
+        <p:spPr>
+          <a:xfrm>
+            <a:off x="5093208" y="4133087"/>
+            <a:ext cx="2761488" cy="566928"/>
+          </a:xfrm>
+          <a:prstGeom prst="rect">
+            <a:avLst/>
+          </a:prstGeom>
+          <a:noFill/>
+        </p:spPr>
+        <p:txBody>
+          <a:bodyPr wrap="square" lIns="0" rIns="0" tIns="0" bIns="0" anchor="t">
+            <a:spAutoFit/>
+          </a:bodyPr>
+          <a:lstStyle/>
+          <a:p>
+            <a:pPr algn="l"/>
+            <a:r>
+              <a:rPr sz="1150" b="0">
+                <a:solidFill>
+                  <a:srgbClr val="1A1A1A"/>
+                </a:solidFill>
+                <a:latin typeface="Arial"/>
+              </a:rPr>
+              <a:t>Phiếu Xuất Kho Đại Lý (PXKDL)</a:t>
+            </a:r>
+          </a:p>
+        </p:txBody>
+      </p:sp>
+      <p:sp>
+        <p:nvSpPr>
+          <p:cNvPr id="24" name="Rounded Rectangle 23"/>
+          <p:cNvSpPr/>
+          <p:nvPr/>
+        </p:nvSpPr>
+        <p:spPr>
+          <a:xfrm>
+            <a:off x="4837176" y="4828031"/>
+            <a:ext cx="118872" cy="118872"/>
+          </a:xfrm>
+          <a:prstGeom prst="roundRect">
+            <a:avLst>
+              <a:gd name="adj" fmla="val 50000"/>
+            </a:avLst>
+          </a:prstGeom>
+          <a:solidFill>
+            <a:srgbClr val="BE0028"/>
+          </a:solidFill>
+          <a:ln>
+            <a:noFill/>
+          </a:ln>
+          <a:effectLst/>
+        </p:spPr>
+        <p:style>
+          <a:lnRef idx="1">
+            <a:schemeClr val="accent1"/>
+          </a:lnRef>
+          <a:fillRef idx="3">
+            <a:schemeClr val="accent1"/>
+          </a:fillRef>
+          <a:effectRef idx="2">
+            <a:schemeClr val="accent1"/>
+          </a:effectRef>
+          <a:fontRef idx="minor">
+            <a:schemeClr val="lt1"/>
+          </a:fontRef>
+        </p:style>
+        <p:txBody>
+          <a:bodyPr rtlCol="0" anchor="ctr" lIns="0" rIns="0" tIns="0" bIns="0"/>
+          <a:lstStyle/>
+          <a:p>
+            <a:pPr algn="ctr"/>
+            <a:r>
+              <a:rPr sz="1050" b="1">
+                <a:solidFill>
+                  <a:srgbClr val="FFFFFF"/>
+                </a:solidFill>
+                <a:latin typeface="Arial"/>
+              </a:rPr>
+              <a:t/>
+            </a:r>
+          </a:p>
+        </p:txBody>
+      </p:sp>
+      <p:sp>
+        <p:nvSpPr>
+          <p:cNvPr id="25" name="TextBox 24"/>
+          <p:cNvSpPr txBox="1"/>
+          <p:nvPr/>
+        </p:nvSpPr>
+        <p:spPr>
+          <a:xfrm>
+            <a:off x="5093208" y="4791455"/>
+            <a:ext cx="2761488" cy="566928"/>
+          </a:xfrm>
+          <a:prstGeom prst="rect">
+            <a:avLst/>
+          </a:prstGeom>
+          <a:noFill/>
+        </p:spPr>
+        <p:txBody>
+          <a:bodyPr wrap="square" lIns="0" rIns="0" tIns="0" bIns="0" anchor="t">
+            <a:spAutoFit/>
+          </a:bodyPr>
+          <a:lstStyle/>
+          <a:p>
+            <a:pPr algn="l"/>
+            <a:r>
+              <a:rPr sz="1150" b="0">
+                <a:solidFill>
+                  <a:srgbClr val="1A1A1A"/>
+                </a:solidFill>
+                <a:latin typeface="Arial"/>
+              </a:rPr>
+              <a:t>Phiếu Xuất Kho Nội Bộ (PXKNB)</a:t>
+            </a:r>
+          </a:p>
+        </p:txBody>
+      </p:sp>
+      <p:sp>
+        <p:nvSpPr>
+          <p:cNvPr id="26" name="Rounded Rectangle 25"/>
+          <p:cNvSpPr/>
+          <p:nvPr/>
+        </p:nvSpPr>
+        <p:spPr>
+          <a:xfrm>
+            <a:off x="8385048" y="1828800"/>
+            <a:ext cx="3520440" cy="3977639"/>
+          </a:xfrm>
+          <a:prstGeom prst="roundRect">
+            <a:avLst>
+              <a:gd name="adj" fmla="val 4000"/>
+            </a:avLst>
+          </a:prstGeom>
+          <a:solidFill>
+            <a:srgbClr val="FFFFFF"/>
+          </a:solidFill>
+          <a:ln w="12700">
+            <a:solidFill>
+              <a:srgbClr val="BE0028"/>
+            </a:solidFill>
+          </a:ln>
+          <a:effectLst/>
+        </p:spPr>
+        <p:style>
+          <a:lnRef idx="1">
+            <a:schemeClr val="accent1"/>
+          </a:lnRef>
+          <a:fillRef idx="3">
+            <a:schemeClr val="accent1"/>
+          </a:fillRef>
+          <a:effectRef idx="2">
+            <a:schemeClr val="accent1"/>
+          </a:effectRef>
+          <a:fontRef idx="minor">
+            <a:schemeClr val="lt1"/>
+          </a:fontRef>
+        </p:style>
+        <p:txBody>
+          <a:bodyPr rtlCol="0" anchor="ctr"/>
+          <a:lstStyle/>
+          <a:p/>
+        </p:txBody>
+      </p:sp>
+      <p:sp>
+        <p:nvSpPr>
+          <p:cNvPr id="27" name="Rounded Rectangle 26"/>
+          <p:cNvSpPr/>
+          <p:nvPr/>
+        </p:nvSpPr>
+        <p:spPr>
+          <a:xfrm>
+            <a:off x="8385048" y="1828800"/>
+            <a:ext cx="3520440" cy="118872"/>
+          </a:xfrm>
+          <a:prstGeom prst="roundRect">
+            <a:avLst>
+              <a:gd name="adj" fmla="val 50000"/>
+            </a:avLst>
+          </a:prstGeom>
+          <a:solidFill>
+            <a:srgbClr val="6B6B6B"/>
+          </a:solidFill>
+          <a:ln>
+            <a:noFill/>
+          </a:ln>
+          <a:effectLst/>
+        </p:spPr>
+        <p:style>
+          <a:lnRef idx="1">
+            <a:schemeClr val="accent1"/>
+          </a:lnRef>
+          <a:fillRef idx="3">
+            <a:schemeClr val="accent1"/>
+          </a:fillRef>
+          <a:effectRef idx="2">
+            <a:schemeClr val="accent1"/>
+          </a:effectRef>
+          <a:fontRef idx="minor">
+            <a:schemeClr val="lt1"/>
+          </a:fontRef>
+        </p:style>
+        <p:txBody>
+          <a:bodyPr rtlCol="0" anchor="ctr"/>
+          <a:lstStyle/>
+          <a:p/>
+        </p:txBody>
+      </p:sp>
+      <p:sp>
+        <p:nvSpPr>
+          <p:cNvPr id="28" name="Rounded Rectangle 27"/>
+          <p:cNvSpPr/>
+          <p:nvPr/>
+        </p:nvSpPr>
+        <p:spPr>
+          <a:xfrm>
+            <a:off x="8641080" y="2157984"/>
+            <a:ext cx="1143000" cy="310896"/>
+          </a:xfrm>
+          <a:prstGeom prst="roundRect">
+            <a:avLst>
+              <a:gd name="adj" fmla="val 50000"/>
+            </a:avLst>
+          </a:prstGeom>
+          <a:solidFill>
+            <a:srgbClr val="6B6B6B"/>
+          </a:solidFill>
+          <a:ln>
+            <a:noFill/>
+          </a:ln>
+          <a:effectLst/>
+        </p:spPr>
+        <p:style>
+          <a:lnRef idx="1">
+            <a:schemeClr val="accent1"/>
+          </a:lnRef>
+          <a:fillRef idx="3">
+            <a:schemeClr val="accent1"/>
+          </a:fillRef>
+          <a:effectRef idx="2">
+            <a:schemeClr val="accent1"/>
+          </a:effectRef>
+          <a:fontRef idx="minor">
+            <a:schemeClr val="lt1"/>
+          </a:fontRef>
+        </p:style>
+        <p:txBody>
+          <a:bodyPr rtlCol="0" anchor="ctr" lIns="0" rIns="0" tIns="0" bIns="0"/>
+          <a:lstStyle/>
+          <a:p>
+            <a:pPr algn="ctr"/>
+            <a:r>
+              <a:rPr sz="1200" b="1">
+                <a:solidFill>
+                  <a:srgbClr val="FFFFFF"/>
+                </a:solidFill>
+                <a:latin typeface="Arial"/>
+              </a:rPr>
+              <a:t>VNPT</a:t>
+            </a:r>
+          </a:p>
+        </p:txBody>
+      </p:sp>
+      <p:sp>
+        <p:nvSpPr>
+          <p:cNvPr id="29" name="TextBox 28"/>
+          <p:cNvSpPr txBox="1"/>
+          <p:nvPr/>
+        </p:nvSpPr>
+        <p:spPr>
+          <a:xfrm>
+            <a:off x="8641080" y="2670048"/>
+            <a:ext cx="3017520" cy="512064"/>
+          </a:xfrm>
+          <a:prstGeom prst="rect">
+            <a:avLst/>
+          </a:prstGeom>
+          <a:noFill/>
+        </p:spPr>
+        <p:txBody>
+          <a:bodyPr wrap="square" lIns="0" rIns="0" tIns="0" bIns="0" anchor="t">
+            <a:spAutoFit/>
+          </a:bodyPr>
+          <a:lstStyle/>
+          <a:p>
+            <a:pPr algn="l"/>
+            <a:r>
+              <a:rPr sz="1500" b="1">
+                <a:solidFill>
+                  <a:srgbClr val="1A1A1A"/>
+                </a:solidFill>
+                <a:latin typeface="Arial"/>
+              </a:rPr>
+              <a:t>Hóa đơn điện tử EIV</a:t>
+            </a:r>
+          </a:p>
+        </p:txBody>
+      </p:sp>
+      <p:sp>
+        <p:nvSpPr>
+          <p:cNvPr id="30" name="Rectangle 29"/>
+          <p:cNvSpPr/>
+          <p:nvPr/>
+        </p:nvSpPr>
+        <p:spPr>
+          <a:xfrm>
+            <a:off x="8641080" y="3291840"/>
+            <a:ext cx="3017520" cy="10972"/>
+          </a:xfrm>
+          <a:prstGeom prst="rect">
+            <a:avLst/>
+          </a:prstGeom>
+          <a:solidFill>
+            <a:srgbClr val="E9E9E9"/>
+          </a:solidFill>
+          <a:ln>
+            <a:noFill/>
+          </a:ln>
+          <a:effectLst/>
+        </p:spPr>
+        <p:style>
+          <a:lnRef idx="1">
+            <a:schemeClr val="accent1"/>
+          </a:lnRef>
+          <a:fillRef idx="3">
+            <a:schemeClr val="accent1"/>
+          </a:fillRef>
+          <a:effectRef idx="2">
+            <a:schemeClr val="accent1"/>
+          </a:effectRef>
+          <a:fontRef idx="minor">
+            <a:schemeClr val="lt1"/>
+          </a:fontRef>
+        </p:style>
+        <p:txBody>
+          <a:bodyPr rtlCol="0" anchor="ctr"/>
+          <a:lstStyle/>
+          <a:p/>
+        </p:txBody>
+      </p:sp>
+      <p:sp>
+        <p:nvSpPr>
+          <p:cNvPr id="31" name="Rounded Rectangle 30"/>
+          <p:cNvSpPr/>
+          <p:nvPr/>
+        </p:nvSpPr>
+        <p:spPr>
+          <a:xfrm>
+            <a:off x="8641080" y="3511296"/>
+            <a:ext cx="118872" cy="118872"/>
+          </a:xfrm>
+          <a:prstGeom prst="roundRect">
+            <a:avLst>
+              <a:gd name="adj" fmla="val 50000"/>
+            </a:avLst>
+          </a:prstGeom>
+          <a:solidFill>
+            <a:srgbClr val="6B6B6B"/>
+          </a:solidFill>
+          <a:ln>
+            <a:noFill/>
+          </a:ln>
+          <a:effectLst/>
+        </p:spPr>
+        <p:style>
+          <a:lnRef idx="1">
+            <a:schemeClr val="accent1"/>
+          </a:lnRef>
+          <a:fillRef idx="3">
+            <a:schemeClr val="accent1"/>
+          </a:fillRef>
+          <a:effectRef idx="2">
+            <a:schemeClr val="accent1"/>
+          </a:effectRef>
+          <a:fontRef idx="minor">
+            <a:schemeClr val="lt1"/>
+          </a:fontRef>
+        </p:style>
+        <p:txBody>
+          <a:bodyPr rtlCol="0" anchor="ctr" lIns="0" rIns="0" tIns="0" bIns="0"/>
+          <a:lstStyle/>
+          <a:p>
+            <a:pPr algn="ctr"/>
+            <a:r>
+              <a:rPr sz="1050" b="1">
+                <a:solidFill>
+                  <a:srgbClr val="FFFFFF"/>
+                </a:solidFill>
+                <a:latin typeface="Arial"/>
+              </a:rPr>
+              <a:t/>
+            </a:r>
+          </a:p>
+        </p:txBody>
+      </p:sp>
+      <p:sp>
+        <p:nvSpPr>
+          <p:cNvPr id="32" name="TextBox 31"/>
+          <p:cNvSpPr txBox="1"/>
+          <p:nvPr/>
+        </p:nvSpPr>
+        <p:spPr>
+          <a:xfrm>
+            <a:off x="8897112" y="3474720"/>
+            <a:ext cx="2761488" cy="566928"/>
+          </a:xfrm>
+          <a:prstGeom prst="rect">
+            <a:avLst/>
+          </a:prstGeom>
+          <a:noFill/>
+        </p:spPr>
+        <p:txBody>
+          <a:bodyPr wrap="square" lIns="0" rIns="0" tIns="0" bIns="0" anchor="t">
+            <a:spAutoFit/>
+          </a:bodyPr>
+          <a:lstStyle/>
+          <a:p>
+            <a:pPr algn="l"/>
+            <a:r>
+              <a:rPr sz="1150" b="0">
+                <a:solidFill>
+                  <a:srgbClr val="1A1A1A"/>
+                </a:solidFill>
+                <a:latin typeface="Arial"/>
+              </a:rPr>
+              <a:t>Nhận biết separator "| "</a:t>
+            </a:r>
+          </a:p>
+        </p:txBody>
+      </p:sp>
+      <p:sp>
+        <p:nvSpPr>
+          <p:cNvPr id="33" name="Rounded Rectangle 32"/>
+          <p:cNvSpPr/>
+          <p:nvPr/>
+        </p:nvSpPr>
+        <p:spPr>
+          <a:xfrm>
+            <a:off x="8641080" y="4169663"/>
+            <a:ext cx="118872" cy="118872"/>
+          </a:xfrm>
+          <a:prstGeom prst="roundRect">
+            <a:avLst>
+              <a:gd name="adj" fmla="val 50000"/>
+            </a:avLst>
+          </a:prstGeom>
+          <a:solidFill>
+            <a:srgbClr val="6B6B6B"/>
+          </a:solidFill>
+          <a:ln>
+            <a:noFill/>
+          </a:ln>
+          <a:effectLst/>
+        </p:spPr>
+        <p:style>
+          <a:lnRef idx="1">
+            <a:schemeClr val="accent1"/>
+          </a:lnRef>
+          <a:fillRef idx="3">
+            <a:schemeClr val="accent1"/>
+          </a:fillRef>
+          <a:effectRef idx="2">
+            <a:schemeClr val="accent1"/>
+          </a:effectRef>
+          <a:fontRef idx="minor">
+            <a:schemeClr val="lt1"/>
+          </a:fontRef>
+        </p:style>
+        <p:txBody>
+          <a:bodyPr rtlCol="0" anchor="ctr" lIns="0" rIns="0" tIns="0" bIns="0"/>
+          <a:lstStyle/>
+          <a:p>
+            <a:pPr algn="ctr"/>
+            <a:r>
+              <a:rPr sz="1050" b="1">
+                <a:solidFill>
+                  <a:srgbClr val="FFFFFF"/>
+                </a:solidFill>
+                <a:latin typeface="Arial"/>
+              </a:rPr>
+              <a:t/>
+            </a:r>
+          </a:p>
+        </p:txBody>
+      </p:sp>
+      <p:sp>
+        <p:nvSpPr>
+          <p:cNvPr id="34" name="TextBox 33"/>
+          <p:cNvSpPr txBox="1"/>
+          <p:nvPr/>
+        </p:nvSpPr>
+        <p:spPr>
+          <a:xfrm>
+            <a:off x="8897112" y="4133087"/>
+            <a:ext cx="2761488" cy="566928"/>
+          </a:xfrm>
+          <a:prstGeom prst="rect">
+            <a:avLst/>
+          </a:prstGeom>
+          <a:noFill/>
+        </p:spPr>
+        <p:txBody>
+          <a:bodyPr wrap="square" lIns="0" rIns="0" tIns="0" bIns="0" anchor="t">
+            <a:spAutoFit/>
+          </a:bodyPr>
+          <a:lstStyle/>
+          <a:p>
+            <a:pPr algn="l"/>
+            <a:r>
+              <a:rPr sz="1150" b="0">
+                <a:solidFill>
+                  <a:srgbClr val="1A1A1A"/>
+                </a:solidFill>
+                <a:latin typeface="Arial"/>
+              </a:rPr>
+              <a:t>Tách thành 2 dòng</a:t>
+            </a:r>
+          </a:p>
+        </p:txBody>
+      </p:sp>
+      <p:sp>
+        <p:nvSpPr>
+          <p:cNvPr id="35" name="Rounded Rectangle 34"/>
+          <p:cNvSpPr/>
+          <p:nvPr/>
+        </p:nvSpPr>
+        <p:spPr>
+          <a:xfrm>
+            <a:off x="8641080" y="4828031"/>
+            <a:ext cx="118872" cy="118872"/>
+          </a:xfrm>
+          <a:prstGeom prst="roundRect">
+            <a:avLst>
+              <a:gd name="adj" fmla="val 50000"/>
+            </a:avLst>
+          </a:prstGeom>
+          <a:solidFill>
+            <a:srgbClr val="6B6B6B"/>
+          </a:solidFill>
+          <a:ln>
+            <a:noFill/>
+          </a:ln>
+          <a:effectLst/>
+        </p:spPr>
+        <p:style>
+          <a:lnRef idx="1">
+            <a:schemeClr val="accent1"/>
+          </a:lnRef>
+          <a:fillRef idx="3">
+            <a:schemeClr val="accent1"/>
+          </a:fillRef>
+          <a:effectRef idx="2">
+            <a:schemeClr val="accent1"/>
+          </a:effectRef>
+          <a:fontRef idx="minor">
+            <a:schemeClr val="lt1"/>
+          </a:fontRef>
+        </p:style>
+        <p:txBody>
+          <a:bodyPr rtlCol="0" anchor="ctr" lIns="0" rIns="0" tIns="0" bIns="0"/>
+          <a:lstStyle/>
+          <a:p>
+            <a:pPr algn="ctr"/>
+            <a:r>
+              <a:rPr sz="1050" b="1">
+                <a:solidFill>
+                  <a:srgbClr val="FFFFFF"/>
+                </a:solidFill>
+                <a:latin typeface="Arial"/>
+              </a:rPr>
+              <a:t/>
+            </a:r>
+          </a:p>
+        </p:txBody>
+      </p:sp>
+      <p:sp>
+        <p:nvSpPr>
+          <p:cNvPr id="36" name="TextBox 35"/>
+          <p:cNvSpPr txBox="1"/>
+          <p:nvPr/>
+        </p:nvSpPr>
+        <p:spPr>
+          <a:xfrm>
+            <a:off x="8897112" y="4791455"/>
+            <a:ext cx="2761488" cy="566928"/>
+          </a:xfrm>
+          <a:prstGeom prst="rect">
+            <a:avLst/>
+          </a:prstGeom>
+          <a:noFill/>
+        </p:spPr>
+        <p:txBody>
+          <a:bodyPr wrap="square" lIns="0" rIns="0" tIns="0" bIns="0" anchor="t">
+            <a:spAutoFit/>
+          </a:bodyPr>
+          <a:lstStyle/>
+          <a:p>
+            <a:pPr algn="l"/>
+            <a:r>
+              <a:rPr sz="1150" b="0">
+                <a:solidFill>
+                  <a:srgbClr val="1A1A1A"/>
+                </a:solidFill>
+                <a:latin typeface="Arial"/>
+              </a:rPr>
+              <a:t>Tiếng Anh cỡ chữ nhỏ hơn</a:t>
+            </a:r>
+          </a:p>
+        </p:txBody>
+      </p:sp>
+      <p:sp>
+        <p:nvSpPr>
+          <p:cNvPr id="37" name="TextBox 36"/>
+          <p:cNvSpPr txBox="1"/>
+          <p:nvPr/>
+        </p:nvSpPr>
+        <p:spPr>
+          <a:xfrm>
+            <a:off x="777240" y="6035040"/>
+            <a:ext cx="10835640" cy="274320"/>
+          </a:xfrm>
+          <a:prstGeom prst="rect">
+            <a:avLst/>
+          </a:prstGeom>
+          <a:noFill/>
+        </p:spPr>
+        <p:txBody>
+          <a:bodyPr wrap="square" lIns="0" rIns="0" tIns="0" bIns="0" anchor="t">
+            <a:spAutoFit/>
+          </a:bodyPr>
+          <a:lstStyle/>
+          <a:p>
+            <a:pPr algn="l"/>
+            <a:r>
+              <a:rPr sz="1150" b="0">
+                <a:solidFill>
+                  <a:srgbClr val="6B6B6B"/>
+                </a:solidFill>
+                <a:latin typeface="Arial"/>
+              </a:rPr>
+              <a:t>Ba nhánh chạy song song — master data setup xong trước khi go-live.</a:t>
+            </a:r>
+          </a:p>
+        </p:txBody>
+      </p:sp>
+    </p:spTree>
+    <p:extLst>
+      <p:ext uri="{BB962C8B-B14F-4D97-AF65-F5344CB8AC3E}">
+        <p14:creationId xmlns:p14="http://schemas.microsoft.com/office/powerpoint/2010/main" val="617875088"/>
+      </p:ext>
+    </p:extLst>
+  </p:cSld>
+  <p:clrMapOvr>
+    <a:masterClrMapping/>
+  </p:clrMapOvr>
+</p:sld>
+</file>
+
+<file path=ppt/slides/slide8.xml><?xml version="1.0" encoding="utf-8"?>
 <p:sld xmlns:a="http://schemas.openxmlformats.org/drawingml/2006/main" xmlns:r="http://schemas.openxmlformats.org/officeDocument/2006/relationships" xmlns:p="http://schemas.openxmlformats.org/presentationml/2006/main">
   <p:cSld>
     <p:spTree>
@@ -20747,7 +23131,7 @@
           <a:p>
             <a:r>
               <a:rPr lang="en-US"/>
-              <a:t>Tóm lại – Summary</a:t>
+              <a:t>Tóm lại</a:t>
             </a:r>
           </a:p>
         </p:txBody>
@@ -20880,7 +23264,7 @@
                     <a:p>
                       <a:r>
                         <a:rPr lang="en-US" sz="2000"/>
-                        <a:t>Item</a:t>
+                        <a:t>Nội dung</a:t>
                       </a:r>
                     </a:p>
                   </a:txBody>
@@ -20893,7 +23277,7 @@
                     <a:p>
                       <a:r>
                         <a:rPr lang="en-US" sz="2000"/>
-                        <a:t>Owner</a:t>
+                        <a:t>Ai làm</a:t>
                       </a:r>
                     </a:p>
                   </a:txBody>
@@ -20906,7 +23290,7 @@
                     <a:p>
                       <a:r>
                         <a:rPr lang="en-US" sz="2000"/>
-                        <a:t>Mode</a:t>
+                        <a:t>Trạng thái</a:t>
                       </a:r>
                     </a:p>
                   </a:txBody>
@@ -20939,7 +23323,7 @@
                     <a:p>
                       <a:r>
                         <a:rPr lang="en-US" sz="1800"/>
-                        <a:t>Scope: all BU nationwide</a:t>
+                        <a:t>Phạm vi: all BU nationwide</a:t>
                       </a:r>
                     </a:p>
                   </a:txBody>
@@ -20969,7 +23353,7 @@
                             <a:srgbClr val="BE0028"/>
                           </a:solidFill>
                         </a:rPr>
-                        <a:t>Confirmed</a:t>
+                        <a:t>Đã chốt</a:t>
                       </a:r>
                     </a:p>
                   </a:txBody>
@@ -21065,7 +23449,7 @@
                     <a:p>
                       <a:r>
                         <a:rPr lang="en-US" sz="1800"/>
-                        <a:t>Priority: CMIR › MG0156 › INSP</a:t>
+                        <a:t>Ưu tiên: CMIR › MG0156 › INSP</a:t>
                       </a:r>
                     </a:p>
                   </a:txBody>
@@ -21095,7 +23479,7 @@
                             <a:srgbClr val="BE0028"/>
                           </a:solidFill>
                         </a:rPr>
-                        <a:t>Develop</a:t>
+                        <a:t>Lập trình</a:t>
                       </a:r>
                     </a:p>
                   </a:txBody>
@@ -21128,7 +23512,7 @@
                     <a:p>
                       <a:r>
                         <a:rPr lang="en-US" sz="1800"/>
-                        <a:t>Dentsply: remove CMIR records first</a:t>
+                        <a:t>Dentsply: xóa hết record CMIR trước</a:t>
                       </a:r>
                     </a:p>
                   </a:txBody>
@@ -21158,7 +23542,7 @@
                             <a:srgbClr val="6B6B6B"/>
                           </a:solidFill>
                         </a:rPr>
-                        <a:t>Action</a:t>
+                        <a:t>Lưu ý</a:t>
                       </a:r>
                     </a:p>
                   </a:txBody>
@@ -21211,7 +23595,7 @@
 </p:sld>
 </file>
 
-<file path=ppt/slides/slide8.xml><?xml version="1.0" encoding="utf-8"?>
+<file path=ppt/slides/slide9.xml><?xml version="1.0" encoding="utf-8"?>
 <p:sld xmlns:a="http://schemas.openxmlformats.org/drawingml/2006/main" xmlns:r="http://schemas.openxmlformats.org/officeDocument/2006/relationships" xmlns:p="http://schemas.openxmlformats.org/presentationml/2006/main">
   <p:cSld>
     <p:spTree>

--- a/slide/LPNVi_LONG_PRODUCTION_NAME_VIETNAMESE.pptx
+++ b/slide/LPNVi_LONG_PRODUCTION_NAME_VIETNAMESE.pptx
@@ -15348,19 +15348,19 @@
           <a:bodyPr/>
           <a:lstStyle/>
           <a:p>
+            <a:r>
+              <a:rPr lang="en-US" dirty="0">
+                <a:solidFill>
+                  <a:schemeClr val="tx1"/>
+                </a:solidFill>
+              </a:rPr>
+              <a:t>Tổng quan giải pháp</a:t>
+            </a:r>
             <a:endParaRPr lang="en-DE" dirty="0">
               <a:solidFill>
                 <a:schemeClr val="tx1"/>
               </a:solidFill>
             </a:endParaRPr>
-            <a:r>
-              <a:rPr lang="en-US" dirty="0">
-                <a:solidFill>
-                  <a:schemeClr val="tx1"/>
-                </a:solidFill>
-              </a:rPr>
-              <a:t>Tổng quan giải pháp</a:t>
-            </a:r>
           </a:p>
         </p:txBody>
       </p:sp>
@@ -16690,21 +16690,21 @@
           <a:lstStyle/>
           <a:p>
             <a:pPr algn="ctr"/>
+            <a:r>
+              <a:rPr lang="en-US" sz="1050" i="1" dirty="0">
+                <a:solidFill>
+                  <a:srgbClr val="6B6B6B"/>
+                </a:solidFill>
+                <a:latin typeface="Calibri"/>
+              </a:rPr>
+              <a:t>Tách separator "| "</a:t>
+            </a:r>
             <a:endParaRPr sz="1050" i="1" dirty="0">
               <a:solidFill>
                 <a:srgbClr val="6B6B6B"/>
               </a:solidFill>
               <a:latin typeface="Calibri"/>
             </a:endParaRPr>
-            <a:r>
-              <a:rPr lang="en-US" sz="1050" i="1" dirty="0">
-                <a:solidFill>
-                  <a:srgbClr val="6B6B6B"/>
-                </a:solidFill>
-                <a:latin typeface="Calibri"/>
-              </a:rPr>
-              <a:t>Tách separator "| "</a:t>
-            </a:r>
           </a:p>
         </p:txBody>
       </p:sp>
@@ -16908,19 +16908,19 @@
           <a:bodyPr/>
           <a:lstStyle/>
           <a:p>
+            <a:r>
+              <a:rPr lang="en-US">
+                <a:solidFill>
+                  <a:schemeClr val="tx1"/>
+                </a:solidFill>
+              </a:rPr>
+              <a:t>Hiện trạng</a:t>
+            </a:r>
             <a:endParaRPr lang="en-DE" dirty="0">
               <a:solidFill>
                 <a:schemeClr val="tx1"/>
               </a:solidFill>
             </a:endParaRPr>
-            <a:r>
-              <a:rPr lang="en-US">
-                <a:solidFill>
-                  <a:schemeClr val="tx1"/>
-                </a:solidFill>
-              </a:rPr>
-              <a:t>Hiện trạng</a:t>
-            </a:r>
           </a:p>
         </p:txBody>
       </p:sp>
@@ -16950,11 +16950,11 @@
           <a:bodyPr/>
           <a:lstStyle/>
           <a:p>
+            <a:r>
+              <a:rPr lang="en-US"/>
+              <a:t>1</a:t>
+            </a:r>
             <a:endParaRPr lang="en-DE" dirty="0"/>
-            <a:r>
-              <a:rPr lang="en-US"/>
-              <a:t>1</a:t>
-            </a:r>
           </a:p>
         </p:txBody>
       </p:sp>
@@ -17941,19 +17941,19 @@
           <a:bodyPr/>
           <a:lstStyle/>
           <a:p>
+            <a:r>
+              <a:rPr lang="en-US">
+                <a:solidFill>
+                  <a:schemeClr val="tx1"/>
+                </a:solidFill>
+              </a:rPr>
+              <a:t>Yêu cầu</a:t>
+            </a:r>
             <a:endParaRPr lang="en-DE" dirty="0">
               <a:solidFill>
                 <a:schemeClr val="tx1"/>
               </a:solidFill>
             </a:endParaRPr>
-            <a:r>
-              <a:rPr lang="en-US">
-                <a:solidFill>
-                  <a:schemeClr val="tx1"/>
-                </a:solidFill>
-              </a:rPr>
-              <a:t>Yêu cầu</a:t>
-            </a:r>
           </a:p>
         </p:txBody>
       </p:sp>
@@ -17983,11 +17983,11 @@
           <a:bodyPr/>
           <a:lstStyle/>
           <a:p>
+            <a:r>
+              <a:rPr lang="en-US"/>
+              <a:t>2</a:t>
+            </a:r>
             <a:endParaRPr lang="en-DE" dirty="0"/>
-            <a:r>
-              <a:rPr lang="en-US"/>
-              <a:t>2</a:t>
-            </a:r>
           </a:p>
         </p:txBody>
       </p:sp>
@@ -19104,19 +19104,19 @@
           <a:bodyPr/>
           <a:lstStyle/>
           <a:p>
+            <a:r>
+              <a:rPr lang="en-US">
+                <a:solidFill>
+                  <a:schemeClr val="tx1"/>
+                </a:solidFill>
+              </a:rPr>
+              <a:t>Giải pháp</a:t>
+            </a:r>
             <a:endParaRPr lang="en-DE" dirty="0">
               <a:solidFill>
                 <a:schemeClr val="tx1"/>
               </a:solidFill>
             </a:endParaRPr>
-            <a:r>
-              <a:rPr lang="en-US">
-                <a:solidFill>
-                  <a:schemeClr val="tx1"/>
-                </a:solidFill>
-              </a:rPr>
-              <a:t>Giải pháp</a:t>
-            </a:r>
           </a:p>
         </p:txBody>
       </p:sp>
@@ -19146,11 +19146,11 @@
           <a:bodyPr/>
           <a:lstStyle/>
           <a:p>
+            <a:r>
+              <a:rPr lang="en-US"/>
+              <a:t>3</a:t>
+            </a:r>
             <a:endParaRPr lang="en-DE" dirty="0"/>
-            <a:r>
-              <a:rPr lang="en-US"/>
-              <a:t>3</a:t>
-            </a:r>
           </a:p>
         </p:txBody>
       </p:sp>
@@ -20585,19 +20585,19 @@
           <a:bodyPr/>
           <a:lstStyle/>
           <a:p>
+            <a:r>
+              <a:rPr lang="en-US">
+                <a:solidFill>
+                  <a:schemeClr val="tx1"/>
+                </a:solidFill>
+              </a:rPr>
+              <a:t>Ví dụ thực tế</a:t>
+            </a:r>
             <a:endParaRPr lang="en-DE" dirty="0">
               <a:solidFill>
                 <a:schemeClr val="tx1"/>
               </a:solidFill>
             </a:endParaRPr>
-            <a:r>
-              <a:rPr lang="en-US">
-                <a:solidFill>
-                  <a:schemeClr val="tx1"/>
-                </a:solidFill>
-              </a:rPr>
-              <a:t>Ví dụ thực tế</a:t>
-            </a:r>
           </a:p>
         </p:txBody>
       </p:sp>
@@ -20627,11 +20627,11 @@
           <a:bodyPr/>
           <a:lstStyle/>
           <a:p>
+            <a:r>
+              <a:rPr lang="en-US"/>
+              <a:t>4</a:t>
+            </a:r>
             <a:endParaRPr lang="en-DE" dirty="0"/>
-            <a:r>
-              <a:rPr lang="en-US"/>
-              <a:t>4</a:t>
-            </a:r>
           </a:p>
         </p:txBody>
       </p:sp>
@@ -21504,19 +21504,19 @@
           <a:bodyPr/>
           <a:lstStyle/>
           <a:p>
+            <a:r>
+              <a:rPr lang="en-US">
+                <a:solidFill>
+                  <a:schemeClr val="tx1"/>
+                </a:solidFill>
+              </a:rPr>
+              <a:t>Lập trình</a:t>
+            </a:r>
             <a:endParaRPr lang="en-DE" dirty="0">
               <a:solidFill>
                 <a:schemeClr val="tx1"/>
               </a:solidFill>
             </a:endParaRPr>
-            <a:r>
-              <a:rPr lang="en-US">
-                <a:solidFill>
-                  <a:schemeClr val="tx1"/>
-                </a:solidFill>
-              </a:rPr>
-              <a:t>Lập trình</a:t>
-            </a:r>
           </a:p>
         </p:txBody>
       </p:sp>
@@ -21546,11 +21546,11 @@
           <a:bodyPr/>
           <a:lstStyle/>
           <a:p>
+            <a:r>
+              <a:rPr lang="en-US"/>
+              <a:t>5</a:t>
+            </a:r>
             <a:endParaRPr lang="en-DE" dirty="0"/>
-            <a:r>
-              <a:rPr lang="en-US"/>
-              <a:t>5</a:t>
-            </a:r>
           </a:p>
         </p:txBody>
       </p:sp>

--- a/slide/LPNVi_LONG_PRODUCTION_NAME_VIETNAMESE.pptx
+++ b/slide/LPNVi_LONG_PRODUCTION_NAME_VIETNAMESE.pptx
@@ -15354,7 +15354,7 @@
                   <a:schemeClr val="tx1"/>
                 </a:solidFill>
               </a:rPr>
-              <a:t>Tổng quan giải pháp</a:t>
+              <a:t>Solution Overview</a:t>
             </a:r>
             <a:endParaRPr lang="en-DE" dirty="0">
               <a:solidFill>
@@ -15993,7 +15993,7 @@
                 </a:solidFill>
                 <a:latin typeface="Calibri"/>
               </a:rPr>
-              <a:t>Ghép Mat. Desc + INSP</a:t>
+              <a:t>Concatenate Mat. Desc + INSP</a:t>
             </a:r>
           </a:p>
         </p:txBody>
@@ -16300,7 +16300,7 @@
                 </a:solidFill>
                 <a:latin typeface="Calibri"/>
               </a:rPr>
-              <a:t>Chứng từ</a:t>
+              <a:t>Warehouse &amp;</a:t>
             </a:r>
             <a:br/>
             <a:r>
@@ -16310,7 +16310,7 @@
                 </a:solidFill>
                 <a:latin typeface="Calibri"/>
               </a:rPr>
-              <a:t>kho / giao nhận</a:t>
+              <a:t>Delivery Notes</a:t>
             </a:r>
           </a:p>
         </p:txBody>
@@ -16652,7 +16652,7 @@
                 </a:solidFill>
                 <a:latin typeface="Calibri"/>
               </a:rPr>
-              <a:t>Hóa đơn</a:t>
+              <a:t>E-Invoice</a:t>
             </a:r>
             <a:br/>
             <a:r>
@@ -16662,7 +16662,7 @@
                 </a:solidFill>
                 <a:latin typeface="Calibri"/>
               </a:rPr>
-              <a:t>điện tử</a:t>
+              <a:t>Display</a:t>
             </a:r>
           </a:p>
         </p:txBody>
@@ -16697,7 +16697,7 @@
                 </a:solidFill>
                 <a:latin typeface="Calibri"/>
               </a:rPr>
-              <a:t>Tách separator "| "</a:t>
+              <a:t>Split on separator "| "</a:t>
             </a:r>
             <a:endParaRPr sz="1050" i="1" dirty="0">
               <a:solidFill>
@@ -16793,7 +16793,7 @@
                 </a:solidFill>
                 <a:latin typeface="Calibri"/>
               </a:rPr>
-              <a:t>Phạm vi: all BU nationwide  —  thứ tự ưu tiên CMIR › MG0156 › INSP.</a:t>
+              <a:t>Scope: all BU nationwide  —  logic priority CMIR › MG0156 › INSP.</a:t>
             </a:r>
           </a:p>
         </p:txBody>
@@ -16914,7 +16914,7 @@
                   <a:schemeClr val="tx1"/>
                 </a:solidFill>
               </a:rPr>
-              <a:t>Hiện trạng</a:t>
+              <a:t>Current Situation</a:t>
             </a:r>
             <a:endParaRPr lang="en-DE" dirty="0">
               <a:solidFill>
@@ -17043,7 +17043,7 @@
                 </a:solidFill>
                 <a:latin typeface="Arial"/>
               </a:rPr>
-              <a:t>Mat. Desc giới hạn 40 ký tự</a:t>
+              <a:t>Mat. Desc is capped at 40 characters</a:t>
             </a:r>
           </a:p>
         </p:txBody>
@@ -17078,7 +17078,7 @@
                 </a:solidFill>
                 <a:latin typeface="Arial"/>
               </a:rPr>
-              <a:t>Tên sản phẩm dài hơn 40 ký tự bị cắt cụt khi in ra chứng từ.</a:t>
+              <a:t>Names longer than 40 characters are truncated on printed documents.</a:t>
             </a:r>
           </a:p>
         </p:txBody>
@@ -17168,7 +17168,7 @@
                 </a:solidFill>
                 <a:latin typeface="Arial"/>
               </a:rPr>
-              <a:t>Đã enhance được một phần</a:t>
+              <a:t>Partly enhanced already</a:t>
             </a:r>
           </a:p>
         </p:txBody>
@@ -17203,7 +17203,7 @@
                 </a:solidFill>
                 <a:latin typeface="Arial"/>
               </a:rPr>
-              <a:t>CMIR cho khách Tender, Basis Text cho nhóm hàng MG0156.</a:t>
+              <a:t>CMIR for Tender customers, Basis Text for material group MG0156.</a:t>
             </a:r>
           </a:p>
         </p:txBody>
@@ -17293,7 +17293,7 @@
                 </a:solidFill>
                 <a:latin typeface="Arial"/>
               </a:rPr>
-              <a:t>Phần còn lại vẫn chưa xử lý</a:t>
+              <a:t>The remaining scope is still open</a:t>
             </a:r>
           </a:p>
         </p:txBody>
@@ -17328,7 +17328,7 @@
                 </a:solidFill>
                 <a:latin typeface="Arial"/>
               </a:rPr>
-              <a:t>Các BU khác chưa in được tên tiếng Việt có dấu, đầy đủ.</a:t>
+              <a:t>Other BUs cannot print the full Vietnamese name with diacritics.</a:t>
             </a:r>
           </a:p>
         </p:txBody>
@@ -17453,7 +17453,7 @@
                 </a:solidFill>
                 <a:latin typeface="Arial"/>
               </a:rPr>
-              <a:t>AS-IS  ·  Tên bị cắt</a:t>
+              <a:t>AS-IS  ·  Name truncated</a:t>
             </a:r>
           </a:p>
         </p:txBody>
@@ -17534,7 +17534,7 @@
                 </a:solidFill>
                 <a:latin typeface="Arial"/>
               </a:rPr>
-              <a:t>Tên đầy đủ cần in</a:t>
+              <a:t>Full name to be printed</a:t>
             </a:r>
           </a:p>
         </p:txBody>
@@ -17624,7 +17624,7 @@
                 </a:solidFill>
                 <a:latin typeface="Arial"/>
               </a:rPr>
-              <a:t>47 KÝ TỰ</a:t>
+              <a:t>47 CHARS</a:t>
             </a:r>
           </a:p>
         </p:txBody>
@@ -17705,7 +17705,7 @@
                 </a:solidFill>
                 <a:latin typeface="Arial"/>
               </a:rPr>
-              <a:t>Mat. Desc chứa được</a:t>
+              <a:t>What Mat. Desc can hold</a:t>
             </a:r>
           </a:p>
         </p:txBody>
@@ -17784,7 +17784,7 @@
                 </a:solidFill>
                 <a:latin typeface="Arial"/>
               </a:rPr>
-              <a:t>không dấu  ·  phần sau bị cắt</a:t>
+              <a:t>no diacritics  ·  rest is cut off</a:t>
             </a:r>
           </a:p>
         </p:txBody>
@@ -17839,7 +17839,7 @@
                 </a:solidFill>
                 <a:latin typeface="Arial"/>
               </a:rPr>
-              <a:t>40 KÝ TỰ</a:t>
+              <a:t>40 CHARS</a:t>
             </a:r>
           </a:p>
         </p:txBody>
@@ -17874,7 +17874,7 @@
                 </a:solidFill>
                 <a:latin typeface="Arial"/>
               </a:rPr>
-              <a:t>→ Hóa đơn / phiếu kho chỉ in được tên tiếng Anh, chưa đủ nghĩa.</a:t>
+              <a:t>→ Invoices and warehouse notes show the English name only.</a:t>
             </a:r>
           </a:p>
         </p:txBody>
@@ -17947,7 +17947,7 @@
                   <a:schemeClr val="tx1"/>
                 </a:solidFill>
               </a:rPr>
-              <a:t>Yêu cầu</a:t>
+              <a:t>Requirement</a:t>
             </a:r>
             <a:endParaRPr lang="en-DE" dirty="0">
               <a:solidFill>
@@ -18076,7 +18076,7 @@
                 </a:solidFill>
                 <a:latin typeface="Arial"/>
               </a:rPr>
-              <a:t>Tên dài, có dấu tiếng Việt</a:t>
+              <a:t>Long name with Vietnamese diacritics</a:t>
             </a:r>
           </a:p>
         </p:txBody>
@@ -18111,7 +18111,7 @@
                 </a:solidFill>
                 <a:latin typeface="Arial"/>
               </a:rPr>
-              <a:t>Vượt giới hạn 40 ký tự của Mat. Desc.</a:t>
+              <a:t>Beyond the 40-character limit of Mat. Desc.</a:t>
             </a:r>
           </a:p>
         </p:txBody>
@@ -18201,7 +18201,7 @@
                 </a:solidFill>
                 <a:latin typeface="Arial"/>
               </a:rPr>
-              <a:t>Trình bày 2 dòng trên hóa đơn</a:t>
+              <a:t>Two lines on the invoice</a:t>
             </a:r>
           </a:p>
         </p:txBody>
@@ -18236,7 +18236,7 @@
                 </a:solidFill>
                 <a:latin typeface="Arial"/>
               </a:rPr>
-              <a:t>Dòng 1 tiếng Việt, dòng 2 tiếng Anh chữ nhỏ hơn trên EIV.</a:t>
+              <a:t>Line 1 Vietnamese, line 2 English in a smaller font on EIV.</a:t>
             </a:r>
           </a:p>
         </p:txBody>
@@ -18326,7 +18326,7 @@
                 </a:solidFill>
                 <a:latin typeface="Arial"/>
               </a:rPr>
-              <a:t>Mở rộng sang chứng từ kho</a:t>
+              <a:t>Extend to warehouse documents</a:t>
             </a:r>
           </a:p>
         </p:txBody>
@@ -18361,7 +18361,7 @@
                 </a:solidFill>
                 <a:latin typeface="Arial"/>
               </a:rPr>
-              <a:t>Phiếu Giao Nhận, Phiếu Xuất Kho Đại Lý, Phiếu Xuất Kho Nội Bộ.</a:t>
+              <a:t>Delivery Note, Agent and Internal Goods Issue Notes.</a:t>
             </a:r>
           </a:p>
         </p:txBody>
@@ -18451,7 +18451,7 @@
                 </a:solidFill>
                 <a:latin typeface="Arial"/>
               </a:rPr>
-              <a:t>Phạm vi áp dụng</a:t>
+              <a:t>Scope</a:t>
             </a:r>
           </a:p>
         </p:txBody>
@@ -18611,7 +18611,7 @@
                 </a:solidFill>
                 <a:latin typeface="Arial"/>
               </a:rPr>
-              <a:t>TO-BE  ·  Hóa đơn điện tử</a:t>
+              <a:t>TO-BE  ·  Electronic invoice</a:t>
             </a:r>
           </a:p>
         </p:txBody>
@@ -18692,7 +18692,7 @@
                 </a:solidFill>
                 <a:latin typeface="Arial"/>
               </a:rPr>
-              <a:t>Tên hàng hóa, dịch vụ</a:t>
+              <a:t>Product / service description</a:t>
             </a:r>
           </a:p>
         </p:txBody>
@@ -18958,7 +18958,7 @@
                 </a:solidFill>
                 <a:latin typeface="Arial"/>
               </a:rPr>
-              <a:t>  Tiếng Việt có dấu — chữ lớn, dòng đầu</a:t>
+              <a:t>  Vietnamese with diacritics — larger, first line</a:t>
             </a:r>
           </a:p>
         </p:txBody>
@@ -19002,7 +19002,7 @@
                 </a:solidFill>
                 <a:latin typeface="Arial"/>
               </a:rPr>
-              <a:t>  Tiếng Anh — chữ nhỏ hơn, dòng dưới</a:t>
+              <a:t>  English — smaller font, second line</a:t>
             </a:r>
           </a:p>
         </p:txBody>
@@ -19037,7 +19037,7 @@
                 </a:solidFill>
                 <a:latin typeface="Arial"/>
               </a:rPr>
-              <a:t>→ Áp dụng cho EIV và cả PGN / PXKDL / PXKNB.</a:t>
+              <a:t>→ Applies to EIV and to PGN / PXKDL / PXKNB.</a:t>
             </a:r>
           </a:p>
         </p:txBody>
@@ -19110,7 +19110,7 @@
                   <a:schemeClr val="tx1"/>
                 </a:solidFill>
               </a:rPr>
-              <a:t>Giải pháp</a:t>
+              <a:t>Solution</a:t>
             </a:r>
             <a:endParaRPr lang="en-DE" dirty="0">
               <a:solidFill>
@@ -19285,7 +19285,7 @@
                 </a:solidFill>
                 <a:latin typeface="Arial"/>
               </a:rPr>
-              <a:t>max 40 ký tự</a:t>
+              <a:t>max 40 chars</a:t>
             </a:r>
           </a:p>
         </p:txBody>
@@ -19320,7 +19320,7 @@
                 </a:solidFill>
                 <a:latin typeface="Arial"/>
               </a:rPr>
-              <a:t>Tên tiếng Anh (default)</a:t>
+              <a:t>English name (default)</a:t>
             </a:r>
           </a:p>
         </p:txBody>
@@ -19456,7 +19456,7 @@
                 </a:solidFill>
                 <a:latin typeface="Arial"/>
               </a:rPr>
-              <a:t>max 220 ký tự</a:t>
+              <a:t>max 220 chars</a:t>
             </a:r>
           </a:p>
         </p:txBody>
@@ -19491,7 +19491,7 @@
                 </a:solidFill>
                 <a:latin typeface="Arial"/>
               </a:rPr>
-              <a:t>Tên tiếng Việt có dấu</a:t>
+              <a:t>Vietnamese name, with diacritics</a:t>
             </a:r>
           </a:p>
         </p:txBody>
@@ -19603,7 +19603,7 @@
                 </a:solidFill>
                 <a:latin typeface="Arial"/>
               </a:rPr>
-              <a:t>nối bằng separator  "| "</a:t>
+              <a:t>joined by separator  "| "</a:t>
             </a:r>
           </a:p>
         </p:txBody>
@@ -19684,7 +19684,7 @@
                 </a:solidFill>
                 <a:latin typeface="Arial"/>
               </a:rPr>
-              <a:t>Chuỗi gửi sang EIV VNPT</a:t>
+              <a:t>String sent to EIV VNPT</a:t>
             </a:r>
           </a:p>
         </p:txBody>
@@ -19772,7 +19772,7 @@
                 </a:solidFill>
                 <a:latin typeface="Arial"/>
               </a:rPr>
-              <a:t>Thứ tự ưu tiên logic</a:t>
+              <a:t>Logic priority</a:t>
             </a:r>
           </a:p>
         </p:txBody>
@@ -19888,7 +19888,7 @@
                 </a:solidFill>
                 <a:latin typeface="Arial"/>
               </a:rPr>
-              <a:t>khách Tender</a:t>
+              <a:t>Tender customers</a:t>
             </a:r>
           </a:p>
         </p:txBody>
@@ -20204,7 +20204,7 @@
                 </a:solidFill>
                 <a:latin typeface="Arial"/>
               </a:rPr>
-              <a:t>phần còn lại</a:t>
+              <a:t>everything else</a:t>
             </a:r>
           </a:p>
         </p:txBody>
@@ -20364,7 +20364,7 @@
                 </a:solidFill>
                 <a:latin typeface="Arial"/>
               </a:rPr>
-              <a:t>INSP chứa được 220 ký tự và giữ nguyên dấu tiếng Việt.</a:t>
+              <a:t>INSP holds 220 characters and keeps Vietnamese diacritics.</a:t>
             </a:r>
           </a:p>
         </p:txBody>
@@ -20441,7 +20441,7 @@
                 </a:solidFill>
                 <a:latin typeface="Arial"/>
               </a:rPr>
-              <a:t>Mat. Desc giữ nguyên như hiện tại — không phải sửa master data cũ.</a:t>
+              <a:t>Mat. Desc stays as it is — no rework on existing master data.</a:t>
             </a:r>
           </a:p>
         </p:txBody>
@@ -20518,7 +20518,7 @@
                 </a:solidFill>
                 <a:latin typeface="Arial"/>
               </a:rPr>
-              <a:t>VNPT tách chuỗi theo "| " để xếp thành 2 dòng trên hóa đơn.</a:t>
+              <a:t>VNPT splits the string on "| " and lays it out on two lines.</a:t>
             </a:r>
           </a:p>
         </p:txBody>
@@ -20591,7 +20591,7 @@
                   <a:schemeClr val="tx1"/>
                 </a:solidFill>
               </a:rPr>
-              <a:t>Ví dụ thực tế</a:t>
+              <a:t>Worked Example</a:t>
             </a:r>
             <a:endParaRPr lang="en-DE" dirty="0">
               <a:solidFill>
@@ -20665,7 +20665,7 @@
                 </a:solidFill>
                 <a:latin typeface="Arial"/>
               </a:rPr>
-              <a:t>Master data nhập vào</a:t>
+              <a:t>Master data entered</a:t>
             </a:r>
           </a:p>
         </p:txBody>
@@ -20932,7 +20932,7 @@
                 </a:solidFill>
                 <a:latin typeface="Arial"/>
               </a:rPr>
-              <a:t>Chuỗi SAP ghép và gửi sang EIV</a:t>
+              <a:t>String SAP builds and sends to EIV</a:t>
             </a:r>
           </a:p>
         </p:txBody>
@@ -21066,7 +21066,7 @@
                 </a:solidFill>
                 <a:latin typeface="Arial"/>
               </a:rPr>
-              <a:t>● Mat. Desc — tiếng Anh</a:t>
+              <a:t>● Mat. Desc — English</a:t>
             </a:r>
             <a:r>
               <a:rPr sz="950" b="1">
@@ -21084,7 +21084,7 @@
                 </a:solidFill>
                 <a:latin typeface="Arial"/>
               </a:rPr>
-              <a:t>      ● INSP — tiếng Việt có dấu</a:t>
+              <a:t>      ● INSP — Vietnamese with diacritics</a:t>
             </a:r>
           </a:p>
         </p:txBody>
@@ -21119,7 +21119,7 @@
                 </a:solidFill>
                 <a:latin typeface="Arial"/>
               </a:rPr>
-              <a:t>Kết quả trình bày trên hóa đơn / phiếu kho</a:t>
+              <a:t>How it prints on the invoice / warehouse note</a:t>
             </a:r>
           </a:p>
         </p:txBody>
@@ -21325,7 +21325,7 @@
                 </a:solidFill>
                 <a:latin typeface="Arial"/>
               </a:rPr>
-              <a:t>Tên hàng hóa, dịch vụ</a:t>
+              <a:t>Product / service description</a:t>
             </a:r>
           </a:p>
         </p:txBody>
@@ -21510,7 +21510,7 @@
                   <a:schemeClr val="tx1"/>
                 </a:solidFill>
               </a:rPr>
-              <a:t>Lập trình</a:t>
+              <a:t>Development</a:t>
             </a:r>
             <a:endParaRPr lang="en-DE" dirty="0">
               <a:solidFill>
@@ -21861,7 +21861,7 @@
                 </a:solidFill>
                 <a:latin typeface="Arial"/>
               </a:rPr>
-              <a:t>Ghép Mat. Desc + INSP text</a:t>
+              <a:t>Concatenate Mat. Desc + INSP text</a:t>
             </a:r>
           </a:p>
         </p:txBody>
@@ -21951,7 +21951,7 @@
                 </a:solidFill>
                 <a:latin typeface="Arial"/>
               </a:rPr>
-              <a:t>Chèn separator "| "</a:t>
+              <a:t>Insert separator "| "</a:t>
             </a:r>
           </a:p>
         </p:txBody>
@@ -22041,7 +22041,7 @@
                 </a:solidFill>
                 <a:latin typeface="Arial"/>
               </a:rPr>
-              <a:t>Áp thứ tự CMIR › MG0156 › INSP</a:t>
+              <a:t>Apply priority CMIR › MG0156 › INSP</a:t>
             </a:r>
           </a:p>
         </p:txBody>
@@ -22221,7 +22221,7 @@
                 </a:solidFill>
                 <a:latin typeface="Arial"/>
               </a:rPr>
-              <a:t>Form chứng từ kho</a:t>
+              <a:t>Warehouse &amp; delivery forms</a:t>
             </a:r>
           </a:p>
         </p:txBody>
@@ -22353,7 +22353,7 @@
                 </a:solidFill>
                 <a:latin typeface="Arial"/>
               </a:rPr>
-              <a:t>Phiếu Giao Nhận (PGN)</a:t>
+              <a:t>Delivery Note (PGN)</a:t>
             </a:r>
           </a:p>
         </p:txBody>
@@ -22443,7 +22443,7 @@
                 </a:solidFill>
                 <a:latin typeface="Arial"/>
               </a:rPr>
-              <a:t>Phiếu Xuất Kho Đại Lý (PXKDL)</a:t>
+              <a:t>Agent Goods Issue Note (PXKDL)</a:t>
             </a:r>
           </a:p>
         </p:txBody>
@@ -22533,7 +22533,7 @@
                 </a:solidFill>
                 <a:latin typeface="Arial"/>
               </a:rPr>
-              <a:t>Phiếu Xuất Kho Nội Bộ (PXKNB)</a:t>
+              <a:t>Internal Goods Issue Note (PXKNB)</a:t>
             </a:r>
           </a:p>
         </p:txBody>
@@ -22713,7 +22713,7 @@
                 </a:solidFill>
                 <a:latin typeface="Arial"/>
               </a:rPr>
-              <a:t>Hóa đơn điện tử EIV</a:t>
+              <a:t>E-invoice (EIV)</a:t>
             </a:r>
           </a:p>
         </p:txBody>
@@ -22845,7 +22845,7 @@
                 </a:solidFill>
                 <a:latin typeface="Arial"/>
               </a:rPr>
-              <a:t>Nhận biết separator "| "</a:t>
+              <a:t>Detect the separator "| "</a:t>
             </a:r>
           </a:p>
         </p:txBody>
@@ -22935,7 +22935,7 @@
                 </a:solidFill>
                 <a:latin typeface="Arial"/>
               </a:rPr>
-              <a:t>Tách thành 2 dòng</a:t>
+              <a:t>Split into two lines</a:t>
             </a:r>
           </a:p>
         </p:txBody>
@@ -23025,7 +23025,7 @@
                 </a:solidFill>
                 <a:latin typeface="Arial"/>
               </a:rPr>
-              <a:t>Tiếng Anh cỡ chữ nhỏ hơn</a:t>
+              <a:t>English in a smaller font</a:t>
             </a:r>
           </a:p>
         </p:txBody>
@@ -23060,7 +23060,7 @@
                 </a:solidFill>
                 <a:latin typeface="Arial"/>
               </a:rPr>
-              <a:t>Ba nhánh chạy song song — master data setup xong trước khi go-live.</a:t>
+              <a:t>Three parallel workstreams — master data setup must be done before go-live.</a:t>
             </a:r>
           </a:p>
         </p:txBody>
@@ -23131,7 +23131,7 @@
           <a:p>
             <a:r>
               <a:rPr lang="en-US"/>
-              <a:t>Tóm lại</a:t>
+              <a:t>Summary</a:t>
             </a:r>
           </a:p>
         </p:txBody>
@@ -23264,7 +23264,7 @@
                     <a:p>
                       <a:r>
                         <a:rPr lang="en-US" sz="2000"/>
-                        <a:t>Nội dung</a:t>
+                        <a:t>Item</a:t>
                       </a:r>
                     </a:p>
                   </a:txBody>
@@ -23277,7 +23277,7 @@
                     <a:p>
                       <a:r>
                         <a:rPr lang="en-US" sz="2000"/>
-                        <a:t>Ai làm</a:t>
+                        <a:t>Owner</a:t>
                       </a:r>
                     </a:p>
                   </a:txBody>
@@ -23290,7 +23290,7 @@
                     <a:p>
                       <a:r>
                         <a:rPr lang="en-US" sz="2000"/>
-                        <a:t>Trạng thái</a:t>
+                        <a:t>Status</a:t>
                       </a:r>
                     </a:p>
                   </a:txBody>
@@ -23323,7 +23323,7 @@
                     <a:p>
                       <a:r>
                         <a:rPr lang="en-US" sz="1800"/>
-                        <a:t>Phạm vi: all BU nationwide</a:t>
+                        <a:t>Scope: all BU nationwide</a:t>
                       </a:r>
                     </a:p>
                   </a:txBody>
@@ -23353,7 +23353,7 @@
                             <a:srgbClr val="BE0028"/>
                           </a:solidFill>
                         </a:rPr>
-                        <a:t>Đã chốt</a:t>
+                        <a:t>Confirmed</a:t>
                       </a:r>
                     </a:p>
                   </a:txBody>
@@ -23449,7 +23449,7 @@
                     <a:p>
                       <a:r>
                         <a:rPr lang="en-US" sz="1800"/>
-                        <a:t>Ưu tiên: CMIR › MG0156 › INSP</a:t>
+                        <a:t>Priority: CMIR › MG0156 › INSP</a:t>
                       </a:r>
                     </a:p>
                   </a:txBody>
@@ -23479,7 +23479,7 @@
                             <a:srgbClr val="BE0028"/>
                           </a:solidFill>
                         </a:rPr>
-                        <a:t>Lập trình</a:t>
+                        <a:t>Develop</a:t>
                       </a:r>
                     </a:p>
                   </a:txBody>
@@ -23512,7 +23512,7 @@
                     <a:p>
                       <a:r>
                         <a:rPr lang="en-US" sz="1800"/>
-                        <a:t>Dentsply: xóa hết record CMIR trước</a:t>
+                        <a:t>Dentsply: remove all CMIR records first</a:t>
                       </a:r>
                     </a:p>
                   </a:txBody>
@@ -23542,7 +23542,7 @@
                             <a:srgbClr val="6B6B6B"/>
                           </a:solidFill>
                         </a:rPr>
-                        <a:t>Lưu ý</a:t>
+                        <a:t>Action</a:t>
                       </a:r>
                     </a:p>
                   </a:txBody>
